--- a/slides/slides_PICES.pptx
+++ b/slides/slides_PICES.pptx
@@ -4,6 +4,9 @@
   <p:sldMasterIdLst>
     <p:sldMasterId id="2147483648" r:id="rId1"/>
   </p:sldMasterIdLst>
+  <p:notesMasterIdLst>
+    <p:notesMasterId r:id="rId30"/>
+  </p:notesMasterIdLst>
   <p:sldIdLst>
     <p:sldId id="256" r:id="rId2"/>
     <p:sldId id="257" r:id="rId3"/>
@@ -34,9 +37,6 @@
     <p:sldId id="282" r:id="rId28"/>
     <p:sldId id="283" r:id="rId29"/>
   </p:sldIdLst>
-  <p:notesMasterIdLst>
-    <p:notesMasterId r:id="rId30"/>
-  </p:notesMasterIdLst>
   <p:sldSz cx="12192000" cy="6858000"/>
   <p:notesSz cx="6858000" cy="12192000"/>
   <p:defaultTextStyle>
@@ -131,6 +131,11 @@
       </a:defRPr>
     </a:lvl9pPr>
   </p:defaultTextStyle>
+  <p:extLst>
+    <p:ext uri="{EFAFB233-063F-42B5-8137-9DF3F51BA10A}">
+      <p15:sldGuideLst xmlns:p15="http://schemas.microsoft.com/office/powerpoint/2012/main"/>
+    </p:ext>
+  </p:extLst>
 </p:presentation>
 </file>
 
@@ -156,234 +161,10 @@
           <a:chExt cx="0" cy="0"/>
         </a:xfrm>
       </p:grpSpPr>
-      <p:sp>
-        <p:nvSpPr>
-          <p:cNvPr id="2" name="Header Placeholder 1"/>
-          <p:cNvSpPr>
-            <a:spLocks noGrp="1"/>
-          </p:cNvSpPr>
-          <p:nvPr>
-            <p:ph type="hdr" sz="quarter"/>
-          </p:nvPr>
-        </p:nvSpPr>
-        <p:spPr>
-          <a:xfrm>
-            <a:off x="0" y="0"/>
-            <a:ext cx="2971800" cy="458788"/>
-          </a:xfrm>
-          <a:prstGeom prst="rect">
-            <a:avLst/>
-          </a:prstGeom>
-        </p:spPr>
-        <p:txBody>
-          <a:bodyPr vert="horz" lIns="91440" tIns="45720" rIns="91440" bIns="45720" rtlCol="0"/>
-          <a:lstStyle>
-            <a:lvl1pPr algn="l">
-              <a:defRPr sz="1200"/>
-            </a:lvl1pPr>
-          </a:lstStyle>
-          <a:p>
-            <a:endParaRPr lang="en-US"/>
-          </a:p>
-        </p:txBody>
-      </p:sp>
-      <p:sp>
-        <p:nvSpPr>
-          <p:cNvPr id="3" name="Date Placeholder 2"/>
-          <p:cNvSpPr>
-            <a:spLocks noGrp="1"/>
-          </p:cNvSpPr>
-          <p:nvPr>
-            <p:ph type="dt" idx="1"/>
-          </p:nvPr>
-        </p:nvSpPr>
-        <p:spPr>
-          <a:xfrm>
-            <a:off x="3884613" y="0"/>
-            <a:ext cx="2971800" cy="458788"/>
-          </a:xfrm>
-          <a:prstGeom prst="rect">
-            <a:avLst/>
-          </a:prstGeom>
-        </p:spPr>
-        <p:txBody>
-          <a:bodyPr vert="horz" lIns="91440" tIns="45720" rIns="91440" bIns="45720" rtlCol="0"/>
-          <a:lstStyle>
-            <a:lvl1pPr algn="r">
-              <a:defRPr sz="1200"/>
-            </a:lvl1pPr>
-          </a:lstStyle>
-          <a:p>
-            <a:fld id="{5282F153-3F37-0F45-9E97-73ACFA13230C}" type="datetimeFigureOut">
-              <a:rPr lang="en-US"/>
-              <a:t>7/23/19</a:t>
-            </a:fld>
-            <a:endParaRPr lang="en-US"/>
-          </a:p>
-        </p:txBody>
-      </p:sp>
-      <p:sp>
-        <p:nvSpPr>
-          <p:cNvPr id="4" name="Slide Image Placeholder 3"/>
-          <p:cNvSpPr>
-            <a:spLocks noGrp="1" noRot="1" noChangeAspect="1"/>
-          </p:cNvSpPr>
-          <p:nvPr>
-            <p:ph type="sldImg" idx="2"/>
-          </p:nvPr>
-        </p:nvSpPr>
-        <p:spPr>
-          <a:xfrm>
-            <a:off x="685800" y="1143000"/>
-            <a:ext cx="5486400" cy="3086100"/>
-          </a:xfrm>
-          <a:prstGeom prst="rect">
-            <a:avLst/>
-          </a:prstGeom>
-          <a:noFill/>
-          <a:ln w="12700">
-            <a:solidFill>
-              <a:prstClr val="black"/>
-            </a:solidFill>
-          </a:ln>
-        </p:spPr>
-        <p:txBody>
-          <a:bodyPr vert="horz" lIns="91440" tIns="45720" rIns="91440" bIns="45720" rtlCol="0" anchor="ctr"/>
-          <a:lstStyle/>
-          <a:p>
-            <a:endParaRPr lang="en-US"/>
-          </a:p>
-        </p:txBody>
-      </p:sp>
-      <p:sp>
-        <p:nvSpPr>
-          <p:cNvPr id="5" name="Notes Placeholder 4"/>
-          <p:cNvSpPr>
-            <a:spLocks noGrp="1"/>
-          </p:cNvSpPr>
-          <p:nvPr>
-            <p:ph type="body" sz="quarter" idx="3"/>
-          </p:nvPr>
-        </p:nvSpPr>
-        <p:spPr>
-          <a:xfrm>
-            <a:off x="685800" y="4400550"/>
-            <a:ext cx="5486400" cy="3600450"/>
-          </a:xfrm>
-          <a:prstGeom prst="rect">
-            <a:avLst/>
-          </a:prstGeom>
-        </p:spPr>
-        <p:txBody>
-          <a:bodyPr vert="horz" lIns="91440" tIns="45720" rIns="91440" bIns="45720" rtlCol="0"/>
-          <a:lstStyle/>
-          <a:p>
-            <a:pPr lvl="0"/>
-            <a:r>
-              <a:rPr lang="en-US"/>
-              <a:t>Click to edit Master text styles</a:t>
-            </a:r>
-          </a:p>
-          <a:p>
-            <a:pPr lvl="1"/>
-            <a:r>
-              <a:rPr lang="en-US"/>
-              <a:t>Second level</a:t>
-            </a:r>
-          </a:p>
-          <a:p>
-            <a:pPr lvl="2"/>
-            <a:r>
-              <a:rPr lang="en-US"/>
-              <a:t>Third level</a:t>
-            </a:r>
-          </a:p>
-          <a:p>
-            <a:pPr lvl="3"/>
-            <a:r>
-              <a:rPr lang="en-US"/>
-              <a:t>Fourth level</a:t>
-            </a:r>
-          </a:p>
-          <a:p>
-            <a:pPr lvl="4"/>
-            <a:r>
-              <a:rPr lang="en-US"/>
-              <a:t>Fifth level</a:t>
-            </a:r>
-          </a:p>
-        </p:txBody>
-      </p:sp>
-      <p:sp>
-        <p:nvSpPr>
-          <p:cNvPr id="6" name="Footer Placeholder 5"/>
-          <p:cNvSpPr>
-            <a:spLocks noGrp="1"/>
-          </p:cNvSpPr>
-          <p:nvPr>
-            <p:ph type="ftr" sz="quarter" idx="4"/>
-          </p:nvPr>
-        </p:nvSpPr>
-        <p:spPr>
-          <a:xfrm>
-            <a:off x="0" y="8685213"/>
-            <a:ext cx="2971800" cy="458787"/>
-          </a:xfrm>
-          <a:prstGeom prst="rect">
-            <a:avLst/>
-          </a:prstGeom>
-        </p:spPr>
-        <p:txBody>
-          <a:bodyPr vert="horz" lIns="91440" tIns="45720" rIns="91440" bIns="45720" rtlCol="0" anchor="b"/>
-          <a:lstStyle>
-            <a:lvl1pPr algn="l">
-              <a:defRPr sz="1200"/>
-            </a:lvl1pPr>
-          </a:lstStyle>
-          <a:p>
-            <a:endParaRPr lang="en-US"/>
-          </a:p>
-        </p:txBody>
-      </p:sp>
-      <p:sp>
-        <p:nvSpPr>
-          <p:cNvPr id="7" name="Slide Number Placeholder 6"/>
-          <p:cNvSpPr>
-            <a:spLocks noGrp="1"/>
-          </p:cNvSpPr>
-          <p:nvPr>
-            <p:ph type="sldNum" sz="quarter" idx="5"/>
-          </p:nvPr>
-        </p:nvSpPr>
-        <p:spPr>
-          <a:xfrm>
-            <a:off x="3884613" y="8685213"/>
-            <a:ext cx="2971800" cy="458787"/>
-          </a:xfrm>
-          <a:prstGeom prst="rect">
-            <a:avLst/>
-          </a:prstGeom>
-        </p:spPr>
-        <p:txBody>
-          <a:bodyPr vert="horz" lIns="91440" tIns="45720" rIns="91440" bIns="45720" rtlCol="0" anchor="b"/>
-          <a:lstStyle>
-            <a:lvl1pPr algn="r">
-              <a:defRPr sz="1200"/>
-            </a:lvl1pPr>
-          </a:lstStyle>
-          <a:p>
-            <a:fld id="{CE5E9CC1-C706-0F49-92D6-E571CC5EEA8F}" type="slidenum">
-              <a:rPr lang="en-US"/>
-              <a:t>‹#›</a:t>
-            </a:fld>
-            <a:endParaRPr lang="en-US"/>
-          </a:p>
-        </p:txBody>
-      </p:sp>
     </p:spTree>
     <p:extLst>
       <p:ext uri="{BB962C8B-B14F-4D97-AF65-F5344CB8AC3E}">
-        <p14:creationId xmlns:p14="http://schemas.microsoft.com/office/powerpoint/2010/main" val="1024086991"/>
+        <p14:creationId xmlns:p14="http://schemas.microsoft.com/office/powerpoint/2010/main" val="660462202"/>
       </p:ext>
     </p:extLst>
   </p:cSld>
@@ -527,10 +308,6 @@
           <a:bodyPr/>
           <a:lstStyle/>
           <a:p>
-            <a:r>
-              <a:rPr lang="en-US" dirty="0"/>
-              <a:t/>
-            </a:r>
             <a:endParaRPr lang="en-US" dirty="0"/>
           </a:p>
         </p:txBody>
@@ -615,10 +392,6 @@
           <a:bodyPr/>
           <a:lstStyle/>
           <a:p>
-            <a:r>
-              <a:rPr lang="en-US" dirty="0"/>
-              <a:t/>
-            </a:r>
             <a:endParaRPr lang="en-US" dirty="0"/>
           </a:p>
         </p:txBody>
@@ -703,10 +476,6 @@
           <a:bodyPr/>
           <a:lstStyle/>
           <a:p>
-            <a:r>
-              <a:rPr lang="en-US" dirty="0"/>
-              <a:t/>
-            </a:r>
             <a:endParaRPr lang="en-US" dirty="0"/>
           </a:p>
         </p:txBody>
@@ -791,10 +560,6 @@
           <a:bodyPr/>
           <a:lstStyle/>
           <a:p>
-            <a:r>
-              <a:rPr lang="en-US" dirty="0"/>
-              <a:t/>
-            </a:r>
             <a:endParaRPr lang="en-US" dirty="0"/>
           </a:p>
         </p:txBody>
@@ -879,10 +644,6 @@
           <a:bodyPr/>
           <a:lstStyle/>
           <a:p>
-            <a:r>
-              <a:rPr lang="en-US" dirty="0"/>
-              <a:t/>
-            </a:r>
             <a:endParaRPr lang="en-US" dirty="0"/>
           </a:p>
         </p:txBody>
@@ -967,10 +728,6 @@
           <a:bodyPr/>
           <a:lstStyle/>
           <a:p>
-            <a:r>
-              <a:rPr lang="en-US" dirty="0"/>
-              <a:t/>
-            </a:r>
             <a:endParaRPr lang="en-US" dirty="0"/>
           </a:p>
         </p:txBody>
@@ -1055,10 +812,6 @@
           <a:bodyPr/>
           <a:lstStyle/>
           <a:p>
-            <a:r>
-              <a:rPr lang="en-US" dirty="0"/>
-              <a:t/>
-            </a:r>
             <a:endParaRPr lang="en-US" dirty="0"/>
           </a:p>
         </p:txBody>
@@ -1143,10 +896,6 @@
           <a:bodyPr/>
           <a:lstStyle/>
           <a:p>
-            <a:r>
-              <a:rPr lang="en-US" dirty="0"/>
-              <a:t/>
-            </a:r>
             <a:endParaRPr lang="en-US" dirty="0"/>
           </a:p>
         </p:txBody>
@@ -1231,10 +980,6 @@
           <a:bodyPr/>
           <a:lstStyle/>
           <a:p>
-            <a:r>
-              <a:rPr lang="en-US" dirty="0"/>
-              <a:t/>
-            </a:r>
             <a:endParaRPr lang="en-US" dirty="0"/>
           </a:p>
         </p:txBody>
@@ -1319,10 +1064,6 @@
           <a:bodyPr/>
           <a:lstStyle/>
           <a:p>
-            <a:r>
-              <a:rPr lang="en-US" dirty="0"/>
-              <a:t/>
-            </a:r>
             <a:endParaRPr lang="en-US" dirty="0"/>
           </a:p>
         </p:txBody>
@@ -1407,10 +1148,6 @@
           <a:bodyPr/>
           <a:lstStyle/>
           <a:p>
-            <a:r>
-              <a:rPr lang="en-US" dirty="0"/>
-              <a:t/>
-            </a:r>
             <a:endParaRPr lang="en-US" dirty="0"/>
           </a:p>
         </p:txBody>
@@ -1495,10 +1232,6 @@
           <a:bodyPr/>
           <a:lstStyle/>
           <a:p>
-            <a:r>
-              <a:rPr lang="en-US" dirty="0"/>
-              <a:t/>
-            </a:r>
             <a:endParaRPr lang="en-US" dirty="0"/>
           </a:p>
         </p:txBody>
@@ -1583,10 +1316,6 @@
           <a:bodyPr/>
           <a:lstStyle/>
           <a:p>
-            <a:r>
-              <a:rPr lang="en-US" dirty="0"/>
-              <a:t/>
-            </a:r>
             <a:endParaRPr lang="en-US" dirty="0"/>
           </a:p>
         </p:txBody>
@@ -1671,10 +1400,6 @@
           <a:bodyPr/>
           <a:lstStyle/>
           <a:p>
-            <a:r>
-              <a:rPr lang="en-US" dirty="0"/>
-              <a:t/>
-            </a:r>
             <a:endParaRPr lang="en-US" dirty="0"/>
           </a:p>
         </p:txBody>
@@ -1759,10 +1484,6 @@
           <a:bodyPr/>
           <a:lstStyle/>
           <a:p>
-            <a:r>
-              <a:rPr lang="en-US" dirty="0"/>
-              <a:t/>
-            </a:r>
             <a:endParaRPr lang="en-US" dirty="0"/>
           </a:p>
         </p:txBody>
@@ -1847,10 +1568,6 @@
           <a:bodyPr/>
           <a:lstStyle/>
           <a:p>
-            <a:r>
-              <a:rPr lang="en-US" dirty="0"/>
-              <a:t/>
-            </a:r>
             <a:endParaRPr lang="en-US" dirty="0"/>
           </a:p>
         </p:txBody>
@@ -1935,10 +1652,6 @@
           <a:bodyPr/>
           <a:lstStyle/>
           <a:p>
-            <a:r>
-              <a:rPr lang="en-US" dirty="0"/>
-              <a:t/>
-            </a:r>
             <a:endParaRPr lang="en-US" dirty="0"/>
           </a:p>
         </p:txBody>
@@ -2023,10 +1736,6 @@
           <a:bodyPr/>
           <a:lstStyle/>
           <a:p>
-            <a:r>
-              <a:rPr lang="en-US" dirty="0"/>
-              <a:t/>
-            </a:r>
             <a:endParaRPr lang="en-US" dirty="0"/>
           </a:p>
         </p:txBody>
@@ -2111,10 +1820,6 @@
           <a:bodyPr/>
           <a:lstStyle/>
           <a:p>
-            <a:r>
-              <a:rPr lang="en-US" dirty="0"/>
-              <a:t/>
-            </a:r>
             <a:endParaRPr lang="en-US" dirty="0"/>
           </a:p>
         </p:txBody>
@@ -2199,10 +1904,6 @@
           <a:bodyPr/>
           <a:lstStyle/>
           <a:p>
-            <a:r>
-              <a:rPr lang="en-US" dirty="0"/>
-              <a:t/>
-            </a:r>
             <a:endParaRPr lang="en-US" dirty="0"/>
           </a:p>
         </p:txBody>
@@ -2287,10 +1988,6 @@
           <a:bodyPr/>
           <a:lstStyle/>
           <a:p>
-            <a:r>
-              <a:rPr lang="en-US" dirty="0"/>
-              <a:t/>
-            </a:r>
             <a:endParaRPr lang="en-US" dirty="0"/>
           </a:p>
         </p:txBody>
@@ -2375,10 +2072,6 @@
           <a:bodyPr/>
           <a:lstStyle/>
           <a:p>
-            <a:r>
-              <a:rPr lang="en-US" dirty="0"/>
-              <a:t/>
-            </a:r>
             <a:endParaRPr lang="en-US" dirty="0"/>
           </a:p>
         </p:txBody>
@@ -2463,10 +2156,6 @@
           <a:bodyPr/>
           <a:lstStyle/>
           <a:p>
-            <a:r>
-              <a:rPr lang="en-US" dirty="0"/>
-              <a:t/>
-            </a:r>
             <a:endParaRPr lang="en-US" dirty="0"/>
           </a:p>
         </p:txBody>
@@ -2551,10 +2240,6 @@
           <a:bodyPr/>
           <a:lstStyle/>
           <a:p>
-            <a:r>
-              <a:rPr lang="en-US" dirty="0"/>
-              <a:t/>
-            </a:r>
             <a:endParaRPr lang="en-US" dirty="0"/>
           </a:p>
         </p:txBody>
@@ -2639,10 +2324,6 @@
           <a:bodyPr/>
           <a:lstStyle/>
           <a:p>
-            <a:r>
-              <a:rPr lang="en-US" dirty="0"/>
-              <a:t/>
-            </a:r>
             <a:endParaRPr lang="en-US" dirty="0"/>
           </a:p>
         </p:txBody>
@@ -2727,10 +2408,6 @@
           <a:bodyPr/>
           <a:lstStyle/>
           <a:p>
-            <a:r>
-              <a:rPr lang="en-US" dirty="0"/>
-              <a:t/>
-            </a:r>
             <a:endParaRPr lang="en-US" dirty="0"/>
           </a:p>
         </p:txBody>
@@ -2815,10 +2492,6 @@
           <a:bodyPr/>
           <a:lstStyle/>
           <a:p>
-            <a:r>
-              <a:rPr lang="en-US" dirty="0"/>
-              <a:t/>
-            </a:r>
             <a:endParaRPr lang="en-US" dirty="0"/>
           </a:p>
         </p:txBody>
@@ -2903,10 +2576,6 @@
           <a:bodyPr/>
           <a:lstStyle/>
           <a:p>
-            <a:r>
-              <a:rPr lang="en-US" dirty="0"/>
-              <a:t/>
-            </a:r>
             <a:endParaRPr lang="en-US" dirty="0"/>
           </a:p>
         </p:txBody>
@@ -2980,6 +2649,11 @@
 <file path=ppt/slideMasters/slideMaster1.xml><?xml version="1.0" encoding="utf-8"?>
 <p:sldMaster xmlns:a="http://schemas.openxmlformats.org/drawingml/2006/main" xmlns:r="http://schemas.openxmlformats.org/officeDocument/2006/relationships" xmlns:p="http://schemas.openxmlformats.org/presentationml/2006/main">
   <p:cSld>
+    <p:bg>
+      <p:bgRef idx="1001">
+        <a:schemeClr val="bg1"/>
+      </p:bgRef>
+    </p:bg>
     <p:spTree>
       <p:nvGrpSpPr>
         <p:cNvPr id="1" name=""/>
@@ -3262,6 +2936,7 @@
         <a:solidFill>
           <a:srgbClr val="113B63"/>
         </a:solidFill>
+        <a:effectLst/>
       </p:bgPr>
     </p:bg>
     <p:spTree>
@@ -3286,8 +2961,8 @@
         </p:nvSpPr>
         <p:spPr>
           <a:xfrm>
-            <a:off x="914400" y="2468880"/>
-            <a:ext cx="731520" cy="54864"/>
+            <a:off x="914398" y="3383835"/>
+            <a:ext cx="4483713" cy="45719"/>
           </a:xfrm>
           <a:prstGeom prst="rect">
             <a:avLst/>
@@ -3302,6 +2977,16 @@
             <a:prstDash val="solid"/>
           </a:ln>
         </p:spPr>
+        <p:txBody>
+          <a:bodyPr/>
+          <a:lstStyle/>
+          <a:p>
+            <a:endParaRPr lang="es-CL">
+              <a:latin typeface="Poppins" panose="00000500000000000000" pitchFamily="2" charset="0"/>
+              <a:cs typeface="Poppins" panose="00000500000000000000" pitchFamily="2" charset="0"/>
+            </a:endParaRPr>
+          </a:p>
+        </p:txBody>
       </p:sp>
       <p:sp>
         <p:nvSpPr>
@@ -3311,8 +2996,8 @@
         </p:nvSpPr>
         <p:spPr>
           <a:xfrm>
-            <a:off x="914400" y="1463040"/>
-            <a:ext cx="10362895" cy="502920"/>
+            <a:off x="914398" y="1863290"/>
+            <a:ext cx="10362895" cy="1222616"/>
           </a:xfrm>
           <a:prstGeom prst="rect">
             <a:avLst/>
@@ -3324,21 +3009,37 @@
           <a:bodyPr wrap="square" lIns="0" tIns="0" rIns="0" bIns="0" rtlCol="0" anchor="b"/>
           <a:lstStyle/>
           <a:p>
-            <a:pPr algn="l" indent="0" marL="0">
+            <a:pPr marL="0" indent="0" algn="l">
               <a:buNone/>
             </a:pPr>
             <a:r>
-              <a:rPr lang="en-US" sz="3000" b="1" dirty="0">
+              <a:rPr lang="en-US" sz="3600" b="1" dirty="0">
                 <a:solidFill>
                   <a:srgbClr val="FFFFFF"/>
                 </a:solidFill>
-                <a:latin typeface="Calibri" pitchFamily="34" charset="0"/>
-                <a:ea typeface="Calibri" pitchFamily="34" charset="-122"/>
-                <a:cs typeface="Calibri" pitchFamily="34" charset="-120"/>
+                <a:latin typeface="Poppins" panose="00000500000000000000" pitchFamily="2" charset="0"/>
+                <a:ea typeface="Calibri" pitchFamily="34" charset="-122"/>
+                <a:cs typeface="Poppins" panose="00000500000000000000" pitchFamily="2" charset="0"/>
               </a:rPr>
               <a:t>The Impact of Environmental Variability on</a:t>
             </a:r>
-            <a:endParaRPr lang="en-US" sz="3000" dirty="0"/>
+          </a:p>
+          <a:p>
+            <a:r>
+              <a:rPr lang="en-US" sz="3600" b="1" dirty="0">
+                <a:solidFill>
+                  <a:srgbClr val="FFFFFF"/>
+                </a:solidFill>
+                <a:latin typeface="Poppins" panose="00000500000000000000" pitchFamily="2" charset="0"/>
+                <a:ea typeface="Calibri" pitchFamily="34" charset="-122"/>
+                <a:cs typeface="Poppins" panose="00000500000000000000" pitchFamily="2" charset="0"/>
+              </a:rPr>
+              <a:t>Fishers' Harvest Decisions in Chile</a:t>
+            </a:r>
+            <a:endParaRPr lang="en-US" sz="3000" dirty="0">
+              <a:latin typeface="Poppins" panose="00000500000000000000" pitchFamily="2" charset="0"/>
+              <a:cs typeface="Poppins" panose="00000500000000000000" pitchFamily="2" charset="0"/>
+            </a:endParaRPr>
           </a:p>
         </p:txBody>
       </p:sp>
@@ -3350,7 +3051,7 @@
         </p:nvSpPr>
         <p:spPr>
           <a:xfrm>
-            <a:off x="914400" y="1920240"/>
+            <a:off x="914399" y="2715968"/>
             <a:ext cx="10362895" cy="502920"/>
           </a:xfrm>
           <a:prstGeom prst="rect">
@@ -3363,21 +3064,13 @@
           <a:bodyPr wrap="square" lIns="0" tIns="0" rIns="0" bIns="0" rtlCol="0" anchor="t"/>
           <a:lstStyle/>
           <a:p>
-            <a:pPr algn="l" indent="0" marL="0">
+            <a:pPr marL="0" indent="0" algn="l">
               <a:buNone/>
             </a:pPr>
-            <a:r>
-              <a:rPr lang="en-US" sz="3000" b="1" dirty="0">
-                <a:solidFill>
-                  <a:srgbClr val="FFFFFF"/>
-                </a:solidFill>
-                <a:latin typeface="Calibri" pitchFamily="34" charset="0"/>
-                <a:ea typeface="Calibri" pitchFamily="34" charset="-122"/>
-                <a:cs typeface="Calibri" pitchFamily="34" charset="-120"/>
-              </a:rPr>
-              <a:t>Fishers' Harvest Decisions in Chile</a:t>
-            </a:r>
-            <a:endParaRPr lang="en-US" sz="3000" dirty="0"/>
+            <a:endParaRPr lang="en-US" sz="3000" dirty="0">
+              <a:latin typeface="Poppins" panose="00000500000000000000" pitchFamily="2" charset="0"/>
+              <a:cs typeface="Poppins" panose="00000500000000000000" pitchFamily="2" charset="0"/>
+            </a:endParaRPr>
           </a:p>
         </p:txBody>
       </p:sp>
@@ -3389,7 +3082,7 @@
         </p:nvSpPr>
         <p:spPr>
           <a:xfrm>
-            <a:off x="914400" y="2606040"/>
+            <a:off x="914399" y="3802212"/>
             <a:ext cx="10362895" cy="411480"/>
           </a:xfrm>
           <a:prstGeom prst="rect">
@@ -3402,7 +3095,7 @@
           <a:bodyPr wrap="square" lIns="0" tIns="0" rIns="0" bIns="0" rtlCol="0" anchor="t"/>
           <a:lstStyle/>
           <a:p>
-            <a:pPr algn="l" indent="0" marL="0">
+            <a:pPr marL="0" indent="0" algn="l">
               <a:buNone/>
             </a:pPr>
             <a:r>
@@ -3410,13 +3103,16 @@
                 <a:solidFill>
                   <a:srgbClr val="C4830A"/>
                 </a:solidFill>
-                <a:latin typeface="Calibri" pitchFamily="34" charset="0"/>
-                <a:ea typeface="Calibri" pitchFamily="34" charset="-122"/>
-                <a:cs typeface="Calibri" pitchFamily="34" charset="-120"/>
+                <a:latin typeface="Poppins" panose="00000500000000000000" pitchFamily="2" charset="0"/>
+                <a:ea typeface="Calibri" pitchFamily="34" charset="-122"/>
+                <a:cs typeface="Poppins" panose="00000500000000000000" pitchFamily="2" charset="0"/>
               </a:rPr>
               <a:t>A multi-species structural approach</a:t>
             </a:r>
-            <a:endParaRPr lang="en-US" sz="1900" dirty="0"/>
+            <a:endParaRPr lang="en-US" sz="1900" dirty="0">
+              <a:latin typeface="Poppins" panose="00000500000000000000" pitchFamily="2" charset="0"/>
+              <a:cs typeface="Poppins" panose="00000500000000000000" pitchFamily="2" charset="0"/>
+            </a:endParaRPr>
           </a:p>
         </p:txBody>
       </p:sp>
@@ -3428,7 +3124,7 @@
         </p:nvSpPr>
         <p:spPr>
           <a:xfrm>
-            <a:off x="914400" y="4023360"/>
+            <a:off x="914399" y="4773368"/>
             <a:ext cx="10362895" cy="411480"/>
           </a:xfrm>
           <a:prstGeom prst="rect">
@@ -3441,7 +3137,7 @@
           <a:bodyPr wrap="square" lIns="0" tIns="0" rIns="0" bIns="0" rtlCol="0" anchor="t"/>
           <a:lstStyle/>
           <a:p>
-            <a:pPr algn="l" indent="0" marL="0">
+            <a:pPr marL="0" indent="0" algn="l">
               <a:buNone/>
             </a:pPr>
             <a:r>
@@ -3449,13 +3145,16 @@
                 <a:solidFill>
                   <a:srgbClr val="FFFFFF"/>
                 </a:solidFill>
-                <a:latin typeface="Calibri" pitchFamily="34" charset="0"/>
-                <a:ea typeface="Calibri" pitchFamily="34" charset="-122"/>
-                <a:cs typeface="Calibri" pitchFamily="34" charset="-120"/>
+                <a:latin typeface="Poppins" panose="00000500000000000000" pitchFamily="2" charset="0"/>
+                <a:ea typeface="Calibri" pitchFamily="34" charset="-122"/>
+                <a:cs typeface="Poppins" panose="00000500000000000000" pitchFamily="2" charset="0"/>
               </a:rPr>
               <a:t>Felipe J. Quezada-Escalona</a:t>
             </a:r>
-            <a:endParaRPr lang="en-US" sz="1800" dirty="0"/>
+            <a:endParaRPr lang="en-US" sz="1800" dirty="0">
+              <a:latin typeface="Poppins" panose="00000500000000000000" pitchFamily="2" charset="0"/>
+              <a:cs typeface="Poppins" panose="00000500000000000000" pitchFamily="2" charset="0"/>
+            </a:endParaRPr>
           </a:p>
         </p:txBody>
       </p:sp>
@@ -3467,7 +3166,7 @@
         </p:nvSpPr>
         <p:spPr>
           <a:xfrm>
-            <a:off x="914400" y="4434840"/>
+            <a:off x="914399" y="5230568"/>
             <a:ext cx="10362895" cy="365760"/>
           </a:xfrm>
           <a:prstGeom prst="rect">
@@ -3480,7 +3179,7 @@
           <a:bodyPr wrap="square" lIns="0" tIns="0" rIns="0" bIns="0" rtlCol="0" anchor="t"/>
           <a:lstStyle/>
           <a:p>
-            <a:pPr algn="l" indent="0" marL="0">
+            <a:pPr marL="0" indent="0" algn="l">
               <a:buNone/>
             </a:pPr>
             <a:r>
@@ -3488,13 +3187,16 @@
                 <a:solidFill>
                   <a:srgbClr val="CBD5E1"/>
                 </a:solidFill>
-                <a:latin typeface="Calibri" pitchFamily="34" charset="0"/>
-                <a:ea typeface="Calibri" pitchFamily="34" charset="-122"/>
-                <a:cs typeface="Calibri" pitchFamily="34" charset="-120"/>
+                <a:latin typeface="Poppins" panose="00000500000000000000" pitchFamily="2" charset="0"/>
+                <a:ea typeface="Calibri" pitchFamily="34" charset="-122"/>
+                <a:cs typeface="Poppins" panose="00000500000000000000" pitchFamily="2" charset="0"/>
               </a:rPr>
               <a:t>Departamento de Economía, Universidad de Concepción</a:t>
             </a:r>
-            <a:endParaRPr lang="en-US" sz="1400" dirty="0"/>
+            <a:endParaRPr lang="en-US" sz="1400" dirty="0">
+              <a:latin typeface="Poppins" panose="00000500000000000000" pitchFamily="2" charset="0"/>
+              <a:cs typeface="Poppins" panose="00000500000000000000" pitchFamily="2" charset="0"/>
+            </a:endParaRPr>
           </a:p>
         </p:txBody>
       </p:sp>
@@ -3506,7 +3208,7 @@
         </p:nvSpPr>
         <p:spPr>
           <a:xfrm>
-            <a:off x="914400" y="4846320"/>
+            <a:off x="914399" y="5642048"/>
             <a:ext cx="10362895" cy="365760"/>
           </a:xfrm>
           <a:prstGeom prst="rect">
@@ -3519,7 +3221,7 @@
           <a:bodyPr wrap="square" lIns="0" tIns="0" rIns="0" bIns="0" rtlCol="0" anchor="t"/>
           <a:lstStyle/>
           <a:p>
-            <a:pPr algn="l" indent="0" marL="0">
+            <a:pPr marL="0" indent="0" algn="l">
               <a:buNone/>
             </a:pPr>
             <a:r>
@@ -3527,13 +3229,16 @@
                 <a:solidFill>
                   <a:srgbClr val="CBD5E1"/>
                 </a:solidFill>
-                <a:latin typeface="Calibri" pitchFamily="34" charset="0"/>
-                <a:ea typeface="Calibri" pitchFamily="34" charset="-122"/>
-                <a:cs typeface="Calibri" pitchFamily="34" charset="-120"/>
+                <a:latin typeface="Poppins" panose="00000500000000000000" pitchFamily="2" charset="0"/>
+                <a:ea typeface="Calibri" pitchFamily="34" charset="-122"/>
+                <a:cs typeface="Poppins" panose="00000500000000000000" pitchFamily="2" charset="0"/>
               </a:rPr>
               <a:t>ICES/PICES Small Pelagic Symposium  ·  La Paz, México  ·  May 8, 2026</a:t>
             </a:r>
-            <a:endParaRPr lang="en-US" sz="1400" dirty="0"/>
+            <a:endParaRPr lang="en-US" sz="1400" dirty="0">
+              <a:latin typeface="Poppins" panose="00000500000000000000" pitchFamily="2" charset="0"/>
+              <a:cs typeface="Poppins" panose="00000500000000000000" pitchFamily="2" charset="0"/>
+            </a:endParaRPr>
           </a:p>
         </p:txBody>
       </p:sp>
@@ -3558,7 +3263,7 @@
           <a:bodyPr wrap="square" lIns="0" tIns="0" rIns="0" bIns="0" rtlCol="0" anchor="ctr"/>
           <a:lstStyle/>
           <a:p>
-            <a:pPr algn="l" indent="0" marL="0">
+            <a:pPr marL="0" indent="0" algn="l">
               <a:buNone/>
             </a:pPr>
             <a:r>
@@ -3576,6 +3281,66 @@
           </a:p>
         </p:txBody>
       </p:sp>
+      <p:pic>
+        <p:nvPicPr>
+          <p:cNvPr id="10" name="Imagen 9">
+            <a:extLst>
+              <a:ext uri="{FF2B5EF4-FFF2-40B4-BE49-F238E27FC236}">
+                <a16:creationId xmlns:a16="http://schemas.microsoft.com/office/drawing/2014/main" id="{317BCB7B-B740-15FE-C40C-A0FE1B491F28}"/>
+              </a:ext>
+            </a:extLst>
+          </p:cNvPr>
+          <p:cNvPicPr>
+            <a:picLocks noChangeAspect="1"/>
+          </p:cNvPicPr>
+          <p:nvPr/>
+        </p:nvPicPr>
+        <p:blipFill>
+          <a:blip r:embed="rId3"/>
+          <a:stretch>
+            <a:fillRect/>
+          </a:stretch>
+        </p:blipFill>
+        <p:spPr>
+          <a:xfrm>
+            <a:off x="4145577" y="261156"/>
+            <a:ext cx="929046" cy="1554480"/>
+          </a:xfrm>
+          <a:prstGeom prst="rect">
+            <a:avLst/>
+          </a:prstGeom>
+        </p:spPr>
+      </p:pic>
+      <p:pic>
+        <p:nvPicPr>
+          <p:cNvPr id="11" name="Imagen 10">
+            <a:extLst>
+              <a:ext uri="{FF2B5EF4-FFF2-40B4-BE49-F238E27FC236}">
+                <a16:creationId xmlns:a16="http://schemas.microsoft.com/office/drawing/2014/main" id="{8971713F-52B6-D168-810F-3BEF53C52F3C}"/>
+              </a:ext>
+            </a:extLst>
+          </p:cNvPr>
+          <p:cNvPicPr>
+            <a:picLocks noChangeAspect="1"/>
+          </p:cNvPicPr>
+          <p:nvPr/>
+        </p:nvPicPr>
+        <p:blipFill>
+          <a:blip r:embed="rId4"/>
+          <a:stretch>
+            <a:fillRect/>
+          </a:stretch>
+        </p:blipFill>
+        <p:spPr>
+          <a:xfrm>
+            <a:off x="914398" y="719310"/>
+            <a:ext cx="3018694" cy="775332"/>
+          </a:xfrm>
+          <a:prstGeom prst="rect">
+            <a:avLst/>
+          </a:prstGeom>
+        </p:spPr>
+      </p:pic>
     </p:spTree>
   </p:cSld>
   <p:clrMapOvr>
@@ -3622,7 +3387,7 @@
           <a:bodyPr wrap="square" lIns="0" tIns="0" rIns="0" bIns="0" rtlCol="0" anchor="ctr"/>
           <a:lstStyle/>
           <a:p>
-            <a:pPr algn="l" indent="0" marL="0">
+            <a:pPr marL="0" indent="0" algn="l">
               <a:buNone/>
             </a:pPr>
             <a:r>
@@ -3662,6 +3427,13 @@
             <a:prstDash val="solid"/>
           </a:ln>
         </p:spPr>
+        <p:txBody>
+          <a:bodyPr/>
+          <a:lstStyle/>
+          <a:p>
+            <a:endParaRPr lang="es-CL"/>
+          </a:p>
+        </p:txBody>
       </p:sp>
       <p:graphicFrame>
         <p:nvGraphicFramePr>
@@ -3679,18 +3451,48 @@
         </p:nvGraphicFramePr>
         <p:xfrm>
           <a:off x="457200" y="1097280"/>
-          <a:ext cx="9144000" cy="914400"/>
+          <a:ext cx="11274552" cy="1920240"/>
         </p:xfrm>
         <a:graphic>
           <a:graphicData uri="http://schemas.openxmlformats.org/drawingml/2006/table">
             <a:tbl>
               <a:tblPr/>
               <a:tblGrid>
-                <a:gridCol w="1463040"/>
-                <a:gridCol w="3200400"/>
-                <a:gridCol w="1828800"/>
-                <a:gridCol w="2011680"/>
-                <a:gridCol w="2770632"/>
+                <a:gridCol w="1463040">
+                  <a:extLst>
+                    <a:ext uri="{9D8B030D-6E8A-4147-A177-3AD203B41FA5}">
+                      <a16:colId xmlns:a16="http://schemas.microsoft.com/office/drawing/2014/main" val="20000"/>
+                    </a:ext>
+                  </a:extLst>
+                </a:gridCol>
+                <a:gridCol w="3200400">
+                  <a:extLst>
+                    <a:ext uri="{9D8B030D-6E8A-4147-A177-3AD203B41FA5}">
+                      <a16:colId xmlns:a16="http://schemas.microsoft.com/office/drawing/2014/main" val="20001"/>
+                    </a:ext>
+                  </a:extLst>
+                </a:gridCol>
+                <a:gridCol w="1828800">
+                  <a:extLst>
+                    <a:ext uri="{9D8B030D-6E8A-4147-A177-3AD203B41FA5}">
+                      <a16:colId xmlns:a16="http://schemas.microsoft.com/office/drawing/2014/main" val="20002"/>
+                    </a:ext>
+                  </a:extLst>
+                </a:gridCol>
+                <a:gridCol w="2011680">
+                  <a:extLst>
+                    <a:ext uri="{9D8B030D-6E8A-4147-A177-3AD203B41FA5}">
+                      <a16:colId xmlns:a16="http://schemas.microsoft.com/office/drawing/2014/main" val="20003"/>
+                    </a:ext>
+                  </a:extLst>
+                </a:gridCol>
+                <a:gridCol w="2770632">
+                  <a:extLst>
+                    <a:ext uri="{9D8B030D-6E8A-4147-A177-3AD203B41FA5}">
+                      <a16:colId xmlns:a16="http://schemas.microsoft.com/office/drawing/2014/main" val="20004"/>
+                    </a:ext>
+                  </a:extLst>
+                </a:gridCol>
               </a:tblGrid>
               <a:tr h="384048">
                 <a:tc>
@@ -3698,7 +3500,7 @@
                     <a:bodyPr/>
                     <a:lstStyle/>
                     <a:p>
-                      <a:pPr algn="l" indent="0" marL="0">
+                      <a:pPr marL="0" indent="0" algn="l">
                         <a:buNone/>
                       </a:pPr>
                       <a:r>
@@ -3719,7 +3521,7 @@
                       </a:endParaRPr>
                     </a:p>
                   </a:txBody>
-                  <a:tcPr marL="91440" marR="91440" marT="45720" marB="45720" anchor="ctr">
+                  <a:tcPr anchor="ctr">
                     <a:lnL w="6350" cap="flat" cmpd="sng" algn="ctr">
                       <a:solidFill>
                         <a:srgbClr val="CBD5E1"/>
@@ -3766,7 +3568,7 @@
                     <a:bodyPr/>
                     <a:lstStyle/>
                     <a:p>
-                      <a:pPr algn="l" indent="0" marL="0">
+                      <a:pPr marL="0" indent="0" algn="l">
                         <a:buNone/>
                       </a:pPr>
                       <a:r>
@@ -3787,7 +3589,7 @@
                       </a:endParaRPr>
                     </a:p>
                   </a:txBody>
-                  <a:tcPr marL="91440" marR="91440" marT="45720" marB="45720" anchor="ctr">
+                  <a:tcPr anchor="ctr">
                     <a:lnL w="6350" cap="flat" cmpd="sng" algn="ctr">
                       <a:solidFill>
                         <a:srgbClr val="CBD5E1"/>
@@ -3834,7 +3636,7 @@
                     <a:bodyPr/>
                     <a:lstStyle/>
                     <a:p>
-                      <a:pPr algn="ctr" indent="0" marL="0">
+                      <a:pPr marL="0" indent="0" algn="ctr">
                         <a:buNone/>
                       </a:pPr>
                       <a:r>
@@ -3855,7 +3657,7 @@
                       </a:endParaRPr>
                     </a:p>
                   </a:txBody>
-                  <a:tcPr marL="91440" marR="91440" marT="45720" marB="45720" anchor="ctr">
+                  <a:tcPr anchor="ctr">
                     <a:lnL w="6350" cap="flat" cmpd="sng" algn="ctr">
                       <a:solidFill>
                         <a:srgbClr val="CBD5E1"/>
@@ -3902,7 +3704,7 @@
                     <a:bodyPr/>
                     <a:lstStyle/>
                     <a:p>
-                      <a:pPr algn="ctr" indent="0" marL="0">
+                      <a:pPr marL="0" indent="0" algn="ctr">
                         <a:buNone/>
                       </a:pPr>
                       <a:r>
@@ -3923,7 +3725,7 @@
                       </a:endParaRPr>
                     </a:p>
                   </a:txBody>
-                  <a:tcPr marL="91440" marR="91440" marT="45720" marB="45720" anchor="ctr">
+                  <a:tcPr anchor="ctr">
                     <a:lnL w="6350" cap="flat" cmpd="sng" algn="ctr">
                       <a:solidFill>
                         <a:srgbClr val="CBD5E1"/>
@@ -3970,7 +3772,7 @@
                     <a:bodyPr/>
                     <a:lstStyle/>
                     <a:p>
-                      <a:pPr algn="ctr" indent="0" marL="0">
+                      <a:pPr marL="0" indent="0" algn="ctr">
                         <a:buNone/>
                       </a:pPr>
                       <a:r>
@@ -3991,7 +3793,7 @@
                       </a:endParaRPr>
                     </a:p>
                   </a:txBody>
-                  <a:tcPr marL="91440" marR="91440" marT="45720" marB="45720" anchor="ctr">
+                  <a:tcPr anchor="ctr">
                     <a:lnL w="6350" cap="flat" cmpd="sng" algn="ctr">
                       <a:solidFill>
                         <a:srgbClr val="CBD5E1"/>
@@ -4033,6 +3835,11 @@
                     </a:solidFill>
                   </a:tcPr>
                 </a:tc>
+                <a:extLst>
+                  <a:ext uri="{0D108BD9-81ED-4DB2-BD59-A6C34878D82A}">
+                    <a16:rowId xmlns:a16="http://schemas.microsoft.com/office/drawing/2014/main" val="10000"/>
+                  </a:ext>
+                </a:extLst>
               </a:tr>
               <a:tr h="384048">
                 <a:tc>
@@ -4040,7 +3847,7 @@
                     <a:bodyPr/>
                     <a:lstStyle/>
                     <a:p>
-                      <a:pPr algn="l" indent="0" marL="0">
+                      <a:pPr marL="0" indent="0" algn="l">
                         <a:buNone/>
                       </a:pPr>
                       <a:r>
@@ -4108,7 +3915,7 @@
                     <a:bodyPr/>
                     <a:lstStyle/>
                     <a:p>
-                      <a:pPr algn="l" indent="0" marL="0">
+                      <a:pPr marL="0" indent="0" algn="l">
                         <a:buNone/>
                       </a:pPr>
                       <a:r>
@@ -4176,7 +3983,7 @@
                     <a:bodyPr/>
                     <a:lstStyle/>
                     <a:p>
-                      <a:pPr algn="r" indent="0" marL="0">
+                      <a:pPr marL="0" indent="0" algn="r">
                         <a:buNone/>
                       </a:pPr>
                       <a:r>
@@ -4244,7 +4051,7 @@
                     <a:bodyPr/>
                     <a:lstStyle/>
                     <a:p>
-                      <a:pPr algn="r" indent="0" marL="0">
+                      <a:pPr marL="0" indent="0" algn="r">
                         <a:buNone/>
                       </a:pPr>
                       <a:r>
@@ -4312,7 +4119,7 @@
                     <a:bodyPr/>
                     <a:lstStyle/>
                     <a:p>
-                      <a:pPr algn="r" indent="0" marL="0">
+                      <a:pPr marL="0" indent="0" algn="r">
                         <a:buNone/>
                       </a:pPr>
                       <a:r>
@@ -4375,6 +4182,11 @@
                     </a:solidFill>
                   </a:tcPr>
                 </a:tc>
+                <a:extLst>
+                  <a:ext uri="{0D108BD9-81ED-4DB2-BD59-A6C34878D82A}">
+                    <a16:rowId xmlns:a16="http://schemas.microsoft.com/office/drawing/2014/main" val="10001"/>
+                  </a:ext>
+                </a:extLst>
               </a:tr>
               <a:tr h="384048">
                 <a:tc>
@@ -4382,7 +4194,7 @@
                     <a:bodyPr/>
                     <a:lstStyle/>
                     <a:p>
-                      <a:pPr algn="l" indent="0" marL="0">
+                      <a:pPr marL="0" indent="0" algn="l">
                         <a:buNone/>
                       </a:pPr>
                       <a:endParaRPr lang="en-US" sz="1200" dirty="0">
@@ -4439,7 +4251,7 @@
                     <a:bodyPr/>
                     <a:lstStyle/>
                     <a:p>
-                      <a:pPr algn="l" indent="0" marL="0">
+                      <a:pPr marL="0" indent="0" algn="l">
                         <a:buNone/>
                       </a:pPr>
                       <a:r>
@@ -4507,7 +4319,7 @@
                     <a:bodyPr/>
                     <a:lstStyle/>
                     <a:p>
-                      <a:pPr algn="r" indent="0" marL="0">
+                      <a:pPr marL="0" indent="0" algn="r">
                         <a:buNone/>
                       </a:pPr>
                       <a:r>
@@ -4575,7 +4387,7 @@
                     <a:bodyPr/>
                     <a:lstStyle/>
                     <a:p>
-                      <a:pPr algn="r" indent="0" marL="0">
+                      <a:pPr marL="0" indent="0" algn="r">
                         <a:buNone/>
                       </a:pPr>
                       <a:r>
@@ -4643,7 +4455,7 @@
                     <a:bodyPr/>
                     <a:lstStyle/>
                     <a:p>
-                      <a:pPr algn="r" indent="0" marL="0">
+                      <a:pPr marL="0" indent="0" algn="r">
                         <a:buNone/>
                       </a:pPr>
                       <a:r>
@@ -4706,6 +4518,11 @@
                     </a:solidFill>
                   </a:tcPr>
                 </a:tc>
+                <a:extLst>
+                  <a:ext uri="{0D108BD9-81ED-4DB2-BD59-A6C34878D82A}">
+                    <a16:rowId xmlns:a16="http://schemas.microsoft.com/office/drawing/2014/main" val="10002"/>
+                  </a:ext>
+                </a:extLst>
               </a:tr>
               <a:tr h="384048">
                 <a:tc>
@@ -4713,7 +4530,7 @@
                     <a:bodyPr/>
                     <a:lstStyle/>
                     <a:p>
-                      <a:pPr algn="l" indent="0" marL="0">
+                      <a:pPr marL="0" indent="0" algn="l">
                         <a:buNone/>
                       </a:pPr>
                       <a:r>
@@ -4778,7 +4595,7 @@
                     <a:bodyPr/>
                     <a:lstStyle/>
                     <a:p>
-                      <a:pPr algn="l" indent="0" marL="0">
+                      <a:pPr marL="0" indent="0" algn="l">
                         <a:buNone/>
                       </a:pPr>
                       <a:r>
@@ -4843,7 +4660,7 @@
                     <a:bodyPr/>
                     <a:lstStyle/>
                     <a:p>
-                      <a:pPr algn="r" indent="0" marL="0">
+                      <a:pPr marL="0" indent="0" algn="r">
                         <a:buNone/>
                       </a:pPr>
                       <a:r>
@@ -4908,7 +4725,7 @@
                     <a:bodyPr/>
                     <a:lstStyle/>
                     <a:p>
-                      <a:pPr algn="r" indent="0" marL="0">
+                      <a:pPr marL="0" indent="0" algn="r">
                         <a:buNone/>
                       </a:pPr>
                       <a:r>
@@ -4973,7 +4790,7 @@
                     <a:bodyPr/>
                     <a:lstStyle/>
                     <a:p>
-                      <a:pPr algn="r" indent="0" marL="0">
+                      <a:pPr marL="0" indent="0" algn="r">
                         <a:buNone/>
                       </a:pPr>
                       <a:r>
@@ -5033,6 +4850,11 @@
                     </a:lnB>
                   </a:tcPr>
                 </a:tc>
+                <a:extLst>
+                  <a:ext uri="{0D108BD9-81ED-4DB2-BD59-A6C34878D82A}">
+                    <a16:rowId xmlns:a16="http://schemas.microsoft.com/office/drawing/2014/main" val="10003"/>
+                  </a:ext>
+                </a:extLst>
               </a:tr>
               <a:tr h="384048">
                 <a:tc>
@@ -5040,7 +4862,7 @@
                     <a:bodyPr/>
                     <a:lstStyle/>
                     <a:p>
-                      <a:pPr algn="l" indent="0" marL="0">
+                      <a:pPr marL="0" indent="0" algn="l">
                         <a:buNone/>
                       </a:pPr>
                       <a:endParaRPr lang="en-US" sz="1200" dirty="0">
@@ -5094,7 +4916,7 @@
                     <a:bodyPr/>
                     <a:lstStyle/>
                     <a:p>
-                      <a:pPr algn="l" indent="0" marL="0">
+                      <a:pPr marL="0" indent="0" algn="l">
                         <a:buNone/>
                       </a:pPr>
                       <a:r>
@@ -5159,7 +4981,7 @@
                     <a:bodyPr/>
                     <a:lstStyle/>
                     <a:p>
-                      <a:pPr algn="r" indent="0" marL="0">
+                      <a:pPr marL="0" indent="0" algn="r">
                         <a:buNone/>
                       </a:pPr>
                       <a:r>
@@ -5224,7 +5046,7 @@
                     <a:bodyPr/>
                     <a:lstStyle/>
                     <a:p>
-                      <a:pPr algn="r" indent="0" marL="0">
+                      <a:pPr marL="0" indent="0" algn="r">
                         <a:buNone/>
                       </a:pPr>
                       <a:r>
@@ -5289,7 +5111,7 @@
                     <a:bodyPr/>
                     <a:lstStyle/>
                     <a:p>
-                      <a:pPr algn="r" indent="0" marL="0">
+                      <a:pPr marL="0" indent="0" algn="r">
                         <a:buNone/>
                       </a:pPr>
                       <a:r>
@@ -5349,6 +5171,11 @@
                     </a:lnB>
                   </a:tcPr>
                 </a:tc>
+                <a:extLst>
+                  <a:ext uri="{0D108BD9-81ED-4DB2-BD59-A6C34878D82A}">
+                    <a16:rowId xmlns:a16="http://schemas.microsoft.com/office/drawing/2014/main" val="10004"/>
+                  </a:ext>
+                </a:extLst>
               </a:tr>
             </a:tbl>
           </a:graphicData>
@@ -5375,7 +5202,7 @@
           <a:bodyPr wrap="square" lIns="0" tIns="0" rIns="0" bIns="0" rtlCol="0" anchor="t"/>
           <a:lstStyle/>
           <a:p>
-            <a:pPr indent="0" marL="0">
+            <a:pPr marL="0" indent="0">
               <a:buNone/>
             </a:pPr>
             <a:r>
@@ -5536,7 +5363,7 @@
           <a:bodyPr wrap="square" lIns="0" tIns="0" rIns="0" bIns="0" rtlCol="0" anchor="ctr"/>
           <a:lstStyle/>
           <a:p>
-            <a:pPr algn="l" indent="0" marL="0">
+            <a:pPr marL="0" indent="0" algn="l">
               <a:buNone/>
             </a:pPr>
             <a:r>
@@ -5575,7 +5402,7 @@
           <a:bodyPr wrap="square" lIns="0" tIns="0" rIns="0" bIns="0" rtlCol="0" anchor="ctr"/>
           <a:lstStyle/>
           <a:p>
-            <a:pPr algn="r" indent="0" marL="0">
+            <a:pPr marL="0" indent="0" algn="r">
               <a:buNone/>
             </a:pPr>
             <a:r>
@@ -5639,7 +5466,7 @@
           <a:bodyPr wrap="square" lIns="0" tIns="0" rIns="0" bIns="0" rtlCol="0" anchor="ctr"/>
           <a:lstStyle/>
           <a:p>
-            <a:pPr algn="l" indent="0" marL="0">
+            <a:pPr marL="0" indent="0" algn="l">
               <a:buNone/>
             </a:pPr>
             <a:r>
@@ -5679,6 +5506,13 @@
             <a:prstDash val="solid"/>
           </a:ln>
         </p:spPr>
+        <p:txBody>
+          <a:bodyPr/>
+          <a:lstStyle/>
+          <a:p>
+            <a:endParaRPr lang="es-CL"/>
+          </a:p>
+        </p:txBody>
       </p:sp>
       <p:sp>
         <p:nvSpPr>
@@ -5701,7 +5535,7 @@
           <a:bodyPr wrap="square" lIns="0" tIns="0" rIns="0" bIns="0" rtlCol="0" anchor="ctr"/>
           <a:lstStyle/>
           <a:p>
-            <a:pPr indent="0" marL="0">
+            <a:pPr marL="0" indent="0">
               <a:buNone/>
             </a:pPr>
             <a:r>
@@ -5740,7 +5574,7 @@
           <a:bodyPr wrap="square" lIns="0" tIns="0" rIns="0" bIns="0" rtlCol="0" anchor="ctr"/>
           <a:lstStyle/>
           <a:p>
-            <a:pPr indent="0" marL="0">
+            <a:pPr marL="0" indent="0">
               <a:buNone/>
             </a:pPr>
             <a:r>
@@ -5760,15 +5594,15 @@
       </p:sp>
       <p:pic>
         <p:nvPicPr>
-          <p:cNvPr id="6" name="Image 0" descr="/sessions/tender-gallant-volta/mnt/outputs/pices_build/assets/eq_indirect.png">    </p:cNvPr>
+          <p:cNvPr id="6" name="Image 0" descr="/sessions/tender-gallant-volta/mnt/outputs/pices_build/assets/eq_indirect.png"/>
           <p:cNvPicPr>
             <a:picLocks noChangeAspect="1"/>
           </p:cNvPicPr>
           <p:nvPr/>
         </p:nvPicPr>
         <p:blipFill>
-          <a:blip r:embed="rId1"/>
-          <a:srcRect l="0" r="0" t="0" b="0"/>
+          <a:blip r:embed="rId3"/>
+          <a:srcRect/>
           <a:stretch/>
         </p:blipFill>
         <p:spPr>
@@ -5802,7 +5636,7 @@
           <a:bodyPr wrap="square" lIns="0" tIns="0" rIns="0" bIns="0" rtlCol="0" anchor="t"/>
           <a:lstStyle/>
           <a:p>
-            <a:pPr indent="0" marL="0">
+            <a:pPr marL="0" indent="0">
               <a:buNone/>
             </a:pPr>
             <a:r>
@@ -5841,7 +5675,7 @@
           <a:bodyPr wrap="square" lIns="0" tIns="0" rIns="0" bIns="0" rtlCol="0" anchor="ctr"/>
           <a:lstStyle/>
           <a:p>
-            <a:pPr indent="0" marL="0">
+            <a:pPr marL="0" indent="0">
               <a:buNone/>
             </a:pPr>
             <a:r>
@@ -5861,15 +5695,15 @@
       </p:sp>
       <p:pic>
         <p:nvPicPr>
-          <p:cNvPr id="9" name="Image 1" descr="/sessions/tender-gallant-volta/mnt/outputs/pices_build/assets/eq_direct.png">    </p:cNvPr>
+          <p:cNvPr id="9" name="Image 1" descr="/sessions/tender-gallant-volta/mnt/outputs/pices_build/assets/eq_direct.png"/>
           <p:cNvPicPr>
             <a:picLocks noChangeAspect="1"/>
           </p:cNvPicPr>
           <p:nvPr/>
         </p:nvPicPr>
         <p:blipFill>
-          <a:blip r:embed="rId2"/>
-          <a:srcRect l="0" r="0" t="0" b="0"/>
+          <a:blip r:embed="rId4"/>
+          <a:srcRect/>
           <a:stretch/>
         </p:blipFill>
         <p:spPr>
@@ -5903,7 +5737,7 @@
           <a:bodyPr wrap="square" lIns="0" tIns="0" rIns="0" bIns="0" rtlCol="0" anchor="ctr"/>
           <a:lstStyle/>
           <a:p>
-            <a:pPr indent="0" marL="0">
+            <a:pPr marL="0" indent="0">
               <a:buNone/>
             </a:pPr>
             <a:r>
@@ -5937,17 +5771,41 @@
         </p:nvGraphicFramePr>
         <p:xfrm>
           <a:off x="6246724" y="1463040"/>
-          <a:ext cx="9144000" cy="914400"/>
+          <a:ext cx="5486400" cy="1234440"/>
         </p:xfrm>
         <a:graphic>
           <a:graphicData uri="http://schemas.openxmlformats.org/drawingml/2006/table">
             <a:tbl>
               <a:tblPr/>
               <a:tblGrid>
-                <a:gridCol w="1463040"/>
-                <a:gridCol w="1371600"/>
-                <a:gridCol w="1280160"/>
-                <a:gridCol w="1371600"/>
+                <a:gridCol w="1463040">
+                  <a:extLst>
+                    <a:ext uri="{9D8B030D-6E8A-4147-A177-3AD203B41FA5}">
+                      <a16:colId xmlns:a16="http://schemas.microsoft.com/office/drawing/2014/main" val="20000"/>
+                    </a:ext>
+                  </a:extLst>
+                </a:gridCol>
+                <a:gridCol w="1371600">
+                  <a:extLst>
+                    <a:ext uri="{9D8B030D-6E8A-4147-A177-3AD203B41FA5}">
+                      <a16:colId xmlns:a16="http://schemas.microsoft.com/office/drawing/2014/main" val="20001"/>
+                    </a:ext>
+                  </a:extLst>
+                </a:gridCol>
+                <a:gridCol w="1280160">
+                  <a:extLst>
+                    <a:ext uri="{9D8B030D-6E8A-4147-A177-3AD203B41FA5}">
+                      <a16:colId xmlns:a16="http://schemas.microsoft.com/office/drawing/2014/main" val="20002"/>
+                    </a:ext>
+                  </a:extLst>
+                </a:gridCol>
+                <a:gridCol w="1371600">
+                  <a:extLst>
+                    <a:ext uri="{9D8B030D-6E8A-4147-A177-3AD203B41FA5}">
+                      <a16:colId xmlns:a16="http://schemas.microsoft.com/office/drawing/2014/main" val="20003"/>
+                    </a:ext>
+                  </a:extLst>
+                </a:gridCol>
               </a:tblGrid>
               <a:tr h="411480">
                 <a:tc>
@@ -5955,7 +5813,7 @@
                     <a:bodyPr/>
                     <a:lstStyle/>
                     <a:p>
-                      <a:pPr algn="l" indent="0" marL="0">
+                      <a:pPr marL="0" indent="0" algn="l">
                         <a:buNone/>
                       </a:pPr>
                       <a:r>
@@ -5976,7 +5834,7 @@
                       </a:endParaRPr>
                     </a:p>
                   </a:txBody>
-                  <a:tcPr marL="91440" marR="91440" marT="45720" marB="45720" anchor="ctr">
+                  <a:tcPr anchor="ctr">
                     <a:lnL w="6350" cap="flat" cmpd="sng" algn="ctr">
                       <a:solidFill>
                         <a:srgbClr val="CBD5E1"/>
@@ -6023,7 +5881,7 @@
                     <a:bodyPr/>
                     <a:lstStyle/>
                     <a:p>
-                      <a:pPr algn="ctr" indent="0" marL="0">
+                      <a:pPr marL="0" indent="0" algn="ctr">
                         <a:buNone/>
                       </a:pPr>
                       <a:r>
@@ -6044,7 +5902,7 @@
                       </a:endParaRPr>
                     </a:p>
                   </a:txBody>
-                  <a:tcPr marL="91440" marR="91440" marT="45720" marB="45720" anchor="ctr">
+                  <a:tcPr anchor="ctr">
                     <a:lnL w="6350" cap="flat" cmpd="sng" algn="ctr">
                       <a:solidFill>
                         <a:srgbClr val="CBD5E1"/>
@@ -6091,7 +5949,7 @@
                     <a:bodyPr/>
                     <a:lstStyle/>
                     <a:p>
-                      <a:pPr algn="ctr" indent="0" marL="0">
+                      <a:pPr marL="0" indent="0" algn="ctr">
                         <a:buNone/>
                       </a:pPr>
                       <a:r>
@@ -6112,7 +5970,7 @@
                       </a:endParaRPr>
                     </a:p>
                   </a:txBody>
-                  <a:tcPr marL="91440" marR="91440" marT="45720" marB="45720" anchor="ctr">
+                  <a:tcPr anchor="ctr">
                     <a:lnL w="6350" cap="flat" cmpd="sng" algn="ctr">
                       <a:solidFill>
                         <a:srgbClr val="CBD5E1"/>
@@ -6159,7 +6017,7 @@
                     <a:bodyPr/>
                     <a:lstStyle/>
                     <a:p>
-                      <a:pPr algn="ctr" indent="0" marL="0">
+                      <a:pPr marL="0" indent="0" algn="ctr">
                         <a:buNone/>
                       </a:pPr>
                       <a:r>
@@ -6180,7 +6038,7 @@
                       </a:endParaRPr>
                     </a:p>
                   </a:txBody>
-                  <a:tcPr marL="91440" marR="91440" marT="45720" marB="45720" anchor="ctr">
+                  <a:tcPr anchor="ctr">
                     <a:lnL w="6350" cap="flat" cmpd="sng" algn="ctr">
                       <a:solidFill>
                         <a:srgbClr val="CBD5E1"/>
@@ -6222,6 +6080,11 @@
                     </a:solidFill>
                   </a:tcPr>
                 </a:tc>
+                <a:extLst>
+                  <a:ext uri="{0D108BD9-81ED-4DB2-BD59-A6C34878D82A}">
+                    <a16:rowId xmlns:a16="http://schemas.microsoft.com/office/drawing/2014/main" val="10000"/>
+                  </a:ext>
+                </a:extLst>
               </a:tr>
               <a:tr h="411480">
                 <a:tc>
@@ -6229,7 +6092,7 @@
                     <a:bodyPr/>
                     <a:lstStyle/>
                     <a:p>
-                      <a:pPr algn="l" indent="0" marL="0">
+                      <a:pPr marL="0" indent="0" algn="l">
                         <a:buNone/>
                       </a:pPr>
                       <a:r>
@@ -6297,7 +6160,7 @@
                     <a:bodyPr/>
                     <a:lstStyle/>
                     <a:p>
-                      <a:pPr algn="r" indent="0" marL="0">
+                      <a:pPr marL="0" indent="0" algn="r">
                         <a:buNone/>
                       </a:pPr>
                       <a:r>
@@ -6365,7 +6228,7 @@
                     <a:bodyPr/>
                     <a:lstStyle/>
                     <a:p>
-                      <a:pPr algn="r" indent="0" marL="0">
+                      <a:pPr marL="0" indent="0" algn="r">
                         <a:buNone/>
                       </a:pPr>
                       <a:r>
@@ -6433,7 +6296,7 @@
                     <a:bodyPr/>
                     <a:lstStyle/>
                     <a:p>
-                      <a:pPr algn="r" indent="0" marL="0">
+                      <a:pPr marL="0" indent="0" algn="r">
                         <a:buNone/>
                       </a:pPr>
                       <a:r>
@@ -6496,6 +6359,11 @@
                     </a:solidFill>
                   </a:tcPr>
                 </a:tc>
+                <a:extLst>
+                  <a:ext uri="{0D108BD9-81ED-4DB2-BD59-A6C34878D82A}">
+                    <a16:rowId xmlns:a16="http://schemas.microsoft.com/office/drawing/2014/main" val="10001"/>
+                  </a:ext>
+                </a:extLst>
               </a:tr>
               <a:tr h="411480">
                 <a:tc>
@@ -6503,7 +6371,7 @@
                     <a:bodyPr/>
                     <a:lstStyle/>
                     <a:p>
-                      <a:pPr algn="l" indent="0" marL="0">
+                      <a:pPr marL="0" indent="0" algn="l">
                         <a:buNone/>
                       </a:pPr>
                       <a:r>
@@ -6568,7 +6436,7 @@
                     <a:bodyPr/>
                     <a:lstStyle/>
                     <a:p>
-                      <a:pPr algn="r" indent="0" marL="0">
+                      <a:pPr marL="0" indent="0" algn="r">
                         <a:buNone/>
                       </a:pPr>
                       <a:r>
@@ -6633,7 +6501,7 @@
                     <a:bodyPr/>
                     <a:lstStyle/>
                     <a:p>
-                      <a:pPr algn="r" indent="0" marL="0">
+                      <a:pPr marL="0" indent="0" algn="r">
                         <a:buNone/>
                       </a:pPr>
                       <a:r>
@@ -6698,7 +6566,7 @@
                     <a:bodyPr/>
                     <a:lstStyle/>
                     <a:p>
-                      <a:pPr algn="r" indent="0" marL="0">
+                      <a:pPr marL="0" indent="0" algn="r">
                         <a:buNone/>
                       </a:pPr>
                       <a:r>
@@ -6758,6 +6626,11 @@
                     </a:lnB>
                   </a:tcPr>
                 </a:tc>
+                <a:extLst>
+                  <a:ext uri="{0D108BD9-81ED-4DB2-BD59-A6C34878D82A}">
+                    <a16:rowId xmlns:a16="http://schemas.microsoft.com/office/drawing/2014/main" val="10002"/>
+                  </a:ext>
+                </a:extLst>
               </a:tr>
             </a:tbl>
           </a:graphicData>
@@ -6765,7 +6638,7 @@
       </p:graphicFrame>
       <p:sp>
         <p:nvSpPr>
-          <p:cNvPr id="12" name="Shape 7"/>
+          <p:cNvPr id="11" name="Shape 7"/>
           <p:cNvSpPr/>
           <p:nvPr/>
         </p:nvSpPr>
@@ -6787,6 +6660,13 @@
             <a:prstDash val="solid"/>
           </a:ln>
         </p:spPr>
+        <p:txBody>
+          <a:bodyPr/>
+          <a:lstStyle/>
+          <a:p>
+            <a:endParaRPr lang="es-CL"/>
+          </a:p>
+        </p:txBody>
       </p:sp>
       <p:sp>
         <p:nvSpPr>
@@ -6812,6 +6692,13 @@
             <a:prstDash val="solid"/>
           </a:ln>
         </p:spPr>
+        <p:txBody>
+          <a:bodyPr/>
+          <a:lstStyle/>
+          <a:p>
+            <a:endParaRPr lang="es-CL"/>
+          </a:p>
+        </p:txBody>
       </p:sp>
       <p:sp>
         <p:nvSpPr>
@@ -6834,7 +6721,7 @@
           <a:bodyPr wrap="square" lIns="0" tIns="0" rIns="0" bIns="0" rtlCol="0" anchor="ctr"/>
           <a:lstStyle/>
           <a:p>
-            <a:pPr indent="0" marL="0">
+            <a:pPr marL="0" indent="0">
               <a:buNone/>
             </a:pPr>
             <a:r>
@@ -6873,7 +6760,7 @@
           <a:bodyPr wrap="square" lIns="0" tIns="0" rIns="0" bIns="0" rtlCol="0" anchor="ctr"/>
           <a:lstStyle/>
           <a:p>
-            <a:pPr algn="l" indent="0" marL="0">
+            <a:pPr marL="0" indent="0" algn="l">
               <a:buNone/>
             </a:pPr>
             <a:r>
@@ -6912,7 +6799,7 @@
           <a:bodyPr wrap="square" lIns="0" tIns="0" rIns="0" bIns="0" rtlCol="0" anchor="ctr"/>
           <a:lstStyle/>
           <a:p>
-            <a:pPr algn="r" indent="0" marL="0">
+            <a:pPr marL="0" indent="0" algn="r">
               <a:buNone/>
             </a:pPr>
             <a:r>
@@ -6946,6 +6833,7 @@
         <a:solidFill>
           <a:srgbClr val="113B63"/>
         </a:solidFill>
+        <a:effectLst/>
       </p:bgPr>
     </p:bg>
     <p:spTree>
@@ -6984,6 +6872,13 @@
             <a:prstDash val="solid"/>
           </a:ln>
         </p:spPr>
+        <p:txBody>
+          <a:bodyPr/>
+          <a:lstStyle/>
+          <a:p>
+            <a:endParaRPr lang="es-CL"/>
+          </a:p>
+        </p:txBody>
       </p:sp>
       <p:sp>
         <p:nvSpPr>
@@ -7006,7 +6901,7 @@
           <a:bodyPr wrap="square" lIns="0" tIns="0" rIns="0" bIns="0" rtlCol="0" anchor="ctr"/>
           <a:lstStyle/>
           <a:p>
-            <a:pPr algn="ctr" indent="0" marL="0">
+            <a:pPr marL="0" indent="0" algn="ctr">
               <a:buNone/>
             </a:pPr>
             <a:r>
@@ -7070,7 +6965,7 @@
           <a:bodyPr wrap="square" lIns="0" tIns="0" rIns="0" bIns="0" rtlCol="0" anchor="ctr"/>
           <a:lstStyle/>
           <a:p>
-            <a:pPr algn="l" indent="0" marL="0">
+            <a:pPr marL="0" indent="0" algn="l">
               <a:buNone/>
             </a:pPr>
             <a:r>
@@ -7110,6 +7005,13 @@
             <a:prstDash val="solid"/>
           </a:ln>
         </p:spPr>
+        <p:txBody>
+          <a:bodyPr/>
+          <a:lstStyle/>
+          <a:p>
+            <a:endParaRPr lang="es-CL"/>
+          </a:p>
+        </p:txBody>
       </p:sp>
       <p:sp>
         <p:nvSpPr>
@@ -7132,7 +7034,7 @@
           <a:bodyPr wrap="square" lIns="0" tIns="0" rIns="0" bIns="0" rtlCol="0" anchor="ctr"/>
           <a:lstStyle/>
           <a:p>
-            <a:pPr indent="0" marL="0">
+            <a:pPr marL="0" indent="0">
               <a:buNone/>
             </a:pPr>
             <a:r>
@@ -7171,7 +7073,7 @@
           <a:bodyPr wrap="square" rtlCol="0" anchor="t"/>
           <a:lstStyle/>
           <a:p>
-            <a:pPr indent="0" marL="0">
+            <a:pPr marL="0" indent="0">
               <a:buNone/>
             </a:pPr>
             <a:r>
@@ -7185,13 +7087,35 @@
               </a:rPr>
               <a:t>(i) Trip-level cost function</a:t>
             </a:r>
-            <a:pPr indent="0" marL="0">
-              <a:spcAft>
-                <a:spcPts val="1000"/>
-              </a:spcAft>
+            <a:r>
+              <a:rPr lang="en-US" sz="1300" dirty="0">
+                <a:solidFill>
+                  <a:srgbClr val="0A2540"/>
+                </a:solidFill>
+                <a:latin typeface="Calibri" pitchFamily="34" charset="0"/>
+                <a:ea typeface="Calibri" pitchFamily="34" charset="-122"/>
+                <a:cs typeface="Calibri" pitchFamily="34" charset="-120"/>
+              </a:rPr>
+              <a:t> — translog C_vg(w, h, x, Z, Env), SUR by fleet. Recovers input demands (fuel, labor, ice) and elasticities of input substitution under climate shocks.</a:t>
+            </a:r>
+            <a:endParaRPr lang="en-US" sz="1300" dirty="0"/>
+          </a:p>
+          <a:p>
+            <a:pPr marL="0" indent="0">
               <a:buNone/>
             </a:pPr>
             <a:r>
+              <a:rPr lang="en-US" sz="1300" b="1" dirty="0">
+                <a:solidFill>
+                  <a:srgbClr val="113B63"/>
+                </a:solidFill>
+                <a:latin typeface="Calibri" pitchFamily="34" charset="0"/>
+                <a:ea typeface="Calibri" pitchFamily="34" charset="-122"/>
+                <a:cs typeface="Calibri" pitchFamily="34" charset="-120"/>
+              </a:rPr>
+              <a:t>(ii) Inverse demand (IAIDS)</a:t>
+            </a:r>
+            <a:r>
               <a:rPr lang="en-US" sz="1300" dirty="0">
                 <a:solidFill>
                   <a:srgbClr val="0A2540"/>
@@ -7200,12 +7124,12 @@
                 <a:ea typeface="Calibri" pitchFamily="34" charset="-122"/>
                 <a:cs typeface="Calibri" pitchFamily="34" charset="-120"/>
               </a:rPr>
-              <a:t> — translog C_vg(w, h, x, Z, Env), SUR by fleet. Recovers input demands (fuel, labor, ice) and elasticities of input substitution under climate shocks.</a:t>
+              <a:t> — log p_iy as a function of all species' landings, instrumented by SST, CHL, fuel prices. Resolves the simultaneity observed in Paper 1.</a:t>
             </a:r>
             <a:endParaRPr lang="en-US" sz="1300" dirty="0"/>
           </a:p>
           <a:p>
-            <a:pPr indent="0" marL="0">
+            <a:pPr marL="0" indent="0">
               <a:buNone/>
             </a:pPr>
             <a:r>
@@ -7217,45 +7141,8 @@
                 <a:ea typeface="Calibri" pitchFamily="34" charset="-122"/>
                 <a:cs typeface="Calibri" pitchFamily="34" charset="-120"/>
               </a:rPr>
-              <a:t>(ii) Inverse demand (IAIDS)</a:t>
-            </a:r>
-            <a:pPr indent="0" marL="0">
-              <a:spcAft>
-                <a:spcPts val="1000"/>
-              </a:spcAft>
-              <a:buNone/>
-            </a:pPr>
-            <a:r>
-              <a:rPr lang="en-US" sz="1300" dirty="0">
-                <a:solidFill>
-                  <a:srgbClr val="0A2540"/>
-                </a:solidFill>
-                <a:latin typeface="Calibri" pitchFamily="34" charset="0"/>
-                <a:ea typeface="Calibri" pitchFamily="34" charset="-122"/>
-                <a:cs typeface="Calibri" pitchFamily="34" charset="-120"/>
-              </a:rPr>
-              <a:t> — log p_iy as a function of all species' landings, instrumented by SST, CHL, fuel prices. Resolves the simultaneity observed in Paper 1.</a:t>
-            </a:r>
-            <a:endParaRPr lang="en-US" sz="1300" dirty="0"/>
-          </a:p>
-          <a:p>
-            <a:pPr indent="0" marL="0">
-              <a:buNone/>
-            </a:pPr>
-            <a:r>
-              <a:rPr lang="en-US" sz="1300" b="1" dirty="0">
-                <a:solidFill>
-                  <a:srgbClr val="113B63"/>
-                </a:solidFill>
-                <a:latin typeface="Calibri" pitchFamily="34" charset="0"/>
-                <a:ea typeface="Calibri" pitchFamily="34" charset="-122"/>
-                <a:cs typeface="Calibri" pitchFamily="34" charset="-120"/>
-              </a:rPr>
               <a:t>(iii) Vessel dynamic optimization</a:t>
             </a:r>
-            <a:pPr indent="0" marL="0">
-              <a:buNone/>
-            </a:pPr>
             <a:r>
               <a:rPr lang="en-US" sz="1300" dirty="0">
                 <a:solidFill>
@@ -7273,15 +7160,15 @@
       </p:sp>
       <p:pic>
         <p:nvPicPr>
-          <p:cNvPr id="6" name="Image 0" descr="/sessions/tender-gallant-volta/mnt/outputs/pices_build/assets/eq_dynopt.png">    </p:cNvPr>
+          <p:cNvPr id="6" name="Image 0" descr="/sessions/tender-gallant-volta/mnt/outputs/pices_build/assets/eq_dynopt.png"/>
           <p:cNvPicPr>
             <a:picLocks noChangeAspect="1"/>
           </p:cNvPicPr>
           <p:nvPr/>
         </p:nvPicPr>
         <p:blipFill>
-          <a:blip r:embed="rId1"/>
-          <a:srcRect l="0" r="0" t="0" b="0"/>
+          <a:blip r:embed="rId3"/>
+          <a:srcRect/>
           <a:stretch/>
         </p:blipFill>
         <p:spPr>
@@ -7315,7 +7202,7 @@
           <a:bodyPr wrap="square" lIns="0" tIns="0" rIns="0" bIns="0" rtlCol="0" anchor="ctr"/>
           <a:lstStyle/>
           <a:p>
-            <a:pPr indent="0" marL="0">
+            <a:pPr marL="0" indent="0">
               <a:buNone/>
             </a:pPr>
             <a:r>
@@ -7417,7 +7304,7 @@
             <a:endParaRPr lang="en-US" sz="1300" dirty="0"/>
           </a:p>
           <a:p>
-            <a:pPr lvl="1" marL="685800" indent="-342900">
+            <a:pPr marL="685800" lvl="1" indent="-342900">
               <a:spcAft>
                 <a:spcPts val="400"/>
               </a:spcAft>
@@ -7438,7 +7325,7 @@
             <a:endParaRPr lang="en-US" sz="1300" dirty="0"/>
           </a:p>
           <a:p>
-            <a:pPr lvl="1" marL="685800" indent="-342900">
+            <a:pPr marL="685800" lvl="1" indent="-342900">
               <a:spcAft>
                 <a:spcPts val="400"/>
               </a:spcAft>
@@ -7459,7 +7346,7 @@
             <a:endParaRPr lang="en-US" sz="1300" dirty="0"/>
           </a:p>
           <a:p>
-            <a:pPr lvl="1" marL="685800" indent="-342900">
+            <a:pPr marL="685800" lvl="1" indent="-342900">
               <a:buSzPct val="100000"/>
               <a:buChar char="•"/>
             </a:pPr>
@@ -7499,7 +7386,7 @@
           <a:bodyPr wrap="square" lIns="0" tIns="0" rIns="0" bIns="0" rtlCol="0" anchor="ctr"/>
           <a:lstStyle/>
           <a:p>
-            <a:pPr algn="l" indent="0" marL="0">
+            <a:pPr marL="0" indent="0" algn="l">
               <a:buNone/>
             </a:pPr>
             <a:r>
@@ -7538,7 +7425,7 @@
           <a:bodyPr wrap="square" lIns="0" tIns="0" rIns="0" bIns="0" rtlCol="0" anchor="ctr"/>
           <a:lstStyle/>
           <a:p>
-            <a:pPr algn="r" indent="0" marL="0">
+            <a:pPr marL="0" indent="0" algn="r">
               <a:buNone/>
             </a:pPr>
             <a:r>
@@ -7602,7 +7489,7 @@
           <a:bodyPr wrap="square" lIns="0" tIns="0" rIns="0" bIns="0" rtlCol="0" anchor="ctr"/>
           <a:lstStyle/>
           <a:p>
-            <a:pPr algn="l" indent="0" marL="0">
+            <a:pPr marL="0" indent="0" algn="l">
               <a:buNone/>
             </a:pPr>
             <a:r>
@@ -7642,6 +7529,13 @@
             <a:prstDash val="solid"/>
           </a:ln>
         </p:spPr>
+        <p:txBody>
+          <a:bodyPr/>
+          <a:lstStyle/>
+          <a:p>
+            <a:endParaRPr lang="es-CL"/>
+          </a:p>
+        </p:txBody>
       </p:sp>
       <p:sp>
         <p:nvSpPr>
@@ -7664,7 +7558,7 @@
           <a:bodyPr wrap="square" rtlCol="0" anchor="t"/>
           <a:lstStyle/>
           <a:p>
-            <a:pPr indent="0" marL="0">
+            <a:pPr marL="0" indent="0">
               <a:spcAft>
                 <a:spcPts val="1200"/>
               </a:spcAft>
@@ -7681,7 +7575,54 @@
               </a:rPr>
               <a:t>1. </a:t>
             </a:r>
-            <a:pPr indent="0" marL="0">
+            <a:r>
+              <a:rPr lang="en-US" sz="1600" b="1" dirty="0">
+                <a:solidFill>
+                  <a:srgbClr val="113B63"/>
+                </a:solidFill>
+                <a:latin typeface="Calibri" pitchFamily="34" charset="0"/>
+                <a:ea typeface="Calibri" pitchFamily="34" charset="-122"/>
+                <a:cs typeface="Calibri" pitchFamily="34" charset="-120"/>
+              </a:rPr>
+              <a:t>Paper 1: </a:t>
+            </a:r>
+            <a:r>
+              <a:rPr lang="en-US" sz="1600" dirty="0">
+                <a:solidFill>
+                  <a:srgbClr val="0A2540"/>
+                </a:solidFill>
+                <a:latin typeface="Calibri" pitchFamily="34" charset="0"/>
+                <a:ea typeface="Calibri" pitchFamily="34" charset="-122"/>
+                <a:cs typeface="Calibri" pitchFamily="34" charset="-120"/>
+              </a:rPr>
+              <a:t>fleet-specific NB model of annual trips reveals two completely different participation technologies in the same fishery.</a:t>
+            </a:r>
+            <a:endParaRPr lang="en-US" sz="1600" dirty="0"/>
+          </a:p>
+        </p:txBody>
+      </p:sp>
+      <p:sp>
+        <p:nvSpPr>
+          <p:cNvPr id="5" name="Text 3"/>
+          <p:cNvSpPr/>
+          <p:nvPr/>
+        </p:nvSpPr>
+        <p:spPr>
+          <a:xfrm>
+            <a:off x="457200" y="2103120"/>
+            <a:ext cx="11277295" cy="1920240"/>
+          </a:xfrm>
+          <a:prstGeom prst="rect">
+            <a:avLst/>
+          </a:prstGeom>
+          <a:noFill/>
+          <a:ln/>
+        </p:spPr>
+        <p:txBody>
+          <a:bodyPr wrap="square" rtlCol="0" anchor="t"/>
+          <a:lstStyle/>
+          <a:p>
+            <a:pPr marL="0" indent="0">
               <a:spcAft>
                 <a:spcPts val="1200"/>
               </a:spcAft>
@@ -7690,6 +7631,17 @@
             <a:r>
               <a:rPr lang="en-US" sz="1600" b="1" dirty="0">
                 <a:solidFill>
+                  <a:srgbClr val="C4830A"/>
+                </a:solidFill>
+                <a:latin typeface="Calibri" pitchFamily="34" charset="0"/>
+                <a:ea typeface="Calibri" pitchFamily="34" charset="-122"/>
+                <a:cs typeface="Calibri" pitchFamily="34" charset="-120"/>
+              </a:rPr>
+              <a:t>2. </a:t>
+            </a:r>
+            <a:r>
+              <a:rPr lang="en-US" sz="1600" b="1" dirty="0">
+                <a:solidFill>
                   <a:srgbClr val="113B63"/>
                 </a:solidFill>
                 <a:latin typeface="Calibri" pitchFamily="34" charset="0"/>
@@ -7698,12 +7650,6 @@
               </a:rPr>
               <a:t>Paper 1: </a:t>
             </a:r>
-            <a:pPr indent="0" marL="0">
-              <a:spcAft>
-                <a:spcPts val="1200"/>
-              </a:spcAft>
-              <a:buNone/>
-            </a:pPr>
             <a:r>
               <a:rPr lang="en-US" sz="1600" dirty="0">
                 <a:solidFill>
@@ -7713,7 +7659,7 @@
                 <a:ea typeface="Calibri" pitchFamily="34" charset="-122"/>
                 <a:cs typeface="Calibri" pitchFamily="34" charset="-120"/>
               </a:rPr>
-              <a:t>fleet-specific NB model of annual trips reveals two completely different participation technologies in the same fishery.</a:t>
+              <a:t>under counterfactual shocks, the marginal ART:IND participation asymmetry is ~11:1 (conditional ~3.4:1), running through (i) the probability of portfolio collapse in the indirect biomass channel and (ii) direct weather exposure (β_w^ART &lt; 0, β_w^IND ≈ 0); quota cross-sector limits lock it in.</a:t>
             </a:r>
             <a:endParaRPr lang="en-US" sz="1600" dirty="0"/>
           </a:p>
@@ -7721,14 +7667,14 @@
       </p:sp>
       <p:sp>
         <p:nvSpPr>
-          <p:cNvPr id="5" name="Text 3"/>
-          <p:cNvSpPr/>
-          <p:nvPr/>
-        </p:nvSpPr>
-        <p:spPr>
-          <a:xfrm>
-            <a:off x="457200" y="2103120"/>
-            <a:ext cx="11277295" cy="1920240"/>
+          <p:cNvPr id="6" name="Text 4"/>
+          <p:cNvSpPr/>
+          <p:nvPr/>
+        </p:nvSpPr>
+        <p:spPr>
+          <a:xfrm>
+            <a:off x="457200" y="4114800"/>
+            <a:ext cx="11277295" cy="1645920"/>
           </a:xfrm>
           <a:prstGeom prst="rect">
             <a:avLst/>
@@ -7740,10 +7686,7 @@
           <a:bodyPr wrap="square" rtlCol="0" anchor="t"/>
           <a:lstStyle/>
           <a:p>
-            <a:pPr indent="0" marL="0">
-              <a:spcAft>
-                <a:spcPts val="1200"/>
-              </a:spcAft>
+            <a:pPr marL="0" indent="0">
               <a:buNone/>
             </a:pPr>
             <a:r>
@@ -7755,14 +7698,8 @@
                 <a:ea typeface="Calibri" pitchFamily="34" charset="-122"/>
                 <a:cs typeface="Calibri" pitchFamily="34" charset="-120"/>
               </a:rPr>
-              <a:t>2. </a:t>
-            </a:r>
-            <a:pPr indent="0" marL="0">
-              <a:spcAft>
-                <a:spcPts val="1200"/>
-              </a:spcAft>
-              <a:buNone/>
-            </a:pPr>
+              <a:t>3. </a:t>
+            </a:r>
             <a:r>
               <a:rPr lang="en-US" sz="1600" b="1" dirty="0">
                 <a:solidFill>
@@ -7772,81 +7709,8 @@
                 <a:ea typeface="Calibri" pitchFamily="34" charset="-122"/>
                 <a:cs typeface="Calibri" pitchFamily="34" charset="-120"/>
               </a:rPr>
-              <a:t>Paper 1: </a:t>
-            </a:r>
-            <a:pPr indent="0" marL="0">
-              <a:spcAft>
-                <a:spcPts val="1200"/>
-              </a:spcAft>
-              <a:buNone/>
-            </a:pPr>
-            <a:r>
-              <a:rPr lang="en-US" sz="1600" dirty="0">
-                <a:solidFill>
-                  <a:srgbClr val="0A2540"/>
-                </a:solidFill>
-                <a:latin typeface="Calibri" pitchFamily="34" charset="0"/>
-                <a:ea typeface="Calibri" pitchFamily="34" charset="-122"/>
-                <a:cs typeface="Calibri" pitchFamily="34" charset="-120"/>
-              </a:rPr>
-              <a:t>under counterfactual shocks, the marginal ART:IND participation asymmetry is ~11:1 (conditional ~3.4:1), running through (i) the probability of portfolio collapse in the indirect biomass channel and (ii) direct weather exposure (β_w^ART &lt; 0, β_w^IND ≈ 0); quota cross-sector limits lock it in.</a:t>
-            </a:r>
-            <a:endParaRPr lang="en-US" sz="1600" dirty="0"/>
-          </a:p>
-        </p:txBody>
-      </p:sp>
-      <p:sp>
-        <p:nvSpPr>
-          <p:cNvPr id="6" name="Text 4"/>
-          <p:cNvSpPr/>
-          <p:nvPr/>
-        </p:nvSpPr>
-        <p:spPr>
-          <a:xfrm>
-            <a:off x="457200" y="4114800"/>
-            <a:ext cx="11277295" cy="1645920"/>
-          </a:xfrm>
-          <a:prstGeom prst="rect">
-            <a:avLst/>
-          </a:prstGeom>
-          <a:noFill/>
-          <a:ln/>
-        </p:spPr>
-        <p:txBody>
-          <a:bodyPr wrap="square" rtlCol="0" anchor="t"/>
-          <a:lstStyle/>
-          <a:p>
-            <a:pPr indent="0" marL="0">
-              <a:buNone/>
-            </a:pPr>
-            <a:r>
-              <a:rPr lang="en-US" sz="1600" b="1" dirty="0">
-                <a:solidFill>
-                  <a:srgbClr val="C4830A"/>
-                </a:solidFill>
-                <a:latin typeface="Calibri" pitchFamily="34" charset="0"/>
-                <a:ea typeface="Calibri" pitchFamily="34" charset="-122"/>
-                <a:cs typeface="Calibri" pitchFamily="34" charset="-120"/>
-              </a:rPr>
-              <a:t>3. </a:t>
-            </a:r>
-            <a:pPr indent="0" marL="0">
-              <a:buNone/>
-            </a:pPr>
-            <a:r>
-              <a:rPr lang="en-US" sz="1600" b="1" dirty="0">
-                <a:solidFill>
-                  <a:srgbClr val="113B63"/>
-                </a:solidFill>
-                <a:latin typeface="Calibri" pitchFamily="34" charset="0"/>
-                <a:ea typeface="Calibri" pitchFamily="34" charset="-122"/>
-                <a:cs typeface="Calibri" pitchFamily="34" charset="-120"/>
-              </a:rPr>
               <a:t>Paper 2: </a:t>
             </a:r>
-            <a:pPr indent="0" marL="0">
-              <a:buNone/>
-            </a:pPr>
             <a:r>
               <a:rPr lang="en-US" sz="1600" dirty="0">
                 <a:solidFill>
@@ -7886,6 +7750,13 @@
             <a:prstDash val="solid"/>
           </a:ln>
         </p:spPr>
+        <p:txBody>
+          <a:bodyPr/>
+          <a:lstStyle/>
+          <a:p>
+            <a:endParaRPr lang="es-CL"/>
+          </a:p>
+        </p:txBody>
       </p:sp>
       <p:sp>
         <p:nvSpPr>
@@ -7911,6 +7782,13 @@
             <a:prstDash val="solid"/>
           </a:ln>
         </p:spPr>
+        <p:txBody>
+          <a:bodyPr/>
+          <a:lstStyle/>
+          <a:p>
+            <a:endParaRPr lang="es-CL"/>
+          </a:p>
+        </p:txBody>
       </p:sp>
       <p:sp>
         <p:nvSpPr>
@@ -7933,7 +7811,7 @@
           <a:bodyPr wrap="square" lIns="0" tIns="0" rIns="0" bIns="0" rtlCol="0" anchor="ctr"/>
           <a:lstStyle/>
           <a:p>
-            <a:pPr indent="0" marL="0">
+            <a:pPr marL="0" indent="0">
               <a:buNone/>
             </a:pPr>
             <a:r>
@@ -7972,7 +7850,7 @@
           <a:bodyPr wrap="square" lIns="0" tIns="0" rIns="0" bIns="0" rtlCol="0" anchor="ctr"/>
           <a:lstStyle/>
           <a:p>
-            <a:pPr algn="l" indent="0" marL="0">
+            <a:pPr marL="0" indent="0" algn="l">
               <a:buNone/>
             </a:pPr>
             <a:r>
@@ -8011,7 +7889,7 @@
           <a:bodyPr wrap="square" lIns="0" tIns="0" rIns="0" bIns="0" rtlCol="0" anchor="ctr"/>
           <a:lstStyle/>
           <a:p>
-            <a:pPr algn="r" indent="0" marL="0">
+            <a:pPr marL="0" indent="0" algn="r">
               <a:buNone/>
             </a:pPr>
             <a:r>
@@ -8045,6 +7923,7 @@
         <a:solidFill>
           <a:srgbClr val="113B63"/>
         </a:solidFill>
+        <a:effectLst/>
       </p:bgPr>
     </p:bg>
     <p:spTree>
@@ -8083,6 +7962,16 @@
             <a:prstDash val="solid"/>
           </a:ln>
         </p:spPr>
+        <p:txBody>
+          <a:bodyPr/>
+          <a:lstStyle/>
+          <a:p>
+            <a:endParaRPr lang="es-CL">
+              <a:latin typeface="Poppins" panose="00000500000000000000" pitchFamily="2" charset="0"/>
+              <a:cs typeface="Poppins" panose="00000500000000000000" pitchFamily="2" charset="0"/>
+            </a:endParaRPr>
+          </a:p>
+        </p:txBody>
       </p:sp>
       <p:sp>
         <p:nvSpPr>
@@ -8105,7 +7994,7 @@
           <a:bodyPr wrap="square" lIns="0" tIns="0" rIns="0" bIns="0" rtlCol="0" anchor="ctr"/>
           <a:lstStyle/>
           <a:p>
-            <a:pPr algn="ctr" indent="0" marL="0">
+            <a:pPr marL="0" indent="0" algn="ctr">
               <a:buNone/>
             </a:pPr>
             <a:r>
@@ -8113,13 +8002,16 @@
                 <a:solidFill>
                   <a:srgbClr val="FFFFFF"/>
                 </a:solidFill>
-                <a:latin typeface="Calibri" pitchFamily="34" charset="0"/>
-                <a:ea typeface="Calibri" pitchFamily="34" charset="-122"/>
-                <a:cs typeface="Calibri" pitchFamily="34" charset="-120"/>
+                <a:latin typeface="Poppins" panose="00000500000000000000" pitchFamily="2" charset="0"/>
+                <a:ea typeface="Calibri" pitchFamily="34" charset="-122"/>
+                <a:cs typeface="Poppins" panose="00000500000000000000" pitchFamily="2" charset="0"/>
               </a:rPr>
               <a:t>¡Gracias! / Thank you</a:t>
             </a:r>
-            <a:endParaRPr lang="en-US" sz="4400" dirty="0"/>
+            <a:endParaRPr lang="en-US" sz="4400" dirty="0">
+              <a:latin typeface="Poppins" panose="00000500000000000000" pitchFamily="2" charset="0"/>
+              <a:cs typeface="Poppins" panose="00000500000000000000" pitchFamily="2" charset="0"/>
+            </a:endParaRPr>
           </a:p>
         </p:txBody>
       </p:sp>
@@ -8144,7 +8036,7 @@
           <a:bodyPr wrap="square" lIns="0" tIns="0" rIns="0" bIns="0" rtlCol="0" anchor="ctr"/>
           <a:lstStyle/>
           <a:p>
-            <a:pPr algn="ctr" indent="0" marL="0">
+            <a:pPr marL="0" indent="0" algn="ctr">
               <a:buNone/>
             </a:pPr>
             <a:r>
@@ -8152,13 +8044,16 @@
                 <a:solidFill>
                   <a:srgbClr val="C4830A"/>
                 </a:solidFill>
-                <a:latin typeface="Calibri" pitchFamily="34" charset="0"/>
-                <a:ea typeface="Calibri" pitchFamily="34" charset="-122"/>
-                <a:cs typeface="Calibri" pitchFamily="34" charset="-120"/>
+                <a:latin typeface="Poppins" panose="00000500000000000000" pitchFamily="2" charset="0"/>
+                <a:ea typeface="Calibri" pitchFamily="34" charset="-122"/>
+                <a:cs typeface="Poppins" panose="00000500000000000000" pitchFamily="2" charset="0"/>
               </a:rPr>
               <a:t>Questions?</a:t>
             </a:r>
-            <a:endParaRPr lang="en-US" sz="2800" dirty="0"/>
+            <a:endParaRPr lang="en-US" sz="2800" dirty="0">
+              <a:latin typeface="Poppins" panose="00000500000000000000" pitchFamily="2" charset="0"/>
+              <a:cs typeface="Poppins" panose="00000500000000000000" pitchFamily="2" charset="0"/>
+            </a:endParaRPr>
           </a:p>
         </p:txBody>
       </p:sp>
@@ -8183,7 +8078,7 @@
           <a:bodyPr wrap="square" lIns="0" tIns="0" rIns="0" bIns="0" rtlCol="0" anchor="ctr"/>
           <a:lstStyle/>
           <a:p>
-            <a:pPr algn="ctr" indent="0" marL="0">
+            <a:pPr marL="0" indent="0" algn="ctr">
               <a:buNone/>
             </a:pPr>
             <a:r>
@@ -8191,13 +8086,16 @@
                 <a:solidFill>
                   <a:srgbClr val="FFFFFF"/>
                 </a:solidFill>
-                <a:latin typeface="Calibri" pitchFamily="34" charset="0"/>
-                <a:ea typeface="Calibri" pitchFamily="34" charset="-122"/>
-                <a:cs typeface="Calibri" pitchFamily="34" charset="-120"/>
+                <a:latin typeface="Poppins" panose="00000500000000000000" pitchFamily="2" charset="0"/>
+                <a:ea typeface="Calibri" pitchFamily="34" charset="-122"/>
+                <a:cs typeface="Poppins" panose="00000500000000000000" pitchFamily="2" charset="0"/>
               </a:rPr>
               <a:t>Felipe J. Quezada-Escalona</a:t>
             </a:r>
-            <a:endParaRPr lang="en-US" sz="1800" dirty="0"/>
+            <a:endParaRPr lang="en-US" sz="1800" dirty="0">
+              <a:latin typeface="Poppins" panose="00000500000000000000" pitchFamily="2" charset="0"/>
+              <a:cs typeface="Poppins" panose="00000500000000000000" pitchFamily="2" charset="0"/>
+            </a:endParaRPr>
           </a:p>
         </p:txBody>
       </p:sp>
@@ -8222,7 +8120,7 @@
           <a:bodyPr wrap="square" lIns="0" tIns="0" rIns="0" bIns="0" rtlCol="0" anchor="ctr"/>
           <a:lstStyle/>
           <a:p>
-            <a:pPr algn="ctr" indent="0" marL="0">
+            <a:pPr marL="0" indent="0" algn="ctr">
               <a:buNone/>
             </a:pPr>
             <a:r>
@@ -8230,33 +8128,85 @@
                 <a:solidFill>
                   <a:srgbClr val="CBD5E1"/>
                 </a:solidFill>
-                <a:latin typeface="Calibri" pitchFamily="34" charset="0"/>
-                <a:ea typeface="Calibri" pitchFamily="34" charset="-122"/>
-                <a:cs typeface="Calibri" pitchFamily="34" charset="-120"/>
+                <a:latin typeface="Poppins" panose="00000500000000000000" pitchFamily="2" charset="0"/>
+                <a:ea typeface="Calibri" pitchFamily="34" charset="-122"/>
+                <a:cs typeface="Poppins" panose="00000500000000000000" pitchFamily="2" charset="0"/>
               </a:rPr>
               <a:t>felipequezada@udec.cl   ·   felipequezada.com</a:t>
             </a:r>
-            <a:endParaRPr lang="en-US" sz="1400" dirty="0"/>
+            <a:endParaRPr lang="en-US" sz="1400" dirty="0">
+              <a:latin typeface="Poppins" panose="00000500000000000000" pitchFamily="2" charset="0"/>
+              <a:cs typeface="Poppins" panose="00000500000000000000" pitchFamily="2" charset="0"/>
+            </a:endParaRPr>
+          </a:p>
+        </p:txBody>
+      </p:sp>
+      <p:sp>
+        <p:nvSpPr>
+          <p:cNvPr id="9" name="Text 5"/>
+          <p:cNvSpPr/>
+          <p:nvPr/>
+        </p:nvSpPr>
+        <p:spPr>
+          <a:xfrm>
+            <a:off x="914400" y="6355080"/>
+            <a:ext cx="10362895" cy="274320"/>
+          </a:xfrm>
+          <a:prstGeom prst="rect">
+            <a:avLst/>
+          </a:prstGeom>
+          <a:noFill/>
+          <a:ln/>
+        </p:spPr>
+        <p:txBody>
+          <a:bodyPr wrap="square" lIns="0" tIns="0" rIns="0" bIns="0" rtlCol="0" anchor="ctr"/>
+          <a:lstStyle/>
+          <a:p>
+            <a:pPr marL="0" indent="0" algn="ctr">
+              <a:buNone/>
+            </a:pPr>
+            <a:r>
+              <a:rPr lang="en-US" sz="1000" i="1" dirty="0">
+                <a:solidFill>
+                  <a:srgbClr val="94A3B8"/>
+                </a:solidFill>
+                <a:latin typeface="Poppins" panose="00000500000000000000" pitchFamily="2" charset="0"/>
+                <a:ea typeface="Calibri" pitchFamily="34" charset="-122"/>
+                <a:cs typeface="Poppins" panose="00000500000000000000" pitchFamily="2" charset="0"/>
+              </a:rPr>
+              <a:t>Funded by ANID-Chile, FONDECYT Iniciación N° 11250223.</a:t>
+            </a:r>
+            <a:endParaRPr lang="en-US" sz="1000" dirty="0">
+              <a:latin typeface="Poppins" panose="00000500000000000000" pitchFamily="2" charset="0"/>
+              <a:cs typeface="Poppins" panose="00000500000000000000" pitchFamily="2" charset="0"/>
+            </a:endParaRPr>
           </a:p>
         </p:txBody>
       </p:sp>
       <p:pic>
         <p:nvPicPr>
-          <p:cNvPr id="7" name="Image 0" descr="/sessions/tender-gallant-volta/mnt/outputs/pices_build/assets/depto_economia_blanco.png">    </p:cNvPr>
+          <p:cNvPr id="11" name="Imagen 10">
+            <a:extLst>
+              <a:ext uri="{FF2B5EF4-FFF2-40B4-BE49-F238E27FC236}">
+                <a16:creationId xmlns:a16="http://schemas.microsoft.com/office/drawing/2014/main" id="{C1E24235-D95B-3370-C72D-E33DE6D451E7}"/>
+              </a:ext>
+            </a:extLst>
+          </p:cNvPr>
           <p:cNvPicPr>
             <a:picLocks noChangeAspect="1"/>
           </p:cNvPicPr>
           <p:nvPr/>
         </p:nvPicPr>
         <p:blipFill>
-          <a:blip r:embed="rId1"/>
-          <a:srcRect l="0" r="0" t="0" b="0"/>
-          <a:stretch/>
+          <a:blip r:embed="rId3"/>
+          <a:stretch>
+            <a:fillRect/>
+          </a:stretch>
         </p:blipFill>
         <p:spPr>
           <a:xfrm>
-            <a:off x="3718408" y="5303520"/>
-            <a:ext cx="1828800" cy="457200"/>
+            <a:off x="7263177" y="4594860"/>
+            <a:ext cx="929046" cy="1554480"/>
           </a:xfrm>
           <a:prstGeom prst="rect">
             <a:avLst/>
@@ -8265,66 +8215,34 @@
       </p:pic>
       <p:pic>
         <p:nvPicPr>
-          <p:cNvPr id="8" name="Image 1" descr="/sessions/tender-gallant-volta/mnt/outputs/pices_build/assets/incar2_blanco.png">    </p:cNvPr>
+          <p:cNvPr id="15" name="Imagen 14">
+            <a:extLst>
+              <a:ext uri="{FF2B5EF4-FFF2-40B4-BE49-F238E27FC236}">
+                <a16:creationId xmlns:a16="http://schemas.microsoft.com/office/drawing/2014/main" id="{9CF309E6-8482-830B-C84B-8EEBD4BFC95D}"/>
+              </a:ext>
+            </a:extLst>
+          </p:cNvPr>
           <p:cNvPicPr>
             <a:picLocks noChangeAspect="1"/>
           </p:cNvPicPr>
           <p:nvPr/>
         </p:nvPicPr>
         <p:blipFill>
-          <a:blip r:embed="rId2"/>
-          <a:srcRect l="0" r="0" t="0" b="0"/>
-          <a:stretch/>
+          <a:blip r:embed="rId4"/>
+          <a:stretch>
+            <a:fillRect/>
+          </a:stretch>
         </p:blipFill>
         <p:spPr>
           <a:xfrm>
-            <a:off x="6644488" y="5166360"/>
-            <a:ext cx="1828800" cy="777240"/>
+            <a:off x="4031998" y="5053014"/>
+            <a:ext cx="3018694" cy="775332"/>
           </a:xfrm>
           <a:prstGeom prst="rect">
             <a:avLst/>
           </a:prstGeom>
         </p:spPr>
       </p:pic>
-      <p:sp>
-        <p:nvSpPr>
-          <p:cNvPr id="9" name="Text 5"/>
-          <p:cNvSpPr/>
-          <p:nvPr/>
-        </p:nvSpPr>
-        <p:spPr>
-          <a:xfrm>
-            <a:off x="914400" y="6355080"/>
-            <a:ext cx="10362895" cy="274320"/>
-          </a:xfrm>
-          <a:prstGeom prst="rect">
-            <a:avLst/>
-          </a:prstGeom>
-          <a:noFill/>
-          <a:ln/>
-        </p:spPr>
-        <p:txBody>
-          <a:bodyPr wrap="square" lIns="0" tIns="0" rIns="0" bIns="0" rtlCol="0" anchor="ctr"/>
-          <a:lstStyle/>
-          <a:p>
-            <a:pPr algn="ctr" indent="0" marL="0">
-              <a:buNone/>
-            </a:pPr>
-            <a:r>
-              <a:rPr lang="en-US" sz="1000" i="1" dirty="0">
-                <a:solidFill>
-                  <a:srgbClr val="94A3B8"/>
-                </a:solidFill>
-                <a:latin typeface="Calibri" pitchFamily="34" charset="0"/>
-                <a:ea typeface="Calibri" pitchFamily="34" charset="-122"/>
-                <a:cs typeface="Calibri" pitchFamily="34" charset="-120"/>
-              </a:rPr>
-              <a:t>Funded by ANID-Chile, FONDECYT Iniciación N° 11250223.</a:t>
-            </a:r>
-            <a:endParaRPr lang="en-US" sz="1000" dirty="0"/>
-          </a:p>
-        </p:txBody>
-      </p:sp>
     </p:spTree>
   </p:cSld>
   <p:clrMapOvr>
@@ -8341,6 +8259,7 @@
         <a:solidFill>
           <a:srgbClr val="113B63"/>
         </a:solidFill>
+        <a:effectLst/>
       </p:bgPr>
     </p:bg>
     <p:spTree>
@@ -8379,6 +8298,13 @@
             <a:prstDash val="solid"/>
           </a:ln>
         </p:spPr>
+        <p:txBody>
+          <a:bodyPr/>
+          <a:lstStyle/>
+          <a:p>
+            <a:endParaRPr lang="es-CL"/>
+          </a:p>
+        </p:txBody>
       </p:sp>
       <p:sp>
         <p:nvSpPr>
@@ -8401,7 +8327,7 @@
           <a:bodyPr wrap="square" lIns="0" tIns="0" rIns="0" bIns="0" rtlCol="0" anchor="ctr"/>
           <a:lstStyle/>
           <a:p>
-            <a:pPr algn="ctr" indent="0" marL="0">
+            <a:pPr marL="0" indent="0" algn="ctr">
               <a:buNone/>
             </a:pPr>
             <a:r>
@@ -8465,7 +8391,7 @@
           <a:bodyPr wrap="square" lIns="0" tIns="0" rIns="0" bIns="0" rtlCol="0" anchor="ctr"/>
           <a:lstStyle/>
           <a:p>
-            <a:pPr algn="l" indent="0" marL="0">
+            <a:pPr marL="0" indent="0" algn="l">
               <a:buNone/>
             </a:pPr>
             <a:r>
@@ -8505,6 +8431,13 @@
             <a:prstDash val="solid"/>
           </a:ln>
         </p:spPr>
+        <p:txBody>
+          <a:bodyPr/>
+          <a:lstStyle/>
+          <a:p>
+            <a:endParaRPr lang="es-CL"/>
+          </a:p>
+        </p:txBody>
       </p:sp>
       <p:sp>
         <p:nvSpPr>
@@ -8527,7 +8460,7 @@
           <a:bodyPr wrap="square" lIns="0" tIns="0" rIns="0" bIns="0" rtlCol="0" anchor="ctr"/>
           <a:lstStyle/>
           <a:p>
-            <a:pPr indent="0" marL="0">
+            <a:pPr marL="0" indent="0">
               <a:buNone/>
             </a:pPr>
             <a:r>
@@ -8547,15 +8480,15 @@
       </p:sp>
       <p:pic>
         <p:nvPicPr>
-          <p:cNvPr id="5" name="Image 0" descr="/sessions/tender-gallant-volta/mnt/outputs/pices_build/assets/eq_schaefer.png">    </p:cNvPr>
+          <p:cNvPr id="5" name="Image 0" descr="/sessions/tender-gallant-volta/mnt/outputs/pices_build/assets/eq_schaefer.png"/>
           <p:cNvPicPr>
             <a:picLocks noChangeAspect="1"/>
           </p:cNvPicPr>
           <p:nvPr/>
         </p:nvPicPr>
         <p:blipFill>
-          <a:blip r:embed="rId1"/>
-          <a:srcRect l="0" r="0" t="0" b="0"/>
+          <a:blip r:embed="rId3"/>
+          <a:srcRect/>
           <a:stretch/>
         </p:blipFill>
         <p:spPr>
@@ -8589,7 +8522,7 @@
           <a:bodyPr wrap="square" lIns="0" tIns="0" rIns="0" bIns="0" rtlCol="0" anchor="ctr"/>
           <a:lstStyle/>
           <a:p>
-            <a:pPr indent="0" marL="0">
+            <a:pPr marL="0" indent="0">
               <a:buNone/>
             </a:pPr>
             <a:r>
@@ -8609,15 +8542,15 @@
       </p:sp>
       <p:pic>
         <p:nvPicPr>
-          <p:cNvPr id="7" name="Image 1" descr="/sessions/tender-gallant-volta/mnt/outputs/pices_build/assets/eq_r_shifter.png">    </p:cNvPr>
+          <p:cNvPr id="7" name="Image 1" descr="/sessions/tender-gallant-volta/mnt/outputs/pices_build/assets/eq_r_shifter.png"/>
           <p:cNvPicPr>
             <a:picLocks noChangeAspect="1"/>
           </p:cNvPicPr>
           <p:nvPr/>
         </p:nvPicPr>
         <p:blipFill>
-          <a:blip r:embed="rId2"/>
-          <a:srcRect l="0" r="0" t="0" b="0"/>
+          <a:blip r:embed="rId4"/>
+          <a:srcRect/>
           <a:stretch/>
         </p:blipFill>
         <p:spPr>
@@ -8651,7 +8584,7 @@
           <a:bodyPr wrap="square" lIns="0" tIns="0" rIns="0" bIns="0" rtlCol="0" anchor="t"/>
           <a:lstStyle/>
           <a:p>
-            <a:pPr indent="0" marL="0">
+            <a:pPr marL="0" indent="0">
               <a:buNone/>
             </a:pPr>
             <a:r>
@@ -8690,7 +8623,7 @@
           <a:bodyPr wrap="square" lIns="0" tIns="0" rIns="0" bIns="0" rtlCol="0" anchor="ctr"/>
           <a:lstStyle/>
           <a:p>
-            <a:pPr indent="0" marL="0">
+            <a:pPr marL="0" indent="0">
               <a:buNone/>
             </a:pPr>
             <a:r>
@@ -8710,15 +8643,15 @@
       </p:sp>
       <p:pic>
         <p:nvPicPr>
-          <p:cNvPr id="10" name="Image 2" descr="/sessions/tender-gallant-volta/mnt/outputs/pices_build/assets/eq_obs.png">    </p:cNvPr>
+          <p:cNvPr id="10" name="Image 2" descr="/sessions/tender-gallant-volta/mnt/outputs/pices_build/assets/eq_obs.png"/>
           <p:cNvPicPr>
             <a:picLocks noChangeAspect="1"/>
           </p:cNvPicPr>
           <p:nvPr/>
         </p:nvPicPr>
         <p:blipFill>
-          <a:blip r:embed="rId3"/>
-          <a:srcRect l="0" r="0" t="0" b="0"/>
+          <a:blip r:embed="rId5"/>
+          <a:srcRect/>
           <a:stretch/>
         </p:blipFill>
         <p:spPr>
@@ -8752,7 +8685,7 @@
           <a:bodyPr wrap="square" lIns="0" tIns="0" rIns="0" bIns="0" rtlCol="0" anchor="ctr"/>
           <a:lstStyle/>
           <a:p>
-            <a:pPr indent="0" marL="0">
+            <a:pPr marL="0" indent="0">
               <a:buNone/>
             </a:pPr>
             <a:r>
@@ -8791,7 +8724,7 @@
           <a:bodyPr wrap="square" lIns="0" tIns="0" rIns="0" bIns="0" rtlCol="0" anchor="ctr"/>
           <a:lstStyle/>
           <a:p>
-            <a:pPr indent="0" marL="0">
+            <a:pPr marL="0" indent="0">
               <a:buNone/>
             </a:pPr>
             <a:r>
@@ -8912,7 +8845,7 @@
           <a:bodyPr wrap="square" lIns="0" tIns="0" rIns="0" bIns="0" rtlCol="0" anchor="ctr"/>
           <a:lstStyle/>
           <a:p>
-            <a:pPr indent="0" marL="0">
+            <a:pPr marL="0" indent="0">
               <a:buNone/>
             </a:pPr>
             <a:r>
@@ -8951,7 +8884,7 @@
           <a:bodyPr wrap="square" lIns="0" tIns="0" rIns="0" bIns="0" rtlCol="0" anchor="t"/>
           <a:lstStyle/>
           <a:p>
-            <a:pPr indent="0" marL="0">
+            <a:pPr marL="0" indent="0">
               <a:buNone/>
             </a:pPr>
             <a:r>
@@ -8990,7 +8923,7 @@
           <a:bodyPr wrap="square" lIns="0" tIns="0" rIns="0" bIns="0" rtlCol="0" anchor="ctr"/>
           <a:lstStyle/>
           <a:p>
-            <a:pPr algn="l" indent="0" marL="0">
+            <a:pPr marL="0" indent="0" algn="l">
               <a:buNone/>
             </a:pPr>
             <a:r>
@@ -9029,7 +8962,7 @@
           <a:bodyPr wrap="square" lIns="0" tIns="0" rIns="0" bIns="0" rtlCol="0" anchor="ctr"/>
           <a:lstStyle/>
           <a:p>
-            <a:pPr algn="r" indent="0" marL="0">
+            <a:pPr marL="0" indent="0" algn="r">
               <a:buNone/>
             </a:pPr>
             <a:r>
@@ -9093,7 +9026,7 @@
           <a:bodyPr wrap="square" lIns="0" tIns="0" rIns="0" bIns="0" rtlCol="0" anchor="ctr"/>
           <a:lstStyle/>
           <a:p>
-            <a:pPr algn="l" indent="0" marL="0">
+            <a:pPr marL="0" indent="0" algn="l">
               <a:buNone/>
             </a:pPr>
             <a:r>
@@ -9133,18 +9066,25 @@
             <a:prstDash val="solid"/>
           </a:ln>
         </p:spPr>
+        <p:txBody>
+          <a:bodyPr/>
+          <a:lstStyle/>
+          <a:p>
+            <a:endParaRPr lang="es-CL"/>
+          </a:p>
+        </p:txBody>
       </p:sp>
       <p:pic>
         <p:nvPicPr>
-          <p:cNvPr id="4" name="Image 0" descr="/sessions/tender-gallant-volta/mnt/outputs/pices_build/assets/t4b_full_rho_shifters.png">    </p:cNvPr>
+          <p:cNvPr id="4" name="Image 0" descr="/sessions/tender-gallant-volta/mnt/outputs/pices_build/assets/t4b_full_rho_shifters.png"/>
           <p:cNvPicPr>
             <a:picLocks noChangeAspect="1"/>
           </p:cNvPicPr>
           <p:nvPr/>
         </p:nvPicPr>
         <p:blipFill>
-          <a:blip r:embed="rId1"/>
-          <a:srcRect l="0" r="0" t="0" b="0"/>
+          <a:blip r:embed="rId3"/>
+          <a:srcRect/>
           <a:stretch/>
         </p:blipFill>
         <p:spPr>
@@ -9178,7 +9118,7 @@
           <a:bodyPr wrap="square" lIns="0" tIns="0" rIns="0" bIns="0" rtlCol="0" anchor="t"/>
           <a:lstStyle/>
           <a:p>
-            <a:pPr indent="0" marL="0">
+            <a:pPr marL="0" indent="0">
               <a:buNone/>
             </a:pPr>
             <a:r>
@@ -9217,7 +9157,7 @@
           <a:bodyPr wrap="square" lIns="0" tIns="0" rIns="0" bIns="0" rtlCol="0" anchor="ctr"/>
           <a:lstStyle/>
           <a:p>
-            <a:pPr algn="l" indent="0" marL="0">
+            <a:pPr marL="0" indent="0" algn="l">
               <a:buNone/>
             </a:pPr>
             <a:r>
@@ -9256,7 +9196,7 @@
           <a:bodyPr wrap="square" lIns="0" tIns="0" rIns="0" bIns="0" rtlCol="0" anchor="ctr"/>
           <a:lstStyle/>
           <a:p>
-            <a:pPr algn="r" indent="0" marL="0">
+            <a:pPr marL="0" indent="0" algn="r">
               <a:buNone/>
             </a:pPr>
             <a:r>
@@ -9320,7 +9260,7 @@
           <a:bodyPr wrap="square" lIns="0" tIns="0" rIns="0" bIns="0" rtlCol="0" anchor="ctr"/>
           <a:lstStyle/>
           <a:p>
-            <a:pPr algn="l" indent="0" marL="0">
+            <a:pPr marL="0" indent="0" algn="l">
               <a:buNone/>
             </a:pPr>
             <a:r>
@@ -9360,6 +9300,13 @@
             <a:prstDash val="solid"/>
           </a:ln>
         </p:spPr>
+        <p:txBody>
+          <a:bodyPr/>
+          <a:lstStyle/>
+          <a:p>
+            <a:endParaRPr lang="es-CL"/>
+          </a:p>
+        </p:txBody>
       </p:sp>
       <p:graphicFrame>
         <p:nvGraphicFramePr>
@@ -9384,11 +9331,41 @@
             <a:tbl>
               <a:tblPr/>
               <a:tblGrid>
-                <a:gridCol w="1554480"/>
-                <a:gridCol w="2926080"/>
-                <a:gridCol w="2377440"/>
-                <a:gridCol w="2194560"/>
-                <a:gridCol w="2221992"/>
+                <a:gridCol w="1554480">
+                  <a:extLst>
+                    <a:ext uri="{9D8B030D-6E8A-4147-A177-3AD203B41FA5}">
+                      <a16:colId xmlns:a16="http://schemas.microsoft.com/office/drawing/2014/main" val="20000"/>
+                    </a:ext>
+                  </a:extLst>
+                </a:gridCol>
+                <a:gridCol w="2926080">
+                  <a:extLst>
+                    <a:ext uri="{9D8B030D-6E8A-4147-A177-3AD203B41FA5}">
+                      <a16:colId xmlns:a16="http://schemas.microsoft.com/office/drawing/2014/main" val="20001"/>
+                    </a:ext>
+                  </a:extLst>
+                </a:gridCol>
+                <a:gridCol w="2377440">
+                  <a:extLst>
+                    <a:ext uri="{9D8B030D-6E8A-4147-A177-3AD203B41FA5}">
+                      <a16:colId xmlns:a16="http://schemas.microsoft.com/office/drawing/2014/main" val="20002"/>
+                    </a:ext>
+                  </a:extLst>
+                </a:gridCol>
+                <a:gridCol w="2194560">
+                  <a:extLst>
+                    <a:ext uri="{9D8B030D-6E8A-4147-A177-3AD203B41FA5}">
+                      <a16:colId xmlns:a16="http://schemas.microsoft.com/office/drawing/2014/main" val="20003"/>
+                    </a:ext>
+                  </a:extLst>
+                </a:gridCol>
+                <a:gridCol w="2221992">
+                  <a:extLst>
+                    <a:ext uri="{9D8B030D-6E8A-4147-A177-3AD203B41FA5}">
+                      <a16:colId xmlns:a16="http://schemas.microsoft.com/office/drawing/2014/main" val="20004"/>
+                    </a:ext>
+                  </a:extLst>
+                </a:gridCol>
               </a:tblGrid>
               <a:tr h="411480">
                 <a:tc>
@@ -9396,7 +9373,7 @@
                     <a:bodyPr/>
                     <a:lstStyle/>
                     <a:p>
-                      <a:pPr algn="l" indent="0" marL="0">
+                      <a:pPr marL="0" indent="0" algn="l">
                         <a:buNone/>
                       </a:pPr>
                       <a:r>
@@ -9417,7 +9394,7 @@
                       </a:endParaRPr>
                     </a:p>
                   </a:txBody>
-                  <a:tcPr marL="91440" marR="91440" marT="45720" marB="45720" anchor="ctr">
+                  <a:tcPr anchor="ctr">
                     <a:lnL w="6350" cap="flat" cmpd="sng" algn="ctr">
                       <a:solidFill>
                         <a:srgbClr val="CBD5E1"/>
@@ -9464,7 +9441,7 @@
                     <a:bodyPr/>
                     <a:lstStyle/>
                     <a:p>
-                      <a:pPr algn="l" indent="0" marL="0">
+                      <a:pPr marL="0" indent="0" algn="l">
                         <a:buNone/>
                       </a:pPr>
                       <a:r>
@@ -9485,7 +9462,7 @@
                       </a:endParaRPr>
                     </a:p>
                   </a:txBody>
-                  <a:tcPr marL="91440" marR="91440" marT="45720" marB="45720" anchor="ctr">
+                  <a:tcPr anchor="ctr">
                     <a:lnL w="6350" cap="flat" cmpd="sng" algn="ctr">
                       <a:solidFill>
                         <a:srgbClr val="CBD5E1"/>
@@ -9532,7 +9509,7 @@
                     <a:bodyPr/>
                     <a:lstStyle/>
                     <a:p>
-                      <a:pPr algn="ctr" indent="0" marL="0">
+                      <a:pPr marL="0" indent="0" algn="ctr">
                         <a:buNone/>
                       </a:pPr>
                       <a:r>
@@ -9553,7 +9530,7 @@
                       </a:endParaRPr>
                     </a:p>
                   </a:txBody>
-                  <a:tcPr marL="91440" marR="91440" marT="45720" marB="45720" anchor="ctr">
+                  <a:tcPr anchor="ctr">
                     <a:lnL w="6350" cap="flat" cmpd="sng" algn="ctr">
                       <a:solidFill>
                         <a:srgbClr val="CBD5E1"/>
@@ -9600,7 +9577,7 @@
                     <a:bodyPr/>
                     <a:lstStyle/>
                     <a:p>
-                      <a:pPr algn="ctr" indent="0" marL="0">
+                      <a:pPr marL="0" indent="0" algn="ctr">
                         <a:buNone/>
                       </a:pPr>
                       <a:r>
@@ -9621,7 +9598,7 @@
                       </a:endParaRPr>
                     </a:p>
                   </a:txBody>
-                  <a:tcPr marL="91440" marR="91440" marT="45720" marB="45720" anchor="ctr">
+                  <a:tcPr anchor="ctr">
                     <a:lnL w="6350" cap="flat" cmpd="sng" algn="ctr">
                       <a:solidFill>
                         <a:srgbClr val="CBD5E1"/>
@@ -9668,7 +9645,7 @@
                     <a:bodyPr/>
                     <a:lstStyle/>
                     <a:p>
-                      <a:pPr algn="ctr" indent="0" marL="0">
+                      <a:pPr marL="0" indent="0" algn="ctr">
                         <a:buNone/>
                       </a:pPr>
                       <a:r>
@@ -9689,7 +9666,7 @@
                       </a:endParaRPr>
                     </a:p>
                   </a:txBody>
-                  <a:tcPr marL="91440" marR="91440" marT="45720" marB="45720" anchor="ctr">
+                  <a:tcPr anchor="ctr">
                     <a:lnL w="6350" cap="flat" cmpd="sng" algn="ctr">
                       <a:solidFill>
                         <a:srgbClr val="CBD5E1"/>
@@ -9731,6 +9708,11 @@
                     </a:solidFill>
                   </a:tcPr>
                 </a:tc>
+                <a:extLst>
+                  <a:ext uri="{0D108BD9-81ED-4DB2-BD59-A6C34878D82A}">
+                    <a16:rowId xmlns:a16="http://schemas.microsoft.com/office/drawing/2014/main" val="10000"/>
+                  </a:ext>
+                </a:extLst>
               </a:tr>
               <a:tr h="411480">
                 <a:tc>
@@ -9738,7 +9720,7 @@
                     <a:bodyPr/>
                     <a:lstStyle/>
                     <a:p>
-                      <a:pPr algn="l" indent="0" marL="0">
+                      <a:pPr marL="0" indent="0" algn="l">
                         <a:buNone/>
                       </a:pPr>
                       <a:r>
@@ -9803,7 +9785,7 @@
                     <a:bodyPr/>
                     <a:lstStyle/>
                     <a:p>
-                      <a:pPr algn="l" indent="0" marL="0">
+                      <a:pPr marL="0" indent="0" algn="l">
                         <a:buNone/>
                       </a:pPr>
                       <a:r>
@@ -9868,7 +9850,7 @@
                     <a:bodyPr/>
                     <a:lstStyle/>
                     <a:p>
-                      <a:pPr algn="r" indent="0" marL="0">
+                      <a:pPr marL="0" indent="0" algn="r">
                         <a:buNone/>
                       </a:pPr>
                       <a:r>
@@ -9933,7 +9915,7 @@
                     <a:bodyPr/>
                     <a:lstStyle/>
                     <a:p>
-                      <a:pPr algn="r" indent="0" marL="0">
+                      <a:pPr marL="0" indent="0" algn="r">
                         <a:buNone/>
                       </a:pPr>
                       <a:r>
@@ -9998,7 +9980,7 @@
                     <a:bodyPr/>
                     <a:lstStyle/>
                     <a:p>
-                      <a:pPr algn="r" indent="0" marL="0">
+                      <a:pPr marL="0" indent="0" algn="r">
                         <a:buNone/>
                       </a:pPr>
                       <a:r>
@@ -10058,6 +10040,11 @@
                     </a:lnB>
                   </a:tcPr>
                 </a:tc>
+                <a:extLst>
+                  <a:ext uri="{0D108BD9-81ED-4DB2-BD59-A6C34878D82A}">
+                    <a16:rowId xmlns:a16="http://schemas.microsoft.com/office/drawing/2014/main" val="10001"/>
+                  </a:ext>
+                </a:extLst>
               </a:tr>
               <a:tr h="411480">
                 <a:tc>
@@ -10065,7 +10052,7 @@
                     <a:bodyPr/>
                     <a:lstStyle/>
                     <a:p>
-                      <a:pPr algn="l" indent="0" marL="0">
+                      <a:pPr marL="0" indent="0" algn="l">
                         <a:buNone/>
                       </a:pPr>
                       <a:endParaRPr lang="en-US" sz="1300" dirty="0">
@@ -10119,7 +10106,7 @@
                     <a:bodyPr/>
                     <a:lstStyle/>
                     <a:p>
-                      <a:pPr algn="l" indent="0" marL="0">
+                      <a:pPr marL="0" indent="0" algn="l">
                         <a:buNone/>
                       </a:pPr>
                       <a:r>
@@ -10184,7 +10171,7 @@
                     <a:bodyPr/>
                     <a:lstStyle/>
                     <a:p>
-                      <a:pPr algn="r" indent="0" marL="0">
+                      <a:pPr marL="0" indent="0" algn="r">
                         <a:buNone/>
                       </a:pPr>
                       <a:r>
@@ -10249,7 +10236,7 @@
                     <a:bodyPr/>
                     <a:lstStyle/>
                     <a:p>
-                      <a:pPr algn="r" indent="0" marL="0">
+                      <a:pPr marL="0" indent="0" algn="r">
                         <a:buNone/>
                       </a:pPr>
                       <a:r>
@@ -10314,7 +10301,7 @@
                     <a:bodyPr/>
                     <a:lstStyle/>
                     <a:p>
-                      <a:pPr algn="r" indent="0" marL="0">
+                      <a:pPr marL="0" indent="0" algn="r">
                         <a:buNone/>
                       </a:pPr>
                       <a:r>
@@ -10374,6 +10361,11 @@
                     </a:lnB>
                   </a:tcPr>
                 </a:tc>
+                <a:extLst>
+                  <a:ext uri="{0D108BD9-81ED-4DB2-BD59-A6C34878D82A}">
+                    <a16:rowId xmlns:a16="http://schemas.microsoft.com/office/drawing/2014/main" val="10002"/>
+                  </a:ext>
+                </a:extLst>
               </a:tr>
               <a:tr h="411480">
                 <a:tc>
@@ -10381,7 +10373,7 @@
                     <a:bodyPr/>
                     <a:lstStyle/>
                     <a:p>
-                      <a:pPr algn="l" indent="0" marL="0">
+                      <a:pPr marL="0" indent="0" algn="l">
                         <a:buNone/>
                       </a:pPr>
                       <a:r>
@@ -10446,7 +10438,7 @@
                     <a:bodyPr/>
                     <a:lstStyle/>
                     <a:p>
-                      <a:pPr algn="l" indent="0" marL="0">
+                      <a:pPr marL="0" indent="0" algn="l">
                         <a:buNone/>
                       </a:pPr>
                       <a:r>
@@ -10511,7 +10503,7 @@
                     <a:bodyPr/>
                     <a:lstStyle/>
                     <a:p>
-                      <a:pPr algn="r" indent="0" marL="0">
+                      <a:pPr marL="0" indent="0" algn="r">
                         <a:buNone/>
                       </a:pPr>
                       <a:r>
@@ -10576,7 +10568,7 @@
                     <a:bodyPr/>
                     <a:lstStyle/>
                     <a:p>
-                      <a:pPr algn="r" indent="0" marL="0">
+                      <a:pPr marL="0" indent="0" algn="r">
                         <a:buNone/>
                       </a:pPr>
                       <a:r>
@@ -10641,7 +10633,7 @@
                     <a:bodyPr/>
                     <a:lstStyle/>
                     <a:p>
-                      <a:pPr algn="r" indent="0" marL="0">
+                      <a:pPr marL="0" indent="0" algn="r">
                         <a:buNone/>
                       </a:pPr>
                       <a:r>
@@ -10701,6 +10693,11 @@
                     </a:lnB>
                   </a:tcPr>
                 </a:tc>
+                <a:extLst>
+                  <a:ext uri="{0D108BD9-81ED-4DB2-BD59-A6C34878D82A}">
+                    <a16:rowId xmlns:a16="http://schemas.microsoft.com/office/drawing/2014/main" val="10003"/>
+                  </a:ext>
+                </a:extLst>
               </a:tr>
               <a:tr h="411480">
                 <a:tc>
@@ -10708,7 +10705,7 @@
                     <a:bodyPr/>
                     <a:lstStyle/>
                     <a:p>
-                      <a:pPr algn="l" indent="0" marL="0">
+                      <a:pPr marL="0" indent="0" algn="l">
                         <a:buNone/>
                       </a:pPr>
                       <a:endParaRPr lang="en-US" sz="1300" dirty="0">
@@ -10762,7 +10759,7 @@
                     <a:bodyPr/>
                     <a:lstStyle/>
                     <a:p>
-                      <a:pPr algn="l" indent="0" marL="0">
+                      <a:pPr marL="0" indent="0" algn="l">
                         <a:buNone/>
                       </a:pPr>
                       <a:r>
@@ -10827,7 +10824,7 @@
                     <a:bodyPr/>
                     <a:lstStyle/>
                     <a:p>
-                      <a:pPr algn="r" indent="0" marL="0">
+                      <a:pPr marL="0" indent="0" algn="r">
                         <a:buNone/>
                       </a:pPr>
                       <a:r>
@@ -10892,7 +10889,7 @@
                     <a:bodyPr/>
                     <a:lstStyle/>
                     <a:p>
-                      <a:pPr algn="r" indent="0" marL="0">
+                      <a:pPr marL="0" indent="0" algn="r">
                         <a:buNone/>
                       </a:pPr>
                       <a:r>
@@ -10957,7 +10954,7 @@
                     <a:bodyPr/>
                     <a:lstStyle/>
                     <a:p>
-                      <a:pPr algn="r" indent="0" marL="0">
+                      <a:pPr marL="0" indent="0" algn="r">
                         <a:buNone/>
                       </a:pPr>
                       <a:r>
@@ -11017,6 +11014,11 @@
                     </a:lnB>
                   </a:tcPr>
                 </a:tc>
+                <a:extLst>
+                  <a:ext uri="{0D108BD9-81ED-4DB2-BD59-A6C34878D82A}">
+                    <a16:rowId xmlns:a16="http://schemas.microsoft.com/office/drawing/2014/main" val="10004"/>
+                  </a:ext>
+                </a:extLst>
               </a:tr>
               <a:tr h="411480">
                 <a:tc>
@@ -11024,7 +11026,7 @@
                     <a:bodyPr/>
                     <a:lstStyle/>
                     <a:p>
-                      <a:pPr algn="l" indent="0" marL="0">
+                      <a:pPr marL="0" indent="0" algn="l">
                         <a:buNone/>
                       </a:pPr>
                       <a:r>
@@ -11089,7 +11091,7 @@
                     <a:bodyPr/>
                     <a:lstStyle/>
                     <a:p>
-                      <a:pPr algn="l" indent="0" marL="0">
+                      <a:pPr marL="0" indent="0" algn="l">
                         <a:buNone/>
                       </a:pPr>
                       <a:r>
@@ -11154,7 +11156,7 @@
                     <a:bodyPr/>
                     <a:lstStyle/>
                     <a:p>
-                      <a:pPr algn="r" indent="0" marL="0">
+                      <a:pPr marL="0" indent="0" algn="r">
                         <a:buNone/>
                       </a:pPr>
                       <a:r>
@@ -11219,7 +11221,7 @@
                     <a:bodyPr/>
                     <a:lstStyle/>
                     <a:p>
-                      <a:pPr algn="r" indent="0" marL="0">
+                      <a:pPr marL="0" indent="0" algn="r">
                         <a:buNone/>
                       </a:pPr>
                       <a:r>
@@ -11284,7 +11286,7 @@
                     <a:bodyPr/>
                     <a:lstStyle/>
                     <a:p>
-                      <a:pPr algn="r" indent="0" marL="0">
+                      <a:pPr marL="0" indent="0" algn="r">
                         <a:buNone/>
                       </a:pPr>
                       <a:r>
@@ -11344,6 +11346,11 @@
                     </a:lnB>
                   </a:tcPr>
                 </a:tc>
+                <a:extLst>
+                  <a:ext uri="{0D108BD9-81ED-4DB2-BD59-A6C34878D82A}">
+                    <a16:rowId xmlns:a16="http://schemas.microsoft.com/office/drawing/2014/main" val="10005"/>
+                  </a:ext>
+                </a:extLst>
               </a:tr>
             </a:tbl>
           </a:graphicData>
@@ -11370,7 +11377,7 @@
           <a:bodyPr wrap="square" lIns="0" tIns="0" rIns="0" bIns="0" rtlCol="0" anchor="t"/>
           <a:lstStyle/>
           <a:p>
-            <a:pPr indent="0" marL="0">
+            <a:pPr marL="0" indent="0">
               <a:buNone/>
             </a:pPr>
             <a:r>
@@ -11409,7 +11416,7 @@
           <a:bodyPr wrap="square" lIns="0" tIns="0" rIns="0" bIns="0" rtlCol="0" anchor="ctr"/>
           <a:lstStyle/>
           <a:p>
-            <a:pPr algn="l" indent="0" marL="0">
+            <a:pPr marL="0" indent="0" algn="l">
               <a:buNone/>
             </a:pPr>
             <a:r>
@@ -11448,7 +11455,7 @@
           <a:bodyPr wrap="square" lIns="0" tIns="0" rIns="0" bIns="0" rtlCol="0" anchor="ctr"/>
           <a:lstStyle/>
           <a:p>
-            <a:pPr algn="r" indent="0" marL="0">
+            <a:pPr marL="0" indent="0" algn="r">
               <a:buNone/>
             </a:pPr>
             <a:r>
@@ -11512,21 +11519,24 @@
           <a:bodyPr wrap="square" lIns="0" tIns="0" rIns="0" bIns="0" rtlCol="0" anchor="ctr"/>
           <a:lstStyle/>
           <a:p>
-            <a:pPr algn="l" indent="0" marL="0">
+            <a:pPr marL="0" indent="0" algn="l">
               <a:buNone/>
             </a:pPr>
             <a:r>
-              <a:rPr lang="en-US" sz="2800" b="1" dirty="0">
+              <a:rPr lang="en-US" sz="3600" b="1" dirty="0">
                 <a:solidFill>
                   <a:srgbClr val="113B63"/>
                 </a:solidFill>
-                <a:latin typeface="Calibri" pitchFamily="34" charset="0"/>
-                <a:ea typeface="Calibri" pitchFamily="34" charset="-122"/>
-                <a:cs typeface="Calibri" pitchFamily="34" charset="-120"/>
+                <a:latin typeface="Poppins" panose="00000500000000000000" pitchFamily="2" charset="0"/>
+                <a:ea typeface="Calibri" pitchFamily="34" charset="-122"/>
+                <a:cs typeface="Poppins" panose="00000500000000000000" pitchFamily="2" charset="0"/>
               </a:rPr>
               <a:t>Motivation</a:t>
             </a:r>
-            <a:endParaRPr lang="en-US" sz="2800" dirty="0"/>
+            <a:endParaRPr lang="en-US" sz="3600" dirty="0">
+              <a:latin typeface="Poppins" panose="00000500000000000000" pitchFamily="2" charset="0"/>
+              <a:cs typeface="Poppins" panose="00000500000000000000" pitchFamily="2" charset="0"/>
+            </a:endParaRPr>
           </a:p>
         </p:txBody>
       </p:sp>
@@ -11552,6 +11562,16 @@
             <a:prstDash val="solid"/>
           </a:ln>
         </p:spPr>
+        <p:txBody>
+          <a:bodyPr/>
+          <a:lstStyle/>
+          <a:p>
+            <a:endParaRPr lang="es-CL">
+              <a:latin typeface="Poppins" panose="00000500000000000000" pitchFamily="2" charset="0"/>
+              <a:cs typeface="Poppins" panose="00000500000000000000" pitchFamily="2" charset="0"/>
+            </a:endParaRPr>
+          </a:p>
+        </p:txBody>
       </p:sp>
       <p:sp>
         <p:nvSpPr>
@@ -11582,17 +11602,21 @@
               <a:buChar char="•"/>
             </a:pPr>
             <a:r>
-              <a:rPr lang="en-US" sz="1800" dirty="0">
+              <a:rPr lang="en-US" sz="2000" dirty="0">
                 <a:solidFill>
                   <a:srgbClr val="0A2540"/>
                 </a:solidFill>
-                <a:latin typeface="Calibri" pitchFamily="34" charset="0"/>
-                <a:ea typeface="Calibri" pitchFamily="34" charset="-122"/>
-                <a:cs typeface="Calibri" pitchFamily="34" charset="-120"/>
+                <a:latin typeface="Poppins" panose="00000500000000000000" pitchFamily="2" charset="0"/>
+                <a:ea typeface="Roboto" panose="02000000000000000000" pitchFamily="2" charset="0"/>
+                <a:cs typeface="Poppins" panose="00000500000000000000" pitchFamily="2" charset="0"/>
               </a:rPr>
               <a:t>Small pelagic stocks fluctuate sharply with climate variability.</a:t>
             </a:r>
-            <a:endParaRPr lang="en-US" sz="1800" dirty="0"/>
+            <a:endParaRPr lang="en-US" sz="2000" dirty="0">
+              <a:latin typeface="Poppins" panose="00000500000000000000" pitchFamily="2" charset="0"/>
+              <a:ea typeface="Roboto" panose="02000000000000000000" pitchFamily="2" charset="0"/>
+              <a:cs typeface="Poppins" panose="00000500000000000000" pitchFamily="2" charset="0"/>
+            </a:endParaRPr>
           </a:p>
           <a:p>
             <a:pPr marL="342900" indent="-342900">
@@ -11603,17 +11627,43 @@
               <a:buChar char="•"/>
             </a:pPr>
             <a:r>
-              <a:rPr lang="en-US" sz="1800" dirty="0">
+              <a:rPr lang="en-US" sz="2000" dirty="0">
                 <a:solidFill>
                   <a:srgbClr val="0A2540"/>
                 </a:solidFill>
-                <a:latin typeface="Calibri" pitchFamily="34" charset="0"/>
-                <a:ea typeface="Calibri" pitchFamily="34" charset="-122"/>
-                <a:cs typeface="Calibri" pitchFamily="34" charset="-120"/>
-              </a:rPr>
-              <a:t>Standard projection tools assume constant fishing rates or full quota uptake — the human decision is assumed away.</a:t>
-            </a:r>
-            <a:endParaRPr lang="en-US" sz="1800" dirty="0"/>
+                <a:latin typeface="Poppins" panose="00000500000000000000" pitchFamily="2" charset="0"/>
+                <a:ea typeface="Roboto" panose="02000000000000000000" pitchFamily="2" charset="0"/>
+                <a:cs typeface="Poppins" panose="00000500000000000000" pitchFamily="2" charset="0"/>
+              </a:rPr>
+              <a:t>Standard projection tools assume</a:t>
+            </a:r>
+            <a:r>
+              <a:rPr lang="en-US" sz="2000" b="1" dirty="0">
+                <a:solidFill>
+                  <a:srgbClr val="0A2540"/>
+                </a:solidFill>
+                <a:latin typeface="Poppins" panose="00000500000000000000" pitchFamily="2" charset="0"/>
+                <a:ea typeface="Roboto" panose="02000000000000000000" pitchFamily="2" charset="0"/>
+                <a:cs typeface="Poppins" panose="00000500000000000000" pitchFamily="2" charset="0"/>
+              </a:rPr>
+              <a:t> constant fishing rates or full quota uptake </a:t>
+            </a:r>
+            <a:r>
+              <a:rPr lang="en-US" sz="2000" dirty="0">
+                <a:solidFill>
+                  <a:srgbClr val="0A2540"/>
+                </a:solidFill>
+                <a:latin typeface="Poppins" panose="00000500000000000000" pitchFamily="2" charset="0"/>
+                <a:ea typeface="Roboto" panose="02000000000000000000" pitchFamily="2" charset="0"/>
+                <a:cs typeface="Poppins" panose="00000500000000000000" pitchFamily="2" charset="0"/>
+              </a:rPr>
+              <a:t>— the human decision is assumed away.</a:t>
+            </a:r>
+            <a:endParaRPr lang="en-US" sz="2000" dirty="0">
+              <a:latin typeface="Poppins" panose="00000500000000000000" pitchFamily="2" charset="0"/>
+              <a:ea typeface="Roboto" panose="02000000000000000000" pitchFamily="2" charset="0"/>
+              <a:cs typeface="Poppins" panose="00000500000000000000" pitchFamily="2" charset="0"/>
+            </a:endParaRPr>
           </a:p>
           <a:p>
             <a:pPr marL="342900" indent="-342900">
@@ -11621,31 +11671,46 @@
               <a:buChar char="•"/>
             </a:pPr>
             <a:r>
-              <a:rPr lang="en-US" sz="1800" dirty="0">
+              <a:rPr lang="en-US" sz="2000" b="1" dirty="0">
                 <a:solidFill>
                   <a:srgbClr val="0A2540"/>
                 </a:solidFill>
-                <a:latin typeface="Calibri" pitchFamily="34" charset="0"/>
-                <a:ea typeface="Calibri" pitchFamily="34" charset="-122"/>
-                <a:cs typeface="Calibri" pitchFamily="34" charset="-120"/>
-              </a:rPr>
-              <a:t>But fishers choose: which species to target, how many trips, how much to land.</a:t>
-            </a:r>
-            <a:endParaRPr lang="en-US" sz="1800" dirty="0"/>
+                <a:latin typeface="Poppins" panose="00000500000000000000" pitchFamily="2" charset="0"/>
+                <a:ea typeface="Roboto" panose="02000000000000000000" pitchFamily="2" charset="0"/>
+                <a:cs typeface="Poppins" panose="00000500000000000000" pitchFamily="2" charset="0"/>
+              </a:rPr>
+              <a:t>But fishers choose </a:t>
+            </a:r>
+            <a:r>
+              <a:rPr lang="en-US" sz="2000" dirty="0">
+                <a:solidFill>
+                  <a:srgbClr val="0A2540"/>
+                </a:solidFill>
+                <a:latin typeface="Poppins" panose="00000500000000000000" pitchFamily="2" charset="0"/>
+                <a:ea typeface="Roboto" panose="02000000000000000000" pitchFamily="2" charset="0"/>
+                <a:cs typeface="Poppins" panose="00000500000000000000" pitchFamily="2" charset="0"/>
+              </a:rPr>
+              <a:t>which species to target, how many trips, how much to land.</a:t>
+            </a:r>
+            <a:endParaRPr lang="en-US" sz="2000" dirty="0">
+              <a:latin typeface="Poppins" panose="00000500000000000000" pitchFamily="2" charset="0"/>
+              <a:ea typeface="Roboto" panose="02000000000000000000" pitchFamily="2" charset="0"/>
+              <a:cs typeface="Poppins" panose="00000500000000000000" pitchFamily="2" charset="0"/>
+            </a:endParaRPr>
           </a:p>
         </p:txBody>
       </p:sp>
       <p:pic>
         <p:nvPicPr>
-          <p:cNvPr id="5" name="Image 0" descr="/sessions/tender-gallant-volta/mnt/outputs/pices_build/assets/catch_potential.jpeg">    </p:cNvPr>
+          <p:cNvPr id="5" name="Image 0" descr="/sessions/tender-gallant-volta/mnt/outputs/pices_build/assets/catch_potential.jpeg"/>
           <p:cNvPicPr>
             <a:picLocks noChangeAspect="1"/>
           </p:cNvPicPr>
           <p:nvPr/>
         </p:nvPicPr>
         <p:blipFill>
-          <a:blip r:embed="rId1"/>
-          <a:srcRect l="0" r="0" t="0" b="0"/>
+          <a:blip r:embed="rId3"/>
+          <a:srcRect/>
           <a:stretch/>
         </p:blipFill>
         <p:spPr>
@@ -11679,21 +11744,24 @@
           <a:bodyPr wrap="square" lIns="0" tIns="0" rIns="0" bIns="0" rtlCol="0" anchor="t"/>
           <a:lstStyle/>
           <a:p>
-            <a:pPr algn="r" indent="0" marL="0">
+            <a:pPr marL="0" indent="0" algn="r">
               <a:buNone/>
             </a:pPr>
             <a:r>
-              <a:rPr lang="en-US" sz="1000" i="1" dirty="0">
+              <a:rPr lang="en-US" sz="1100" i="1" dirty="0">
                 <a:solidFill>
                   <a:srgbClr val="475569"/>
                 </a:solidFill>
-                <a:latin typeface="Calibri" pitchFamily="34" charset="0"/>
-                <a:ea typeface="Calibri" pitchFamily="34" charset="-122"/>
-                <a:cs typeface="Calibri" pitchFamily="34" charset="-120"/>
+                <a:latin typeface="Poppins" panose="00000500000000000000" pitchFamily="2" charset="0"/>
+                <a:ea typeface="Calibri" pitchFamily="34" charset="-122"/>
+                <a:cs typeface="Poppins" panose="00000500000000000000" pitchFamily="2" charset="0"/>
               </a:rPr>
               <a:t>Source: Cheung et al. (2010)</a:t>
             </a:r>
-            <a:endParaRPr lang="en-US" sz="1000" dirty="0"/>
+            <a:endParaRPr lang="en-US" sz="1100" dirty="0">
+              <a:latin typeface="Poppins" panose="00000500000000000000" pitchFamily="2" charset="0"/>
+              <a:cs typeface="Poppins" panose="00000500000000000000" pitchFamily="2" charset="0"/>
+            </a:endParaRPr>
           </a:p>
         </p:txBody>
       </p:sp>
@@ -11705,8 +11773,8 @@
         </p:nvSpPr>
         <p:spPr>
           <a:xfrm>
-            <a:off x="457200" y="5760720"/>
-            <a:ext cx="11277295" cy="502920"/>
+            <a:off x="503225" y="5532120"/>
+            <a:ext cx="11231270" cy="731520"/>
           </a:xfrm>
           <a:prstGeom prst="rect">
             <a:avLst/>
@@ -11721,6 +11789,16 @@
             <a:prstDash val="solid"/>
           </a:ln>
         </p:spPr>
+        <p:txBody>
+          <a:bodyPr/>
+          <a:lstStyle/>
+          <a:p>
+            <a:endParaRPr lang="es-CL">
+              <a:latin typeface="Poppins" panose="00000500000000000000" pitchFamily="2" charset="0"/>
+              <a:cs typeface="Poppins" panose="00000500000000000000" pitchFamily="2" charset="0"/>
+            </a:endParaRPr>
+          </a:p>
+        </p:txBody>
       </p:sp>
       <p:sp>
         <p:nvSpPr>
@@ -11730,8 +11808,8 @@
         </p:nvSpPr>
         <p:spPr>
           <a:xfrm>
-            <a:off x="457200" y="5760720"/>
-            <a:ext cx="54864" cy="502920"/>
+            <a:off x="457200" y="5550409"/>
+            <a:ext cx="54864" cy="713231"/>
           </a:xfrm>
           <a:prstGeom prst="rect">
             <a:avLst/>
@@ -11746,6 +11824,16 @@
             <a:prstDash val="solid"/>
           </a:ln>
         </p:spPr>
+        <p:txBody>
+          <a:bodyPr/>
+          <a:lstStyle/>
+          <a:p>
+            <a:endParaRPr lang="es-CL">
+              <a:latin typeface="Poppins" panose="00000500000000000000" pitchFamily="2" charset="0"/>
+              <a:cs typeface="Poppins" panose="00000500000000000000" pitchFamily="2" charset="0"/>
+            </a:endParaRPr>
+          </a:p>
+        </p:txBody>
       </p:sp>
       <p:sp>
         <p:nvSpPr>
@@ -11755,8 +11843,8 @@
         </p:nvSpPr>
         <p:spPr>
           <a:xfrm>
-            <a:off x="594360" y="5760720"/>
-            <a:ext cx="11094415" cy="502920"/>
+            <a:off x="594360" y="5550409"/>
+            <a:ext cx="11094415" cy="713231"/>
           </a:xfrm>
           <a:prstGeom prst="rect">
             <a:avLst/>
@@ -11768,21 +11856,35 @@
           <a:bodyPr wrap="square" lIns="0" tIns="0" rIns="0" bIns="0" rtlCol="0" anchor="ctr"/>
           <a:lstStyle/>
           <a:p>
-            <a:pPr indent="0" marL="0">
+            <a:pPr marL="0" indent="0">
               <a:buNone/>
             </a:pPr>
             <a:r>
-              <a:rPr lang="en-US" sz="1300" dirty="0">
+              <a:rPr lang="en-US" b="1" i="1" dirty="0">
                 <a:solidFill>
                   <a:srgbClr val="0A2540"/>
                 </a:solidFill>
-                <a:latin typeface="Calibri" pitchFamily="34" charset="0"/>
-                <a:ea typeface="Calibri" pitchFamily="34" charset="-122"/>
-                <a:cs typeface="Calibri" pitchFamily="34" charset="-120"/>
-              </a:rPr>
-              <a:t>Project goal: propagate climate-driven biomass shifts into fisher-side responses — participation today (Paper 1), optimal harvest decisions in the full structural model (Paper 2).</a:t>
-            </a:r>
-            <a:endParaRPr lang="en-US" sz="1300" dirty="0"/>
+                <a:latin typeface="Poppins" panose="00000500000000000000" pitchFamily="2" charset="0"/>
+                <a:ea typeface="Calibri" pitchFamily="34" charset="-122"/>
+                <a:cs typeface="Poppins" panose="00000500000000000000" pitchFamily="2" charset="0"/>
+              </a:rPr>
+              <a:t>Project goal: </a:t>
+            </a:r>
+            <a:r>
+              <a:rPr lang="en-US" dirty="0">
+                <a:solidFill>
+                  <a:srgbClr val="0A2540"/>
+                </a:solidFill>
+                <a:latin typeface="Poppins" panose="00000500000000000000" pitchFamily="2" charset="0"/>
+                <a:ea typeface="Calibri" pitchFamily="34" charset="-122"/>
+                <a:cs typeface="Poppins" panose="00000500000000000000" pitchFamily="2" charset="0"/>
+              </a:rPr>
+              <a:t>propagate climate-driven biomass shifts into fisher-side responses — participation today (Paper 1), optimal harvest decisions in the full structural model (Paper 2).</a:t>
+            </a:r>
+            <a:endParaRPr lang="en-US" dirty="0">
+              <a:latin typeface="Poppins" panose="00000500000000000000" pitchFamily="2" charset="0"/>
+              <a:cs typeface="Poppins" panose="00000500000000000000" pitchFamily="2" charset="0"/>
+            </a:endParaRPr>
           </a:p>
         </p:txBody>
       </p:sp>
@@ -11807,21 +11909,24 @@
           <a:bodyPr wrap="square" lIns="0" tIns="0" rIns="0" bIns="0" rtlCol="0" anchor="ctr"/>
           <a:lstStyle/>
           <a:p>
-            <a:pPr algn="l" indent="0" marL="0">
+            <a:pPr marL="0" indent="0" algn="l">
               <a:buNone/>
             </a:pPr>
             <a:r>
-              <a:rPr lang="en-US" sz="1000" i="1" dirty="0">
+              <a:rPr lang="en-US" i="1" dirty="0">
                 <a:solidFill>
                   <a:srgbClr val="475569"/>
                 </a:solidFill>
-                <a:latin typeface="Calibri" pitchFamily="34" charset="0"/>
-                <a:ea typeface="Calibri" pitchFamily="34" charset="-122"/>
-                <a:cs typeface="Calibri" pitchFamily="34" charset="-120"/>
+                <a:latin typeface="Poppins" panose="00000500000000000000" pitchFamily="2" charset="0"/>
+                <a:ea typeface="Calibri" pitchFamily="34" charset="-122"/>
+                <a:cs typeface="Poppins" panose="00000500000000000000" pitchFamily="2" charset="0"/>
               </a:rPr>
               <a:t>ICES/PICES SPF · La Paz · May 2026</a:t>
             </a:r>
-            <a:endParaRPr lang="en-US" sz="1000" dirty="0"/>
+            <a:endParaRPr lang="en-US" dirty="0">
+              <a:latin typeface="Poppins" panose="00000500000000000000" pitchFamily="2" charset="0"/>
+              <a:cs typeface="Poppins" panose="00000500000000000000" pitchFamily="2" charset="0"/>
+            </a:endParaRPr>
           </a:p>
         </p:txBody>
       </p:sp>
@@ -11846,21 +11951,24 @@
           <a:bodyPr wrap="square" lIns="0" tIns="0" rIns="0" bIns="0" rtlCol="0" anchor="ctr"/>
           <a:lstStyle/>
           <a:p>
-            <a:pPr algn="r" indent="0" marL="0">
+            <a:pPr marL="0" indent="0" algn="r">
               <a:buNone/>
             </a:pPr>
             <a:r>
-              <a:rPr lang="en-US" sz="1000" dirty="0">
+              <a:rPr lang="en-US" dirty="0">
                 <a:solidFill>
                   <a:srgbClr val="475569"/>
                 </a:solidFill>
-                <a:latin typeface="Calibri" pitchFamily="34" charset="0"/>
-                <a:ea typeface="Calibri" pitchFamily="34" charset="-122"/>
-                <a:cs typeface="Calibri" pitchFamily="34" charset="-120"/>
+                <a:latin typeface="Poppins" panose="00000500000000000000" pitchFamily="2" charset="0"/>
+                <a:ea typeface="Calibri" pitchFamily="34" charset="-122"/>
+                <a:cs typeface="Poppins" panose="00000500000000000000" pitchFamily="2" charset="0"/>
               </a:rPr>
               <a:t>2</a:t>
             </a:r>
-            <a:endParaRPr lang="en-US" sz="1000" dirty="0"/>
+            <a:endParaRPr lang="en-US" dirty="0">
+              <a:latin typeface="Poppins" panose="00000500000000000000" pitchFamily="2" charset="0"/>
+              <a:cs typeface="Poppins" panose="00000500000000000000" pitchFamily="2" charset="0"/>
+            </a:endParaRPr>
           </a:p>
         </p:txBody>
       </p:sp>
@@ -11910,7 +12018,7 @@
           <a:bodyPr wrap="square" lIns="0" tIns="0" rIns="0" bIns="0" rtlCol="0" anchor="ctr"/>
           <a:lstStyle/>
           <a:p>
-            <a:pPr algn="l" indent="0" marL="0">
+            <a:pPr marL="0" indent="0" algn="l">
               <a:buNone/>
             </a:pPr>
             <a:r>
@@ -11950,6 +12058,13 @@
             <a:prstDash val="solid"/>
           </a:ln>
         </p:spPr>
+        <p:txBody>
+          <a:bodyPr/>
+          <a:lstStyle/>
+          <a:p>
+            <a:endParaRPr lang="es-CL"/>
+          </a:p>
+        </p:txBody>
       </p:sp>
       <p:sp>
         <p:nvSpPr>
@@ -11972,7 +12087,7 @@
           <a:bodyPr wrap="square" lIns="0" tIns="0" rIns="0" bIns="0" rtlCol="0" anchor="ctr"/>
           <a:lstStyle/>
           <a:p>
-            <a:pPr indent="0" marL="0">
+            <a:pPr marL="0" indent="0">
               <a:buNone/>
             </a:pPr>
             <a:r>
@@ -12029,12 +12144,6 @@
               </a:rPr>
               <a:t>Non-identification at the CS scale</a:t>
             </a:r>
-            <a:pPr indent="0" marL="0">
-              <a:spcAft>
-                <a:spcPts val="1200"/>
-              </a:spcAft>
-              <a:buNone/>
-            </a:pPr>
             <a:r>
               <a:rPr lang="en-US" sz="1600" dirty="0">
                 <a:solidFill>
@@ -12089,12 +12198,6 @@
               </a:rPr>
               <a:t>Climate insensitivity of jack mackerel</a:t>
             </a:r>
-            <a:pPr indent="0" marL="0">
-              <a:spcAft>
-                <a:spcPts val="1200"/>
-              </a:spcAft>
-              <a:buNone/>
-            </a:pPr>
             <a:r>
               <a:rPr lang="en-US" sz="1600" dirty="0">
                 <a:solidFill>
@@ -12131,7 +12234,7 @@
           <a:bodyPr wrap="square" lIns="0" tIns="0" rIns="0" bIns="0" rtlCol="0" anchor="ctr"/>
           <a:lstStyle/>
           <a:p>
-            <a:pPr algn="l" indent="0" marL="0">
+            <a:pPr marL="0" indent="0" algn="l">
               <a:buNone/>
             </a:pPr>
             <a:r>
@@ -12170,7 +12273,7 @@
           <a:bodyPr wrap="square" lIns="0" tIns="0" rIns="0" bIns="0" rtlCol="0" anchor="ctr"/>
           <a:lstStyle/>
           <a:p>
-            <a:pPr algn="r" indent="0" marL="0">
+            <a:pPr marL="0" indent="0" algn="r">
               <a:buNone/>
             </a:pPr>
             <a:r>
@@ -12234,7 +12337,7 @@
           <a:bodyPr wrap="square" lIns="0" tIns="0" rIns="0" bIns="0" rtlCol="0" anchor="ctr"/>
           <a:lstStyle/>
           <a:p>
-            <a:pPr algn="l" indent="0" marL="0">
+            <a:pPr marL="0" indent="0" algn="l">
               <a:buNone/>
             </a:pPr>
             <a:r>
@@ -12274,6 +12377,13 @@
             <a:prstDash val="solid"/>
           </a:ln>
         </p:spPr>
+        <p:txBody>
+          <a:bodyPr/>
+          <a:lstStyle/>
+          <a:p>
+            <a:endParaRPr lang="es-CL"/>
+          </a:p>
+        </p:txBody>
       </p:sp>
       <p:sp>
         <p:nvSpPr>
@@ -12296,7 +12406,7 @@
           <a:bodyPr wrap="square" lIns="0" tIns="0" rIns="0" bIns="0" rtlCol="0" anchor="ctr"/>
           <a:lstStyle/>
           <a:p>
-            <a:pPr indent="0" marL="0">
+            <a:pPr marL="0" indent="0">
               <a:buNone/>
             </a:pPr>
             <a:r>
@@ -12335,7 +12445,7 @@
           <a:bodyPr wrap="square" rtlCol="0" anchor="t"/>
           <a:lstStyle/>
           <a:p>
-            <a:pPr indent="0" marL="0">
+            <a:pPr marL="0" indent="0">
               <a:spcAft>
                 <a:spcPts val="1000"/>
               </a:spcAft>
@@ -12352,13 +12462,60 @@
               </a:rPr>
               <a:t>(i) Spatial-domain robustness. </a:t>
             </a:r>
-            <a:pPr indent="0" marL="0">
+            <a:r>
+              <a:rPr lang="en-US" sz="1400" dirty="0">
+                <a:solidFill>
+                  <a:srgbClr val="0A2540"/>
+                </a:solidFill>
+                <a:latin typeface="Calibri" pitchFamily="34" charset="0"/>
+                <a:ea typeface="Calibri" pitchFamily="34" charset="-122"/>
+                <a:cs typeface="Calibri" pitchFamily="34" charset="-120"/>
+              </a:rPr>
+              <a:t>Re-fits over 3 nested coastal domains: σ_post/σ_prior for ρ^SST_jurel stays in [0.998, 1.014]. Anch &amp; sard stable (CV &lt; 0.03).</a:t>
+            </a:r>
+            <a:endParaRPr lang="en-US" sz="1400" dirty="0"/>
+          </a:p>
+        </p:txBody>
+      </p:sp>
+      <p:sp>
+        <p:nvSpPr>
+          <p:cNvPr id="6" name="Text 4"/>
+          <p:cNvSpPr/>
+          <p:nvPr/>
+        </p:nvSpPr>
+        <p:spPr>
+          <a:xfrm>
+            <a:off x="457200" y="2514600"/>
+            <a:ext cx="11277295" cy="1188720"/>
+          </a:xfrm>
+          <a:prstGeom prst="rect">
+            <a:avLst/>
+          </a:prstGeom>
+          <a:noFill/>
+          <a:ln/>
+        </p:spPr>
+        <p:txBody>
+          <a:bodyPr wrap="square" rtlCol="0" anchor="t"/>
+          <a:lstStyle/>
+          <a:p>
+            <a:pPr marL="0" indent="0">
               <a:spcAft>
                 <a:spcPts val="1000"/>
               </a:spcAft>
               <a:buNone/>
             </a:pPr>
             <a:r>
+              <a:rPr lang="en-US" sz="1400" b="1" dirty="0">
+                <a:solidFill>
+                  <a:srgbClr val="113B63"/>
+                </a:solidFill>
+                <a:latin typeface="Calibri" pitchFamily="34" charset="0"/>
+                <a:ea typeface="Calibri" pitchFamily="34" charset="-122"/>
+                <a:cs typeface="Calibri" pitchFamily="34" charset="-120"/>
+              </a:rPr>
+              <a:t>(ii) Dual-source biomass. </a:t>
+            </a:r>
+            <a:r>
               <a:rPr lang="en-US" sz="1400" dirty="0">
                 <a:solidFill>
                   <a:srgbClr val="0A2540"/>
@@ -12367,7 +12524,7 @@
                 <a:ea typeface="Calibri" pitchFamily="34" charset="-122"/>
                 <a:cs typeface="Calibri" pitchFamily="34" charset="-120"/>
               </a:rPr>
-              <a:t>Re-fits over 3 nested coastal domains: σ_post/σ_prior for ρ^SST_jurel stays in [0.998, 1.014]. Anch &amp; sard stable (CV &lt; 0.03).</a:t>
+              <a:t>Augment with IFOP Northern Chile acoustic series (2010–24, r_log = 0.88): σ_post/σ_prior ∈ {0.94, 0.99}. Bottleneck is structural, not N.</a:t>
             </a:r>
             <a:endParaRPr lang="en-US" sz="1400" dirty="0"/>
           </a:p>
@@ -12375,13 +12532,13 @@
       </p:sp>
       <p:sp>
         <p:nvSpPr>
-          <p:cNvPr id="6" name="Text 4"/>
-          <p:cNvSpPr/>
-          <p:nvPr/>
-        </p:nvSpPr>
-        <p:spPr>
-          <a:xfrm>
-            <a:off x="457200" y="2514600"/>
+          <p:cNvPr id="7" name="Text 5"/>
+          <p:cNvSpPr/>
+          <p:nvPr/>
+        </p:nvSpPr>
+        <p:spPr>
+          <a:xfrm>
+            <a:off x="457200" y="3703320"/>
             <a:ext cx="11277295" cy="1188720"/>
           </a:xfrm>
           <a:prstGeom prst="rect">
@@ -12394,7 +12551,7 @@
           <a:bodyPr wrap="square" rtlCol="0" anchor="t"/>
           <a:lstStyle/>
           <a:p>
-            <a:pPr indent="0" marL="0">
+            <a:pPr marL="0" indent="0">
               <a:spcAft>
                 <a:spcPts val="1000"/>
               </a:spcAft>
@@ -12409,73 +12566,8 @@
                 <a:ea typeface="Calibri" pitchFamily="34" charset="-122"/>
                 <a:cs typeface="Calibri" pitchFamily="34" charset="-120"/>
               </a:rPr>
-              <a:t>(ii) Dual-source biomass. </a:t>
-            </a:r>
-            <a:pPr indent="0" marL="0">
-              <a:spcAft>
-                <a:spcPts val="1000"/>
-              </a:spcAft>
-              <a:buNone/>
-            </a:pPr>
-            <a:r>
-              <a:rPr lang="en-US" sz="1400" dirty="0">
-                <a:solidFill>
-                  <a:srgbClr val="0A2540"/>
-                </a:solidFill>
-                <a:latin typeface="Calibri" pitchFamily="34" charset="0"/>
-                <a:ea typeface="Calibri" pitchFamily="34" charset="-122"/>
-                <a:cs typeface="Calibri" pitchFamily="34" charset="-120"/>
-              </a:rPr>
-              <a:t>Augment with IFOP Northern Chile acoustic series (2010–24, r_log = 0.88): σ_post/σ_prior ∈ {0.94, 0.99}. Bottleneck is structural, not N.</a:t>
-            </a:r>
-            <a:endParaRPr lang="en-US" sz="1400" dirty="0"/>
-          </a:p>
-        </p:txBody>
-      </p:sp>
-      <p:sp>
-        <p:nvSpPr>
-          <p:cNvPr id="7" name="Text 5"/>
-          <p:cNvSpPr/>
-          <p:nvPr/>
-        </p:nvSpPr>
-        <p:spPr>
-          <a:xfrm>
-            <a:off x="457200" y="3703320"/>
-            <a:ext cx="11277295" cy="1188720"/>
-          </a:xfrm>
-          <a:prstGeom prst="rect">
-            <a:avLst/>
-          </a:prstGeom>
-          <a:noFill/>
-          <a:ln/>
-        </p:spPr>
-        <p:txBody>
-          <a:bodyPr wrap="square" rtlCol="0" anchor="t"/>
-          <a:lstStyle/>
-          <a:p>
-            <a:pPr indent="0" marL="0">
-              <a:spcAft>
-                <a:spcPts val="1000"/>
-              </a:spcAft>
-              <a:buNone/>
-            </a:pPr>
-            <a:r>
-              <a:rPr lang="en-US" sz="1400" b="1" dirty="0">
-                <a:solidFill>
-                  <a:srgbClr val="113B63"/>
-                </a:solidFill>
-                <a:latin typeface="Calibri" pitchFamily="34" charset="0"/>
-                <a:ea typeface="Calibri" pitchFamily="34" charset="-122"/>
-                <a:cs typeface="Calibri" pitchFamily="34" charset="-120"/>
-              </a:rPr>
               <a:t>(iii) OROP-PS coherence. </a:t>
             </a:r>
-            <a:pPr indent="0" marL="0">
-              <a:spcAft>
-                <a:spcPts val="1000"/>
-              </a:spcAft>
-              <a:buNone/>
-            </a:pPr>
             <a:r>
               <a:rPr lang="en-US" sz="1400" dirty="0">
                 <a:solidFill>
@@ -12515,6 +12607,13 @@
             <a:prstDash val="solid"/>
           </a:ln>
         </p:spPr>
+        <p:txBody>
+          <a:bodyPr/>
+          <a:lstStyle/>
+          <a:p>
+            <a:endParaRPr lang="es-CL"/>
+          </a:p>
+        </p:txBody>
       </p:sp>
       <p:sp>
         <p:nvSpPr>
@@ -12540,6 +12639,13 @@
             <a:prstDash val="solid"/>
           </a:ln>
         </p:spPr>
+        <p:txBody>
+          <a:bodyPr/>
+          <a:lstStyle/>
+          <a:p>
+            <a:endParaRPr lang="es-CL"/>
+          </a:p>
+        </p:txBody>
       </p:sp>
       <p:sp>
         <p:nvSpPr>
@@ -12562,7 +12668,7 @@
           <a:bodyPr wrap="square" lIns="0" tIns="0" rIns="0" bIns="0" rtlCol="0" anchor="ctr"/>
           <a:lstStyle/>
           <a:p>
-            <a:pPr indent="0" marL="0">
+            <a:pPr marL="0" indent="0">
               <a:buNone/>
             </a:pPr>
             <a:r>
@@ -12601,7 +12707,7 @@
           <a:bodyPr wrap="square" lIns="0" tIns="0" rIns="0" bIns="0" rtlCol="0" anchor="ctr"/>
           <a:lstStyle/>
           <a:p>
-            <a:pPr algn="l" indent="0" marL="0">
+            <a:pPr marL="0" indent="0" algn="l">
               <a:buNone/>
             </a:pPr>
             <a:r>
@@ -12640,7 +12746,7 @@
           <a:bodyPr wrap="square" lIns="0" tIns="0" rIns="0" bIns="0" rtlCol="0" anchor="ctr"/>
           <a:lstStyle/>
           <a:p>
-            <a:pPr algn="r" indent="0" marL="0">
+            <a:pPr marL="0" indent="0" algn="r">
               <a:buNone/>
             </a:pPr>
             <a:r>
@@ -12704,7 +12810,7 @@
           <a:bodyPr wrap="square" lIns="0" tIns="0" rIns="0" bIns="0" rtlCol="0" anchor="ctr"/>
           <a:lstStyle/>
           <a:p>
-            <a:pPr algn="l" indent="0" marL="0">
+            <a:pPr marL="0" indent="0" algn="l">
               <a:buNone/>
             </a:pPr>
             <a:r>
@@ -12744,6 +12850,13 @@
             <a:prstDash val="solid"/>
           </a:ln>
         </p:spPr>
+        <p:txBody>
+          <a:bodyPr/>
+          <a:lstStyle/>
+          <a:p>
+            <a:endParaRPr lang="es-CL"/>
+          </a:p>
+        </p:txBody>
       </p:sp>
       <p:sp>
         <p:nvSpPr>
@@ -12766,7 +12879,7 @@
           <a:bodyPr wrap="square" lIns="0" tIns="0" rIns="0" bIns="0" rtlCol="0" anchor="ctr"/>
           <a:lstStyle/>
           <a:p>
-            <a:pPr indent="0" marL="0">
+            <a:pPr marL="0" indent="0">
               <a:buNone/>
             </a:pPr>
             <a:r>
@@ -12805,7 +12918,7 @@
           <a:bodyPr wrap="square" lIns="0" tIns="0" rIns="0" bIns="0" rtlCol="0" anchor="t"/>
           <a:lstStyle/>
           <a:p>
-            <a:pPr indent="0" marL="0">
+            <a:pPr marL="0" indent="0">
               <a:buNone/>
             </a:pPr>
             <a:r>
@@ -12926,7 +13039,7 @@
           <a:bodyPr wrap="square" lIns="0" tIns="0" rIns="0" bIns="0" rtlCol="0" anchor="ctr"/>
           <a:lstStyle/>
           <a:p>
-            <a:pPr indent="0" marL="0">
+            <a:pPr marL="0" indent="0">
               <a:buNone/>
             </a:pPr>
             <a:r>
@@ -13071,6 +13184,13 @@
             <a:prstDash val="solid"/>
           </a:ln>
         </p:spPr>
+        <p:txBody>
+          <a:bodyPr/>
+          <a:lstStyle/>
+          <a:p>
+            <a:endParaRPr lang="es-CL"/>
+          </a:p>
+        </p:txBody>
       </p:sp>
       <p:sp>
         <p:nvSpPr>
@@ -13096,6 +13216,13 @@
             <a:prstDash val="solid"/>
           </a:ln>
         </p:spPr>
+        <p:txBody>
+          <a:bodyPr/>
+          <a:lstStyle/>
+          <a:p>
+            <a:endParaRPr lang="es-CL"/>
+          </a:p>
+        </p:txBody>
       </p:sp>
       <p:sp>
         <p:nvSpPr>
@@ -13118,7 +13245,7 @@
           <a:bodyPr wrap="square" lIns="0" tIns="0" rIns="0" bIns="0" rtlCol="0" anchor="ctr"/>
           <a:lstStyle/>
           <a:p>
-            <a:pPr indent="0" marL="0">
+            <a:pPr marL="0" indent="0">
               <a:buNone/>
             </a:pPr>
             <a:r>
@@ -13157,7 +13284,7 @@
           <a:bodyPr wrap="square" lIns="0" tIns="0" rIns="0" bIns="0" rtlCol="0" anchor="ctr"/>
           <a:lstStyle/>
           <a:p>
-            <a:pPr algn="l" indent="0" marL="0">
+            <a:pPr marL="0" indent="0" algn="l">
               <a:buNone/>
             </a:pPr>
             <a:r>
@@ -13196,7 +13323,7 @@
           <a:bodyPr wrap="square" lIns="0" tIns="0" rIns="0" bIns="0" rtlCol="0" anchor="ctr"/>
           <a:lstStyle/>
           <a:p>
-            <a:pPr algn="r" indent="0" marL="0">
+            <a:pPr marL="0" indent="0" algn="r">
               <a:buNone/>
             </a:pPr>
             <a:r>
@@ -13260,7 +13387,7 @@
           <a:bodyPr wrap="square" lIns="0" tIns="0" rIns="0" bIns="0" rtlCol="0" anchor="ctr"/>
           <a:lstStyle/>
           <a:p>
-            <a:pPr algn="l" indent="0" marL="0">
+            <a:pPr marL="0" indent="0" algn="l">
               <a:buNone/>
             </a:pPr>
             <a:r>
@@ -13300,6 +13427,13 @@
             <a:prstDash val="solid"/>
           </a:ln>
         </p:spPr>
+        <p:txBody>
+          <a:bodyPr/>
+          <a:lstStyle/>
+          <a:p>
+            <a:endParaRPr lang="es-CL"/>
+          </a:p>
+        </p:txBody>
       </p:sp>
       <p:sp>
         <p:nvSpPr>
@@ -13322,7 +13456,7 @@
           <a:bodyPr wrap="square" lIns="0" tIns="0" rIns="0" bIns="0" rtlCol="0" anchor="ctr"/>
           <a:lstStyle/>
           <a:p>
-            <a:pPr indent="0" marL="0">
+            <a:pPr marL="0" indent="0">
               <a:buNone/>
             </a:pPr>
             <a:r>
@@ -13361,7 +13495,7 @@
           <a:bodyPr wrap="square" lIns="0" tIns="0" rIns="0" bIns="0" rtlCol="0" anchor="ctr"/>
           <a:lstStyle/>
           <a:p>
-            <a:pPr indent="0" marL="0">
+            <a:pPr marL="0" indent="0">
               <a:buNone/>
             </a:pPr>
             <a:r>
@@ -13482,7 +13616,7 @@
           <a:bodyPr wrap="square" lIns="0" tIns="0" rIns="0" bIns="0" rtlCol="0" anchor="ctr"/>
           <a:lstStyle/>
           <a:p>
-            <a:pPr indent="0" marL="0">
+            <a:pPr marL="0" indent="0">
               <a:buNone/>
             </a:pPr>
             <a:r>
@@ -13521,7 +13655,7 @@
           <a:bodyPr wrap="square" lIns="0" tIns="0" rIns="0" bIns="0" rtlCol="0" anchor="ctr"/>
           <a:lstStyle/>
           <a:p>
-            <a:pPr indent="0" marL="0">
+            <a:pPr marL="0" indent="0">
               <a:buNone/>
             </a:pPr>
             <a:r>
@@ -13560,7 +13694,7 @@
           <a:bodyPr wrap="square" lIns="0" tIns="0" rIns="0" bIns="0" rtlCol="0" anchor="t"/>
           <a:lstStyle/>
           <a:p>
-            <a:pPr indent="0" marL="0">
+            <a:pPr marL="0" indent="0">
               <a:buNone/>
             </a:pPr>
             <a:r>
@@ -13660,7 +13794,7 @@
           <a:bodyPr wrap="square" lIns="0" tIns="0" rIns="0" bIns="0" rtlCol="0" anchor="t"/>
           <a:lstStyle/>
           <a:p>
-            <a:pPr indent="0" marL="0">
+            <a:pPr marL="0" indent="0">
               <a:buNone/>
             </a:pPr>
             <a:r>
@@ -13702,6 +13836,13 @@
             <a:prstDash val="solid"/>
           </a:ln>
         </p:spPr>
+        <p:txBody>
+          <a:bodyPr/>
+          <a:lstStyle/>
+          <a:p>
+            <a:endParaRPr lang="es-CL"/>
+          </a:p>
+        </p:txBody>
       </p:sp>
       <p:sp>
         <p:nvSpPr>
@@ -13727,6 +13868,13 @@
             <a:prstDash val="solid"/>
           </a:ln>
         </p:spPr>
+        <p:txBody>
+          <a:bodyPr/>
+          <a:lstStyle/>
+          <a:p>
+            <a:endParaRPr lang="es-CL"/>
+          </a:p>
+        </p:txBody>
       </p:sp>
       <p:sp>
         <p:nvSpPr>
@@ -13749,7 +13897,7 @@
           <a:bodyPr wrap="square" lIns="0" tIns="0" rIns="0" bIns="0" rtlCol="0" anchor="ctr"/>
           <a:lstStyle/>
           <a:p>
-            <a:pPr indent="0" marL="0">
+            <a:pPr marL="0" indent="0">
               <a:buNone/>
             </a:pPr>
             <a:r>
@@ -13788,7 +13936,7 @@
           <a:bodyPr wrap="square" lIns="0" tIns="0" rIns="0" bIns="0" rtlCol="0" anchor="ctr"/>
           <a:lstStyle/>
           <a:p>
-            <a:pPr algn="l" indent="0" marL="0">
+            <a:pPr marL="0" indent="0" algn="l">
               <a:buNone/>
             </a:pPr>
             <a:r>
@@ -13827,7 +13975,7 @@
           <a:bodyPr wrap="square" lIns="0" tIns="0" rIns="0" bIns="0" rtlCol="0" anchor="ctr"/>
           <a:lstStyle/>
           <a:p>
-            <a:pPr algn="r" indent="0" marL="0">
+            <a:pPr marL="0" indent="0" algn="r">
               <a:buNone/>
             </a:pPr>
             <a:r>
@@ -13891,7 +14039,7 @@
           <a:bodyPr wrap="square" lIns="0" tIns="0" rIns="0" bIns="0" rtlCol="0" anchor="ctr"/>
           <a:lstStyle/>
           <a:p>
-            <a:pPr algn="l" indent="0" marL="0">
+            <a:pPr marL="0" indent="0" algn="l">
               <a:buNone/>
             </a:pPr>
             <a:r>
@@ -13931,18 +14079,25 @@
             <a:prstDash val="solid"/>
           </a:ln>
         </p:spPr>
+        <p:txBody>
+          <a:bodyPr/>
+          <a:lstStyle/>
+          <a:p>
+            <a:endParaRPr lang="es-CL"/>
+          </a:p>
+        </p:txBody>
       </p:sp>
       <p:pic>
         <p:nvPicPr>
-          <p:cNvPr id="4" name="Image 0" descr="/sessions/tender-gallant-volta/mnt/outputs/pices_build/assets/loo_t4b_elpd_stock.png">    </p:cNvPr>
+          <p:cNvPr id="4" name="Image 0" descr="/sessions/tender-gallant-volta/mnt/outputs/pices_build/assets/loo_t4b_elpd_stock.png"/>
           <p:cNvPicPr>
             <a:picLocks noChangeAspect="1"/>
           </p:cNvPicPr>
           <p:nvPr/>
         </p:nvPicPr>
         <p:blipFill>
-          <a:blip r:embed="rId1"/>
-          <a:srcRect l="0" r="0" t="0" b="0"/>
+          <a:blip r:embed="rId3"/>
+          <a:srcRect/>
           <a:stretch/>
         </p:blipFill>
         <p:spPr>
@@ -13976,7 +14131,7 @@
           <a:bodyPr wrap="square" lIns="0" tIns="0" rIns="0" bIns="0" rtlCol="0" anchor="t"/>
           <a:lstStyle/>
           <a:p>
-            <a:pPr indent="0" marL="0">
+            <a:pPr marL="0" indent="0">
               <a:buNone/>
             </a:pPr>
             <a:r>
@@ -14015,7 +14170,7 @@
           <a:bodyPr wrap="square" lIns="0" tIns="0" rIns="0" bIns="0" rtlCol="0" anchor="ctr"/>
           <a:lstStyle/>
           <a:p>
-            <a:pPr algn="l" indent="0" marL="0">
+            <a:pPr marL="0" indent="0" algn="l">
               <a:buNone/>
             </a:pPr>
             <a:r>
@@ -14054,7 +14209,7 @@
           <a:bodyPr wrap="square" lIns="0" tIns="0" rIns="0" bIns="0" rtlCol="0" anchor="ctr"/>
           <a:lstStyle/>
           <a:p>
-            <a:pPr algn="r" indent="0" marL="0">
+            <a:pPr marL="0" indent="0" algn="r">
               <a:buNone/>
             </a:pPr>
             <a:r>
@@ -14118,7 +14273,7 @@
           <a:bodyPr wrap="square" lIns="0" tIns="0" rIns="0" bIns="0" rtlCol="0" anchor="ctr"/>
           <a:lstStyle/>
           <a:p>
-            <a:pPr algn="l" indent="0" marL="0">
+            <a:pPr marL="0" indent="0" algn="l">
               <a:buNone/>
             </a:pPr>
             <a:r>
@@ -14158,18 +14313,25 @@
             <a:prstDash val="solid"/>
           </a:ln>
         </p:spPr>
+        <p:txBody>
+          <a:bodyPr/>
+          <a:lstStyle/>
+          <a:p>
+            <a:endParaRPr lang="es-CL"/>
+          </a:p>
+        </p:txBody>
       </p:sp>
       <p:pic>
         <p:nvPicPr>
-          <p:cNvPr id="4" name="Image 0" descr="/sessions/tender-gallant-volta/mnt/outputs/pices_build/assets/t4b_ppc_B_smooth_vs_obs.png">    </p:cNvPr>
+          <p:cNvPr id="4" name="Image 0" descr="/sessions/tender-gallant-volta/mnt/outputs/pices_build/assets/t4b_ppc_B_smooth_vs_obs.png"/>
           <p:cNvPicPr>
             <a:picLocks noChangeAspect="1"/>
           </p:cNvPicPr>
           <p:nvPr/>
         </p:nvPicPr>
         <p:blipFill>
-          <a:blip r:embed="rId1"/>
-          <a:srcRect l="0" r="0" t="0" b="0"/>
+          <a:blip r:embed="rId3"/>
+          <a:srcRect/>
           <a:stretch/>
         </p:blipFill>
         <p:spPr>
@@ -14203,7 +14365,7 @@
           <a:bodyPr wrap="square" lIns="0" tIns="0" rIns="0" bIns="0" rtlCol="0" anchor="t"/>
           <a:lstStyle/>
           <a:p>
-            <a:pPr indent="0" marL="0">
+            <a:pPr marL="0" indent="0">
               <a:buNone/>
             </a:pPr>
             <a:r>
@@ -14242,7 +14404,7 @@
           <a:bodyPr wrap="square" lIns="0" tIns="0" rIns="0" bIns="0" rtlCol="0" anchor="ctr"/>
           <a:lstStyle/>
           <a:p>
-            <a:pPr algn="l" indent="0" marL="0">
+            <a:pPr marL="0" indent="0" algn="l">
               <a:buNone/>
             </a:pPr>
             <a:r>
@@ -14281,7 +14443,7 @@
           <a:bodyPr wrap="square" lIns="0" tIns="0" rIns="0" bIns="0" rtlCol="0" anchor="ctr"/>
           <a:lstStyle/>
           <a:p>
-            <a:pPr algn="r" indent="0" marL="0">
+            <a:pPr marL="0" indent="0" algn="r">
               <a:buNone/>
             </a:pPr>
             <a:r>
@@ -14345,7 +14507,7 @@
           <a:bodyPr wrap="square" lIns="0" tIns="0" rIns="0" bIns="0" rtlCol="0" anchor="ctr"/>
           <a:lstStyle/>
           <a:p>
-            <a:pPr algn="l" indent="0" marL="0">
+            <a:pPr marL="0" indent="0" algn="l">
               <a:buNone/>
             </a:pPr>
             <a:r>
@@ -14385,18 +14547,25 @@
             <a:prstDash val="solid"/>
           </a:ln>
         </p:spPr>
+        <p:txBody>
+          <a:bodyPr/>
+          <a:lstStyle/>
+          <a:p>
+            <a:endParaRPr lang="es-CL"/>
+          </a:p>
+        </p:txBody>
       </p:sp>
       <p:pic>
         <p:nvPicPr>
-          <p:cNvPr id="4" name="Image 0" descr="/sessions/tender-gallant-volta/mnt/outputs/pices_build/assets/growth_ridgeline_cmip6.png">    </p:cNvPr>
+          <p:cNvPr id="4" name="Image 0" descr="/sessions/tender-gallant-volta/mnt/outputs/pices_build/assets/growth_ridgeline_cmip6.png"/>
           <p:cNvPicPr>
             <a:picLocks noChangeAspect="1"/>
           </p:cNvPicPr>
           <p:nvPr/>
         </p:nvPicPr>
         <p:blipFill>
-          <a:blip r:embed="rId1"/>
-          <a:srcRect l="0" r="0" t="0" b="0"/>
+          <a:blip r:embed="rId3"/>
+          <a:srcRect/>
           <a:stretch/>
         </p:blipFill>
         <p:spPr>
@@ -14430,7 +14599,7 @@
           <a:bodyPr wrap="square" lIns="0" tIns="0" rIns="0" bIns="0" rtlCol="0" anchor="t"/>
           <a:lstStyle/>
           <a:p>
-            <a:pPr indent="0" marL="0">
+            <a:pPr marL="0" indent="0">
               <a:buNone/>
             </a:pPr>
             <a:r>
@@ -14469,7 +14638,7 @@
           <a:bodyPr wrap="square" lIns="0" tIns="0" rIns="0" bIns="0" rtlCol="0" anchor="ctr"/>
           <a:lstStyle/>
           <a:p>
-            <a:pPr algn="l" indent="0" marL="0">
+            <a:pPr marL="0" indent="0" algn="l">
               <a:buNone/>
             </a:pPr>
             <a:r>
@@ -14508,7 +14677,7 @@
           <a:bodyPr wrap="square" lIns="0" tIns="0" rIns="0" bIns="0" rtlCol="0" anchor="ctr"/>
           <a:lstStyle/>
           <a:p>
-            <a:pPr algn="r" indent="0" marL="0">
+            <a:pPr marL="0" indent="0" algn="r">
               <a:buNone/>
             </a:pPr>
             <a:r>
@@ -14572,7 +14741,7 @@
           <a:bodyPr wrap="square" lIns="0" tIns="0" rIns="0" bIns="0" rtlCol="0" anchor="ctr"/>
           <a:lstStyle/>
           <a:p>
-            <a:pPr algn="l" indent="0" marL="0">
+            <a:pPr marL="0" indent="0" algn="l">
               <a:buNone/>
             </a:pPr>
             <a:r>
@@ -14612,18 +14781,25 @@
             <a:prstDash val="solid"/>
           </a:ln>
         </p:spPr>
+        <p:txBody>
+          <a:bodyPr/>
+          <a:lstStyle/>
+          <a:p>
+            <a:endParaRPr lang="es-CL"/>
+          </a:p>
+        </p:txBody>
       </p:sp>
       <p:pic>
         <p:nvPicPr>
-          <p:cNvPr id="4" name="Image 0" descr="/sessions/tender-gallant-volta/mnt/outputs/pices_build/assets/appendix_g_trips_variance_decomposition.png">    </p:cNvPr>
+          <p:cNvPr id="4" name="Image 0" descr="/sessions/tender-gallant-volta/mnt/outputs/pices_build/assets/appendix_g_trips_variance_decomposition.png"/>
           <p:cNvPicPr>
             <a:picLocks noChangeAspect="1"/>
           </p:cNvPicPr>
           <p:nvPr/>
         </p:nvPicPr>
         <p:blipFill>
-          <a:blip r:embed="rId1"/>
-          <a:srcRect l="0" r="0" t="0" b="0"/>
+          <a:blip r:embed="rId3"/>
+          <a:srcRect/>
           <a:stretch/>
         </p:blipFill>
         <p:spPr>
@@ -14739,7 +14915,7 @@
           <a:bodyPr wrap="square" lIns="0" tIns="0" rIns="0" bIns="0" rtlCol="0" anchor="ctr"/>
           <a:lstStyle/>
           <a:p>
-            <a:pPr algn="l" indent="0" marL="0">
+            <a:pPr marL="0" indent="0" algn="l">
               <a:buNone/>
             </a:pPr>
             <a:r>
@@ -14778,7 +14954,7 @@
           <a:bodyPr wrap="square" lIns="0" tIns="0" rIns="0" bIns="0" rtlCol="0" anchor="ctr"/>
           <a:lstStyle/>
           <a:p>
-            <a:pPr algn="r" indent="0" marL="0">
+            <a:pPr marL="0" indent="0" algn="r">
               <a:buNone/>
             </a:pPr>
             <a:r>
@@ -14842,7 +15018,7 @@
           <a:bodyPr wrap="square" lIns="0" tIns="0" rIns="0" bIns="0" rtlCol="0" anchor="ctr"/>
           <a:lstStyle/>
           <a:p>
-            <a:pPr algn="l" indent="0" marL="0">
+            <a:pPr marL="0" indent="0" algn="l">
               <a:buNone/>
             </a:pPr>
             <a:r>
@@ -14850,13 +15026,17 @@
                 <a:solidFill>
                   <a:srgbClr val="113B63"/>
                 </a:solidFill>
-                <a:latin typeface="Calibri" pitchFamily="34" charset="0"/>
-                <a:ea typeface="Calibri" pitchFamily="34" charset="-122"/>
-                <a:cs typeface="Calibri" pitchFamily="34" charset="-120"/>
+                <a:latin typeface="Poppins" panose="00000500000000000000" pitchFamily="2" charset="0"/>
+                <a:ea typeface="Roboto" panose="02000000000000000000" pitchFamily="2" charset="0"/>
+                <a:cs typeface="Poppins" panose="00000500000000000000" pitchFamily="2" charset="0"/>
               </a:rPr>
               <a:t>Appendix I · Paper 2 — data inputs</a:t>
             </a:r>
-            <a:endParaRPr lang="en-US" sz="2800" dirty="0"/>
+            <a:endParaRPr lang="en-US" sz="2800" dirty="0">
+              <a:latin typeface="Poppins" panose="00000500000000000000" pitchFamily="2" charset="0"/>
+              <a:ea typeface="Roboto" panose="02000000000000000000" pitchFamily="2" charset="0"/>
+              <a:cs typeface="Poppins" panose="00000500000000000000" pitchFamily="2" charset="0"/>
+            </a:endParaRPr>
           </a:p>
         </p:txBody>
       </p:sp>
@@ -14882,6 +15062,17 @@
             <a:prstDash val="solid"/>
           </a:ln>
         </p:spPr>
+        <p:txBody>
+          <a:bodyPr/>
+          <a:lstStyle/>
+          <a:p>
+            <a:endParaRPr lang="es-CL">
+              <a:latin typeface="Poppins" panose="00000500000000000000" pitchFamily="2" charset="0"/>
+              <a:ea typeface="Roboto" panose="02000000000000000000" pitchFamily="2" charset="0"/>
+              <a:cs typeface="Poppins" panose="00000500000000000000" pitchFamily="2" charset="0"/>
+            </a:endParaRPr>
+          </a:p>
+        </p:txBody>
       </p:sp>
       <p:sp>
         <p:nvSpPr>
@@ -14916,13 +15107,17 @@
                 <a:solidFill>
                   <a:srgbClr val="0A2540"/>
                 </a:solidFill>
-                <a:latin typeface="Calibri" pitchFamily="34" charset="0"/>
-                <a:ea typeface="Calibri" pitchFamily="34" charset="-122"/>
-                <a:cs typeface="Calibri" pitchFamily="34" charset="-120"/>
+                <a:latin typeface="Poppins" panose="00000500000000000000" pitchFamily="2" charset="0"/>
+                <a:ea typeface="Roboto" panose="02000000000000000000" pitchFamily="2" charset="0"/>
+                <a:cs typeface="Poppins" panose="00000500000000000000" pitchFamily="2" charset="0"/>
               </a:rPr>
               <a:t>Trip-level catch and price data (IFOP logbooks, 2013–2024).</a:t>
             </a:r>
-            <a:endParaRPr lang="en-US" sz="1600" dirty="0"/>
+            <a:endParaRPr lang="en-US" sz="1600" dirty="0">
+              <a:latin typeface="Poppins" panose="00000500000000000000" pitchFamily="2" charset="0"/>
+              <a:ea typeface="Roboto" panose="02000000000000000000" pitchFamily="2" charset="0"/>
+              <a:cs typeface="Poppins" panose="00000500000000000000" pitchFamily="2" charset="0"/>
+            </a:endParaRPr>
           </a:p>
           <a:p>
             <a:pPr marL="342900" indent="-342900">
@@ -14937,13 +15132,17 @@
                 <a:solidFill>
                   <a:srgbClr val="0A2540"/>
                 </a:solidFill>
-                <a:latin typeface="Calibri" pitchFamily="34" charset="0"/>
-                <a:ea typeface="Calibri" pitchFamily="34" charset="-122"/>
-                <a:cs typeface="Calibri" pitchFamily="34" charset="-120"/>
+                <a:latin typeface="Poppins" panose="00000500000000000000" pitchFamily="2" charset="0"/>
+                <a:ea typeface="Roboto" panose="02000000000000000000" pitchFamily="2" charset="0"/>
+                <a:cs typeface="Poppins" panose="00000500000000000000" pitchFamily="2" charset="0"/>
               </a:rPr>
               <a:t>All-gear official catch series (SERNAPESCA).</a:t>
             </a:r>
-            <a:endParaRPr lang="en-US" sz="1600" dirty="0"/>
+            <a:endParaRPr lang="en-US" sz="1600" dirty="0">
+              <a:latin typeface="Poppins" panose="00000500000000000000" pitchFamily="2" charset="0"/>
+              <a:ea typeface="Roboto" panose="02000000000000000000" pitchFamily="2" charset="0"/>
+              <a:cs typeface="Poppins" panose="00000500000000000000" pitchFamily="2" charset="0"/>
+            </a:endParaRPr>
           </a:p>
           <a:p>
             <a:pPr marL="342900" indent="-342900">
@@ -14958,13 +15157,17 @@
                 <a:solidFill>
                   <a:srgbClr val="0A2540"/>
                 </a:solidFill>
-                <a:latin typeface="Calibri" pitchFamily="34" charset="0"/>
-                <a:ea typeface="Calibri" pitchFamily="34" charset="-122"/>
-                <a:cs typeface="Calibri" pitchFamily="34" charset="-120"/>
+                <a:latin typeface="Poppins" panose="00000500000000000000" pitchFamily="2" charset="0"/>
+                <a:ea typeface="Roboto" panose="02000000000000000000" pitchFamily="2" charset="0"/>
+                <a:cs typeface="Poppins" panose="00000500000000000000" pitchFamily="2" charset="0"/>
               </a:rPr>
               <a:t>Vessel characteristics &amp; ports of operation.</a:t>
             </a:r>
-            <a:endParaRPr lang="en-US" sz="1600" dirty="0"/>
+            <a:endParaRPr lang="en-US" sz="1600" dirty="0">
+              <a:latin typeface="Poppins" panose="00000500000000000000" pitchFamily="2" charset="0"/>
+              <a:ea typeface="Roboto" panose="02000000000000000000" pitchFamily="2" charset="0"/>
+              <a:cs typeface="Poppins" panose="00000500000000000000" pitchFamily="2" charset="0"/>
+            </a:endParaRPr>
           </a:p>
           <a:p>
             <a:pPr marL="342900" indent="-342900">
@@ -14976,25 +15179,113 @@
                 <a:solidFill>
                   <a:srgbClr val="0A2540"/>
                 </a:solidFill>
+                <a:latin typeface="Poppins" panose="00000500000000000000" pitchFamily="2" charset="0"/>
+                <a:ea typeface="Roboto" panose="02000000000000000000" pitchFamily="2" charset="0"/>
+                <a:cs typeface="Poppins" panose="00000500000000000000" pitchFamily="2" charset="0"/>
+              </a:rPr>
+              <a:t>Environmental covariates (Copernicus, GlobColour, CMIP6 6-GCM ensemble).</a:t>
+            </a:r>
+            <a:endParaRPr lang="en-US" sz="1600" dirty="0">
+              <a:latin typeface="Poppins" panose="00000500000000000000" pitchFamily="2" charset="0"/>
+              <a:ea typeface="Roboto" panose="02000000000000000000" pitchFamily="2" charset="0"/>
+              <a:cs typeface="Poppins" panose="00000500000000000000" pitchFamily="2" charset="0"/>
+            </a:endParaRPr>
+          </a:p>
+        </p:txBody>
+      </p:sp>
+      <p:sp>
+        <p:nvSpPr>
+          <p:cNvPr id="8" name="Text 6"/>
+          <p:cNvSpPr/>
+          <p:nvPr/>
+        </p:nvSpPr>
+        <p:spPr>
+          <a:xfrm>
+            <a:off x="457200" y="6492240"/>
+            <a:ext cx="7315200" cy="274320"/>
+          </a:xfrm>
+          <a:prstGeom prst="rect">
+            <a:avLst/>
+          </a:prstGeom>
+          <a:noFill/>
+          <a:ln/>
+        </p:spPr>
+        <p:txBody>
+          <a:bodyPr wrap="square" lIns="0" tIns="0" rIns="0" bIns="0" rtlCol="0" anchor="ctr"/>
+          <a:lstStyle/>
+          <a:p>
+            <a:pPr marL="0" indent="0" algn="l">
+              <a:buNone/>
+            </a:pPr>
+            <a:r>
+              <a:rPr lang="en-US" sz="1000" i="1" dirty="0">
+                <a:solidFill>
+                  <a:srgbClr val="475569"/>
+                </a:solidFill>
                 <a:latin typeface="Calibri" pitchFamily="34" charset="0"/>
                 <a:ea typeface="Calibri" pitchFamily="34" charset="-122"/>
                 <a:cs typeface="Calibri" pitchFamily="34" charset="-120"/>
               </a:rPr>
-              <a:t>Environmental covariates (Copernicus, GlobColour, CMIP6 6-GCM ensemble).</a:t>
-            </a:r>
-            <a:endParaRPr lang="en-US" sz="1600" dirty="0"/>
-          </a:p>
-        </p:txBody>
-      </p:sp>
-      <p:sp>
-        <p:nvSpPr>
-          <p:cNvPr id="5" name="Shape 3"/>
-          <p:cNvSpPr/>
-          <p:nvPr/>
-        </p:nvSpPr>
-        <p:spPr>
-          <a:xfrm>
-            <a:off x="457200" y="5669280"/>
+              <a:t>ICES/PICES SPF · La Paz · May 2026</a:t>
+            </a:r>
+            <a:endParaRPr lang="en-US" sz="1000" dirty="0"/>
+          </a:p>
+        </p:txBody>
+      </p:sp>
+      <p:sp>
+        <p:nvSpPr>
+          <p:cNvPr id="9" name="Text 7"/>
+          <p:cNvSpPr/>
+          <p:nvPr/>
+        </p:nvSpPr>
+        <p:spPr>
+          <a:xfrm>
+            <a:off x="10362895" y="6492240"/>
+            <a:ext cx="1371600" cy="274320"/>
+          </a:xfrm>
+          <a:prstGeom prst="rect">
+            <a:avLst/>
+          </a:prstGeom>
+          <a:noFill/>
+          <a:ln/>
+        </p:spPr>
+        <p:txBody>
+          <a:bodyPr wrap="square" lIns="0" tIns="0" rIns="0" bIns="0" rtlCol="0" anchor="ctr"/>
+          <a:lstStyle/>
+          <a:p>
+            <a:pPr marL="0" indent="0" algn="r">
+              <a:buNone/>
+            </a:pPr>
+            <a:r>
+              <a:rPr lang="en-US" sz="1000" dirty="0">
+                <a:solidFill>
+                  <a:srgbClr val="475569"/>
+                </a:solidFill>
+                <a:latin typeface="Calibri" pitchFamily="34" charset="0"/>
+                <a:ea typeface="Calibri" pitchFamily="34" charset="-122"/>
+                <a:cs typeface="Calibri" pitchFamily="34" charset="-120"/>
+              </a:rPr>
+              <a:t>28</a:t>
+            </a:r>
+            <a:endParaRPr lang="en-US" sz="1000" dirty="0"/>
+          </a:p>
+        </p:txBody>
+      </p:sp>
+      <p:sp>
+        <p:nvSpPr>
+          <p:cNvPr id="10" name="Shape 3">
+            <a:extLst>
+              <a:ext uri="{FF2B5EF4-FFF2-40B4-BE49-F238E27FC236}">
+                <a16:creationId xmlns:a16="http://schemas.microsoft.com/office/drawing/2014/main" id="{AC9262E5-8497-CAAC-B082-2DA1082BC88E}"/>
+              </a:ext>
+            </a:extLst>
+          </p:cNvPr>
+          <p:cNvSpPr/>
+          <p:nvPr/>
+        </p:nvSpPr>
+        <p:spPr>
+          <a:xfrm>
+            <a:off x="457352" y="4777740"/>
             <a:ext cx="11277295" cy="868680"/>
           </a:xfrm>
           <a:prstGeom prst="rect">
@@ -15010,16 +15301,33 @@
             <a:prstDash val="solid"/>
           </a:ln>
         </p:spPr>
-      </p:sp>
-      <p:sp>
-        <p:nvSpPr>
-          <p:cNvPr id="6" name="Shape 4"/>
-          <p:cNvSpPr/>
-          <p:nvPr/>
-        </p:nvSpPr>
-        <p:spPr>
-          <a:xfrm>
-            <a:off x="457200" y="5669280"/>
+        <p:txBody>
+          <a:bodyPr/>
+          <a:lstStyle/>
+          <a:p>
+            <a:endParaRPr lang="es-CL">
+              <a:latin typeface="Poppins" panose="00000500000000000000" pitchFamily="2" charset="0"/>
+              <a:ea typeface="Roboto" panose="02000000000000000000" pitchFamily="2" charset="0"/>
+              <a:cs typeface="Poppins" panose="00000500000000000000" pitchFamily="2" charset="0"/>
+            </a:endParaRPr>
+          </a:p>
+        </p:txBody>
+      </p:sp>
+      <p:sp>
+        <p:nvSpPr>
+          <p:cNvPr id="11" name="Shape 4">
+            <a:extLst>
+              <a:ext uri="{FF2B5EF4-FFF2-40B4-BE49-F238E27FC236}">
+                <a16:creationId xmlns:a16="http://schemas.microsoft.com/office/drawing/2014/main" id="{081E615B-42E4-27D0-5666-B526C7A3683F}"/>
+              </a:ext>
+            </a:extLst>
+          </p:cNvPr>
+          <p:cNvSpPr/>
+          <p:nvPr/>
+        </p:nvSpPr>
+        <p:spPr>
+          <a:xfrm>
+            <a:off x="457352" y="4777740"/>
             <a:ext cx="54864" cy="868680"/>
           </a:xfrm>
           <a:prstGeom prst="rect">
@@ -15035,16 +15343,33 @@
             <a:prstDash val="solid"/>
           </a:ln>
         </p:spPr>
-      </p:sp>
-      <p:sp>
-        <p:nvSpPr>
-          <p:cNvPr id="7" name="Text 5"/>
-          <p:cNvSpPr/>
-          <p:nvPr/>
-        </p:nvSpPr>
-        <p:spPr>
-          <a:xfrm>
-            <a:off x="594360" y="5669280"/>
+        <p:txBody>
+          <a:bodyPr/>
+          <a:lstStyle/>
+          <a:p>
+            <a:endParaRPr lang="es-CL">
+              <a:latin typeface="Poppins" panose="00000500000000000000" pitchFamily="2" charset="0"/>
+              <a:ea typeface="Roboto" panose="02000000000000000000" pitchFamily="2" charset="0"/>
+              <a:cs typeface="Poppins" panose="00000500000000000000" pitchFamily="2" charset="0"/>
+            </a:endParaRPr>
+          </a:p>
+        </p:txBody>
+      </p:sp>
+      <p:sp>
+        <p:nvSpPr>
+          <p:cNvPr id="12" name="Text 5">
+            <a:extLst>
+              <a:ext uri="{FF2B5EF4-FFF2-40B4-BE49-F238E27FC236}">
+                <a16:creationId xmlns:a16="http://schemas.microsoft.com/office/drawing/2014/main" id="{6C75FE09-A452-FF0E-3AA4-2B4C070FA6C1}"/>
+              </a:ext>
+            </a:extLst>
+          </p:cNvPr>
+          <p:cNvSpPr/>
+          <p:nvPr/>
+        </p:nvSpPr>
+        <p:spPr>
+          <a:xfrm>
+            <a:off x="594512" y="4777740"/>
             <a:ext cx="11094415" cy="868680"/>
           </a:xfrm>
           <a:prstGeom prst="rect">
@@ -15057,7 +15382,7 @@
           <a:bodyPr wrap="square" lIns="0" tIns="0" rIns="0" bIns="0" rtlCol="0" anchor="ctr"/>
           <a:lstStyle/>
           <a:p>
-            <a:pPr indent="0" marL="0">
+            <a:pPr marL="0" indent="0">
               <a:buNone/>
             </a:pPr>
             <a:r>
@@ -15065,91 +15390,17 @@
                 <a:solidFill>
                   <a:srgbClr val="0A2540"/>
                 </a:solidFill>
-                <a:latin typeface="Calibri" pitchFamily="34" charset="0"/>
-                <a:ea typeface="Calibri" pitchFamily="34" charset="-122"/>
-                <a:cs typeface="Calibri" pitchFamily="34" charset="-120"/>
+                <a:latin typeface="Poppins" panose="00000500000000000000" pitchFamily="2" charset="0"/>
+                <a:ea typeface="Roboto" panose="02000000000000000000" pitchFamily="2" charset="0"/>
+                <a:cs typeface="Poppins" panose="00000500000000000000" pitchFamily="2" charset="0"/>
               </a:rPr>
               <a:t>Caveat — IFOP panel coverage covers the purse-seine artisanal subset; non-PS gears (lampara, lines) excluded.</a:t>
             </a:r>
-            <a:endParaRPr lang="en-US" sz="1300" dirty="0"/>
-          </a:p>
-        </p:txBody>
-      </p:sp>
-      <p:sp>
-        <p:nvSpPr>
-          <p:cNvPr id="8" name="Text 6"/>
-          <p:cNvSpPr/>
-          <p:nvPr/>
-        </p:nvSpPr>
-        <p:spPr>
-          <a:xfrm>
-            <a:off x="457200" y="6492240"/>
-            <a:ext cx="7315200" cy="274320"/>
-          </a:xfrm>
-          <a:prstGeom prst="rect">
-            <a:avLst/>
-          </a:prstGeom>
-          <a:noFill/>
-          <a:ln/>
-        </p:spPr>
-        <p:txBody>
-          <a:bodyPr wrap="square" lIns="0" tIns="0" rIns="0" bIns="0" rtlCol="0" anchor="ctr"/>
-          <a:lstStyle/>
-          <a:p>
-            <a:pPr algn="l" indent="0" marL="0">
-              <a:buNone/>
-            </a:pPr>
-            <a:r>
-              <a:rPr lang="en-US" sz="1000" i="1" dirty="0">
-                <a:solidFill>
-                  <a:srgbClr val="475569"/>
-                </a:solidFill>
-                <a:latin typeface="Calibri" pitchFamily="34" charset="0"/>
-                <a:ea typeface="Calibri" pitchFamily="34" charset="-122"/>
-                <a:cs typeface="Calibri" pitchFamily="34" charset="-120"/>
-              </a:rPr>
-              <a:t>ICES/PICES SPF · La Paz · May 2026</a:t>
-            </a:r>
-            <a:endParaRPr lang="en-US" sz="1000" dirty="0"/>
-          </a:p>
-        </p:txBody>
-      </p:sp>
-      <p:sp>
-        <p:nvSpPr>
-          <p:cNvPr id="9" name="Text 7"/>
-          <p:cNvSpPr/>
-          <p:nvPr/>
-        </p:nvSpPr>
-        <p:spPr>
-          <a:xfrm>
-            <a:off x="10362895" y="6492240"/>
-            <a:ext cx="1371600" cy="274320"/>
-          </a:xfrm>
-          <a:prstGeom prst="rect">
-            <a:avLst/>
-          </a:prstGeom>
-          <a:noFill/>
-          <a:ln/>
-        </p:spPr>
-        <p:txBody>
-          <a:bodyPr wrap="square" lIns="0" tIns="0" rIns="0" bIns="0" rtlCol="0" anchor="ctr"/>
-          <a:lstStyle/>
-          <a:p>
-            <a:pPr algn="r" indent="0" marL="0">
-              <a:buNone/>
-            </a:pPr>
-            <a:r>
-              <a:rPr lang="en-US" sz="1000" dirty="0">
-                <a:solidFill>
-                  <a:srgbClr val="475569"/>
-                </a:solidFill>
-                <a:latin typeface="Calibri" pitchFamily="34" charset="0"/>
-                <a:ea typeface="Calibri" pitchFamily="34" charset="-122"/>
-                <a:cs typeface="Calibri" pitchFamily="34" charset="-120"/>
-              </a:rPr>
-              <a:t>28</a:t>
-            </a:r>
-            <a:endParaRPr lang="en-US" sz="1000" dirty="0"/>
+            <a:endParaRPr lang="en-US" sz="1300" dirty="0">
+              <a:latin typeface="Poppins" panose="00000500000000000000" pitchFamily="2" charset="0"/>
+              <a:ea typeface="Roboto" panose="02000000000000000000" pitchFamily="2" charset="0"/>
+              <a:cs typeface="Poppins" panose="00000500000000000000" pitchFamily="2" charset="0"/>
+            </a:endParaRPr>
           </a:p>
         </p:txBody>
       </p:sp>
@@ -15199,21 +15450,24 @@
           <a:bodyPr wrap="square" lIns="0" tIns="0" rIns="0" bIns="0" rtlCol="0" anchor="ctr"/>
           <a:lstStyle/>
           <a:p>
-            <a:pPr algn="l" indent="0" marL="0">
+            <a:pPr marL="0" indent="0" algn="l">
               <a:buNone/>
             </a:pPr>
             <a:r>
-              <a:rPr lang="en-US" sz="2800" b="1" dirty="0">
+              <a:rPr lang="en-US" sz="3200" b="1" dirty="0">
                 <a:solidFill>
                   <a:srgbClr val="113B63"/>
                 </a:solidFill>
-                <a:latin typeface="Calibri" pitchFamily="34" charset="0"/>
-                <a:ea typeface="Calibri" pitchFamily="34" charset="-122"/>
-                <a:cs typeface="Calibri" pitchFamily="34" charset="-120"/>
+                <a:latin typeface="Poppins" panose="00000500000000000000" pitchFamily="2" charset="0"/>
+                <a:ea typeface="Calibri" pitchFamily="34" charset="-122"/>
+                <a:cs typeface="Poppins" panose="00000500000000000000" pitchFamily="2" charset="0"/>
               </a:rPr>
               <a:t>The project — two papers, one structural pipeline</a:t>
             </a:r>
-            <a:endParaRPr lang="en-US" sz="2800" dirty="0"/>
+            <a:endParaRPr lang="en-US" sz="3200" dirty="0">
+              <a:latin typeface="Poppins" panose="00000500000000000000" pitchFamily="2" charset="0"/>
+              <a:cs typeface="Poppins" panose="00000500000000000000" pitchFamily="2" charset="0"/>
+            </a:endParaRPr>
           </a:p>
         </p:txBody>
       </p:sp>
@@ -15239,6 +15493,16 @@
             <a:prstDash val="solid"/>
           </a:ln>
         </p:spPr>
+        <p:txBody>
+          <a:bodyPr/>
+          <a:lstStyle/>
+          <a:p>
+            <a:endParaRPr lang="es-CL">
+              <a:latin typeface="Poppins" panose="00000500000000000000" pitchFamily="2" charset="0"/>
+              <a:cs typeface="Poppins" panose="00000500000000000000" pitchFamily="2" charset="0"/>
+            </a:endParaRPr>
+          </a:p>
+        </p:txBody>
       </p:sp>
       <p:sp>
         <p:nvSpPr>
@@ -15249,21 +15513,37 @@
         <p:spPr>
           <a:xfrm>
             <a:off x="457200" y="1097280"/>
-            <a:ext cx="5487772" cy="4023360"/>
+            <a:ext cx="5487772" cy="3923128"/>
           </a:xfrm>
           <a:prstGeom prst="rect">
             <a:avLst/>
           </a:prstGeom>
           <a:solidFill>
-            <a:srgbClr val="FFFFFF"/>
+            <a:schemeClr val="accent3">
+              <a:lumMod val="20000"/>
+              <a:lumOff val="80000"/>
+            </a:schemeClr>
           </a:solidFill>
           <a:ln w="9525">
             <a:solidFill>
-              <a:srgbClr val="CBD5E1"/>
+              <a:schemeClr val="accent3">
+                <a:lumMod val="20000"/>
+                <a:lumOff val="80000"/>
+              </a:schemeClr>
             </a:solidFill>
             <a:prstDash val="solid"/>
           </a:ln>
         </p:spPr>
+        <p:txBody>
+          <a:bodyPr/>
+          <a:lstStyle/>
+          <a:p>
+            <a:endParaRPr lang="es-CL" sz="2400">
+              <a:latin typeface="Poppins" panose="00000500000000000000" pitchFamily="2" charset="0"/>
+              <a:cs typeface="Poppins" panose="00000500000000000000" pitchFamily="2" charset="0"/>
+            </a:endParaRPr>
+          </a:p>
+        </p:txBody>
       </p:sp>
       <p:sp>
         <p:nvSpPr>
@@ -15273,22 +15553,38 @@
         </p:nvSpPr>
         <p:spPr>
           <a:xfrm>
-            <a:off x="6246724" y="1097280"/>
-            <a:ext cx="5487772" cy="4023360"/>
+            <a:off x="6201003" y="1176762"/>
+            <a:ext cx="5487772" cy="3923128"/>
           </a:xfrm>
           <a:prstGeom prst="rect">
             <a:avLst/>
           </a:prstGeom>
           <a:solidFill>
-            <a:srgbClr val="FFFFFF"/>
+            <a:schemeClr val="accent3">
+              <a:lumMod val="20000"/>
+              <a:lumOff val="80000"/>
+            </a:schemeClr>
           </a:solidFill>
           <a:ln w="9525">
             <a:solidFill>
-              <a:srgbClr val="CBD5E1"/>
+              <a:schemeClr val="accent3">
+                <a:lumMod val="20000"/>
+                <a:lumOff val="80000"/>
+              </a:schemeClr>
             </a:solidFill>
             <a:prstDash val="solid"/>
           </a:ln>
         </p:spPr>
+        <p:txBody>
+          <a:bodyPr/>
+          <a:lstStyle/>
+          <a:p>
+            <a:endParaRPr lang="es-CL" sz="2400">
+              <a:latin typeface="Poppins" panose="00000500000000000000" pitchFamily="2" charset="0"/>
+              <a:cs typeface="Poppins" panose="00000500000000000000" pitchFamily="2" charset="0"/>
+            </a:endParaRPr>
+          </a:p>
+        </p:txBody>
       </p:sp>
       <p:sp>
         <p:nvSpPr>
@@ -15311,21 +15607,24 @@
           <a:bodyPr wrap="square" lIns="0" tIns="0" rIns="0" bIns="0" rtlCol="0" anchor="ctr"/>
           <a:lstStyle/>
           <a:p>
-            <a:pPr indent="0" marL="0">
+            <a:pPr marL="0" indent="0">
               <a:buNone/>
             </a:pPr>
             <a:r>
-              <a:rPr lang="en-US" sz="1900" b="1" dirty="0">
+              <a:rPr lang="en-US" sz="2400" b="1" dirty="0">
                 <a:solidFill>
                   <a:srgbClr val="113B63"/>
                 </a:solidFill>
-                <a:latin typeface="Calibri" pitchFamily="34" charset="0"/>
-                <a:ea typeface="Calibri" pitchFamily="34" charset="-122"/>
-                <a:cs typeface="Calibri" pitchFamily="34" charset="-120"/>
+                <a:latin typeface="Poppins" panose="00000500000000000000" pitchFamily="2" charset="0"/>
+                <a:ea typeface="Calibri" pitchFamily="34" charset="-122"/>
+                <a:cs typeface="Poppins" panose="00000500000000000000" pitchFamily="2" charset="0"/>
               </a:rPr>
               <a:t>Paper 1 (today's results)</a:t>
             </a:r>
-            <a:endParaRPr lang="en-US" sz="1900" dirty="0"/>
+            <a:endParaRPr lang="en-US" sz="2400" dirty="0">
+              <a:latin typeface="Poppins" panose="00000500000000000000" pitchFamily="2" charset="0"/>
+              <a:cs typeface="Poppins" panose="00000500000000000000" pitchFamily="2" charset="0"/>
+            </a:endParaRPr>
           </a:p>
         </p:txBody>
       </p:sp>
@@ -15337,8 +15636,8 @@
         </p:nvSpPr>
         <p:spPr>
           <a:xfrm>
-            <a:off x="685800" y="1664208"/>
-            <a:ext cx="5030572" cy="320040"/>
+            <a:off x="685800" y="1965257"/>
+            <a:ext cx="5030572" cy="180066"/>
           </a:xfrm>
           <a:prstGeom prst="rect">
             <a:avLst/>
@@ -15350,21 +15649,24 @@
           <a:bodyPr wrap="square" lIns="0" tIns="0" rIns="0" bIns="0" rtlCol="0" anchor="ctr"/>
           <a:lstStyle/>
           <a:p>
-            <a:pPr indent="0" marL="0">
+            <a:pPr marL="0" indent="0">
               <a:buNone/>
             </a:pPr>
             <a:r>
-              <a:rPr lang="en-US" sz="1300" i="1" dirty="0">
+              <a:rPr lang="en-US" sz="2000" i="1" dirty="0">
                 <a:solidFill>
                   <a:srgbClr val="C4830A"/>
                 </a:solidFill>
-                <a:latin typeface="Calibri" pitchFamily="34" charset="0"/>
-                <a:ea typeface="Calibri" pitchFamily="34" charset="-122"/>
-                <a:cs typeface="Calibri" pitchFamily="34" charset="-120"/>
+                <a:latin typeface="Poppins" panose="00000500000000000000" pitchFamily="2" charset="0"/>
+                <a:ea typeface="Calibri" pitchFamily="34" charset="-122"/>
+                <a:cs typeface="Poppins" panose="00000500000000000000" pitchFamily="2" charset="0"/>
               </a:rPr>
               <a:t>Reduced-form effort + identified stock dynamics</a:t>
             </a:r>
-            <a:endParaRPr lang="en-US" sz="1300" dirty="0"/>
+            <a:endParaRPr lang="en-US" sz="2000" dirty="0">
+              <a:latin typeface="Poppins" panose="00000500000000000000" pitchFamily="2" charset="0"/>
+              <a:cs typeface="Poppins" panose="00000500000000000000" pitchFamily="2" charset="0"/>
+            </a:endParaRPr>
           </a:p>
         </p:txBody>
       </p:sp>
@@ -15376,8 +15678,8 @@
         </p:nvSpPr>
         <p:spPr>
           <a:xfrm>
-            <a:off x="685800" y="2103120"/>
-            <a:ext cx="5030572" cy="2834640"/>
+            <a:off x="685800" y="2514600"/>
+            <a:ext cx="5030572" cy="2423160"/>
           </a:xfrm>
           <a:prstGeom prst="rect">
             <a:avLst/>
@@ -15397,17 +15699,20 @@
               <a:buChar char="•"/>
             </a:pPr>
             <a:r>
-              <a:rPr lang="en-US" sz="1400" dirty="0">
+              <a:rPr lang="en-US" sz="2000" dirty="0">
                 <a:solidFill>
                   <a:srgbClr val="0A2540"/>
                 </a:solidFill>
-                <a:latin typeface="Calibri" pitchFamily="34" charset="0"/>
-                <a:ea typeface="Calibri" pitchFamily="34" charset="-122"/>
-                <a:cs typeface="Calibri" pitchFamily="34" charset="-120"/>
+                <a:latin typeface="Poppins" panose="00000500000000000000" pitchFamily="2" charset="0"/>
+                <a:ea typeface="Calibri" pitchFamily="34" charset="-122"/>
+                <a:cs typeface="Poppins" panose="00000500000000000000" pitchFamily="2" charset="0"/>
               </a:rPr>
               <a:t>Negative binomial trip equation, estimated separately by fleet.</a:t>
             </a:r>
-            <a:endParaRPr lang="en-US" sz="1400" dirty="0"/>
+            <a:endParaRPr lang="en-US" sz="2000" dirty="0">
+              <a:latin typeface="Poppins" panose="00000500000000000000" pitchFamily="2" charset="0"/>
+              <a:cs typeface="Poppins" panose="00000500000000000000" pitchFamily="2" charset="0"/>
+            </a:endParaRPr>
           </a:p>
           <a:p>
             <a:pPr marL="342900" indent="-342900">
@@ -15418,17 +15723,20 @@
               <a:buChar char="•"/>
             </a:pPr>
             <a:r>
-              <a:rPr lang="en-US" sz="1400" dirty="0">
+              <a:rPr lang="en-US" sz="2000" dirty="0">
                 <a:solidFill>
                   <a:srgbClr val="0A2540"/>
                 </a:solidFill>
-                <a:latin typeface="Calibri" pitchFamily="34" charset="0"/>
-                <a:ea typeface="Calibri" pitchFamily="34" charset="-122"/>
-                <a:cs typeface="Calibri" pitchFamily="34" charset="-120"/>
+                <a:latin typeface="Poppins" panose="00000500000000000000" pitchFamily="2" charset="0"/>
+                <a:ea typeface="Calibri" pitchFamily="34" charset="-122"/>
+                <a:cs typeface="Poppins" panose="00000500000000000000" pitchFamily="2" charset="0"/>
               </a:rPr>
               <a:t>Bayesian state-space stock dynamics with structural climate shifters (in appendix).</a:t>
             </a:r>
-            <a:endParaRPr lang="en-US" sz="1400" dirty="0"/>
+            <a:endParaRPr lang="en-US" sz="2000" dirty="0">
+              <a:latin typeface="Poppins" panose="00000500000000000000" pitchFamily="2" charset="0"/>
+              <a:cs typeface="Poppins" panose="00000500000000000000" pitchFamily="2" charset="0"/>
+            </a:endParaRPr>
           </a:p>
           <a:p>
             <a:pPr marL="342900" indent="-342900">
@@ -15436,17 +15744,20 @@
               <a:buChar char="•"/>
             </a:pPr>
             <a:r>
-              <a:rPr lang="en-US" sz="1400" dirty="0">
+              <a:rPr lang="en-US" sz="2000" dirty="0">
                 <a:solidFill>
                   <a:srgbClr val="0A2540"/>
                 </a:solidFill>
-                <a:latin typeface="Calibri" pitchFamily="34" charset="0"/>
-                <a:ea typeface="Calibri" pitchFamily="34" charset="-122"/>
-                <a:cs typeface="Calibri" pitchFamily="34" charset="-120"/>
+                <a:latin typeface="Poppins" panose="00000500000000000000" pitchFamily="2" charset="0"/>
+                <a:ea typeface="Calibri" pitchFamily="34" charset="-122"/>
+                <a:cs typeface="Poppins" panose="00000500000000000000" pitchFamily="2" charset="0"/>
               </a:rPr>
               <a:t>Comparative statics under future climate scenarios.</a:t>
             </a:r>
-            <a:endParaRPr lang="en-US" sz="1400" dirty="0"/>
+            <a:endParaRPr lang="en-US" sz="2000" dirty="0">
+              <a:latin typeface="Poppins" panose="00000500000000000000" pitchFamily="2" charset="0"/>
+              <a:cs typeface="Poppins" panose="00000500000000000000" pitchFamily="2" charset="0"/>
+            </a:endParaRPr>
           </a:p>
         </p:txBody>
       </p:sp>
@@ -15471,21 +15782,24 @@
           <a:bodyPr wrap="square" lIns="0" tIns="0" rIns="0" bIns="0" rtlCol="0" anchor="ctr"/>
           <a:lstStyle/>
           <a:p>
-            <a:pPr indent="0" marL="0">
+            <a:pPr marL="0" indent="0">
               <a:buNone/>
             </a:pPr>
             <a:r>
-              <a:rPr lang="en-US" sz="1900" b="1" dirty="0">
+              <a:rPr lang="en-US" sz="2400" b="1" dirty="0">
                 <a:solidFill>
                   <a:srgbClr val="113B63"/>
                 </a:solidFill>
-                <a:latin typeface="Calibri" pitchFamily="34" charset="0"/>
-                <a:ea typeface="Calibri" pitchFamily="34" charset="-122"/>
-                <a:cs typeface="Calibri" pitchFamily="34" charset="-120"/>
+                <a:latin typeface="Poppins" panose="00000500000000000000" pitchFamily="2" charset="0"/>
+                <a:ea typeface="Calibri" pitchFamily="34" charset="-122"/>
+                <a:cs typeface="Poppins" panose="00000500000000000000" pitchFamily="2" charset="0"/>
               </a:rPr>
               <a:t>Paper 2 (today's roadmap)</a:t>
             </a:r>
-            <a:endParaRPr lang="en-US" sz="1900" dirty="0"/>
+            <a:endParaRPr lang="en-US" sz="2400" dirty="0">
+              <a:latin typeface="Poppins" panose="00000500000000000000" pitchFamily="2" charset="0"/>
+              <a:cs typeface="Poppins" panose="00000500000000000000" pitchFamily="2" charset="0"/>
+            </a:endParaRPr>
           </a:p>
         </p:txBody>
       </p:sp>
@@ -15497,7 +15811,7 @@
         </p:nvSpPr>
         <p:spPr>
           <a:xfrm>
-            <a:off x="6475324" y="1664208"/>
+            <a:off x="6475324" y="1805237"/>
             <a:ext cx="5030572" cy="320040"/>
           </a:xfrm>
           <a:prstGeom prst="rect">
@@ -15510,21 +15824,24 @@
           <a:bodyPr wrap="square" lIns="0" tIns="0" rIns="0" bIns="0" rtlCol="0" anchor="ctr"/>
           <a:lstStyle/>
           <a:p>
-            <a:pPr indent="0" marL="0">
+            <a:pPr marL="0" indent="0">
               <a:buNone/>
             </a:pPr>
             <a:r>
-              <a:rPr lang="en-US" sz="1300" i="1" dirty="0">
+              <a:rPr lang="en-US" sz="2000" i="1" dirty="0">
                 <a:solidFill>
                   <a:srgbClr val="C4830A"/>
                 </a:solidFill>
-                <a:latin typeface="Calibri" pitchFamily="34" charset="0"/>
-                <a:ea typeface="Calibri" pitchFamily="34" charset="-122"/>
-                <a:cs typeface="Calibri" pitchFamily="34" charset="-120"/>
+                <a:latin typeface="Poppins" panose="00000500000000000000" pitchFamily="2" charset="0"/>
+                <a:ea typeface="Calibri" pitchFamily="34" charset="-122"/>
+                <a:cs typeface="Poppins" panose="00000500000000000000" pitchFamily="2" charset="0"/>
               </a:rPr>
               <a:t>Welfare counterfactuals</a:t>
             </a:r>
-            <a:endParaRPr lang="en-US" sz="1300" dirty="0"/>
+            <a:endParaRPr lang="en-US" sz="2000" dirty="0">
+              <a:latin typeface="Poppins" panose="00000500000000000000" pitchFamily="2" charset="0"/>
+              <a:cs typeface="Poppins" panose="00000500000000000000" pitchFamily="2" charset="0"/>
+            </a:endParaRPr>
           </a:p>
         </p:txBody>
       </p:sp>
@@ -15536,8 +15853,8 @@
         </p:nvSpPr>
         <p:spPr>
           <a:xfrm>
-            <a:off x="6475324" y="2103120"/>
-            <a:ext cx="5030572" cy="2834640"/>
+            <a:off x="6475324" y="2514600"/>
+            <a:ext cx="5130522" cy="2423160"/>
           </a:xfrm>
           <a:prstGeom prst="rect">
             <a:avLst/>
@@ -15557,17 +15874,20 @@
               <a:buChar char="•"/>
             </a:pPr>
             <a:r>
-              <a:rPr lang="en-US" sz="1400" dirty="0">
+              <a:rPr lang="en-US" sz="2000" dirty="0">
                 <a:solidFill>
                   <a:srgbClr val="0A2540"/>
                 </a:solidFill>
-                <a:latin typeface="Calibri" pitchFamily="34" charset="0"/>
-                <a:ea typeface="Calibri" pitchFamily="34" charset="-122"/>
-                <a:cs typeface="Calibri" pitchFamily="34" charset="-120"/>
+                <a:latin typeface="Poppins" panose="00000500000000000000" pitchFamily="2" charset="0"/>
+                <a:ea typeface="Calibri" pitchFamily="34" charset="-122"/>
+                <a:cs typeface="Poppins" panose="00000500000000000000" pitchFamily="2" charset="0"/>
               </a:rPr>
               <a:t>Translog cost function (trip-level, by fleet).</a:t>
             </a:r>
-            <a:endParaRPr lang="en-US" sz="1400" dirty="0"/>
+            <a:endParaRPr lang="en-US" sz="2000" dirty="0">
+              <a:latin typeface="Poppins" panose="00000500000000000000" pitchFamily="2" charset="0"/>
+              <a:cs typeface="Poppins" panose="00000500000000000000" pitchFamily="2" charset="0"/>
+            </a:endParaRPr>
           </a:p>
           <a:p>
             <a:pPr marL="342900" indent="-342900">
@@ -15578,17 +15898,20 @@
               <a:buChar char="•"/>
             </a:pPr>
             <a:r>
-              <a:rPr lang="en-US" sz="1400" dirty="0">
+              <a:rPr lang="en-US" sz="2000" dirty="0">
                 <a:solidFill>
                   <a:srgbClr val="0A2540"/>
                 </a:solidFill>
-                <a:latin typeface="Calibri" pitchFamily="34" charset="0"/>
-                <a:ea typeface="Calibri" pitchFamily="34" charset="-122"/>
-                <a:cs typeface="Calibri" pitchFamily="34" charset="-120"/>
+                <a:latin typeface="Poppins" panose="00000500000000000000" pitchFamily="2" charset="0"/>
+                <a:ea typeface="Calibri" pitchFamily="34" charset="-122"/>
+                <a:cs typeface="Poppins" panose="00000500000000000000" pitchFamily="2" charset="0"/>
               </a:rPr>
               <a:t>Inverse demand (IAIDS, 3SLS).</a:t>
             </a:r>
-            <a:endParaRPr lang="en-US" sz="1400" dirty="0"/>
+            <a:endParaRPr lang="en-US" sz="2000" dirty="0">
+              <a:latin typeface="Poppins" panose="00000500000000000000" pitchFamily="2" charset="0"/>
+              <a:cs typeface="Poppins" panose="00000500000000000000" pitchFamily="2" charset="0"/>
+            </a:endParaRPr>
           </a:p>
           <a:p>
             <a:pPr marL="342900" indent="-342900">
@@ -15599,17 +15922,20 @@
               <a:buChar char="•"/>
             </a:pPr>
             <a:r>
-              <a:rPr lang="en-US" sz="1400" dirty="0">
+              <a:rPr lang="en-US" sz="2000" dirty="0">
                 <a:solidFill>
                   <a:srgbClr val="0A2540"/>
                 </a:solidFill>
-                <a:latin typeface="Calibri" pitchFamily="34" charset="0"/>
-                <a:ea typeface="Calibri" pitchFamily="34" charset="-122"/>
-                <a:cs typeface="Calibri" pitchFamily="34" charset="-120"/>
+                <a:latin typeface="Poppins" panose="00000500000000000000" pitchFamily="2" charset="0"/>
+                <a:ea typeface="Calibri" pitchFamily="34" charset="-122"/>
+                <a:cs typeface="Poppins" panose="00000500000000000000" pitchFamily="2" charset="0"/>
               </a:rPr>
               <a:t>Dynamic vessel optimization ⇒ optimal T_g, h_gτ under different climate scenarios.</a:t>
             </a:r>
-            <a:endParaRPr lang="en-US" sz="1400" dirty="0"/>
+            <a:endParaRPr lang="en-US" sz="2000" dirty="0">
+              <a:latin typeface="Poppins" panose="00000500000000000000" pitchFamily="2" charset="0"/>
+              <a:cs typeface="Poppins" panose="00000500000000000000" pitchFamily="2" charset="0"/>
+            </a:endParaRPr>
           </a:p>
           <a:p>
             <a:pPr marL="342900" indent="-342900">
@@ -15617,17 +15943,20 @@
               <a:buChar char="•"/>
             </a:pPr>
             <a:r>
-              <a:rPr lang="en-US" sz="1400" dirty="0">
+              <a:rPr lang="en-US" sz="2000" dirty="0">
                 <a:solidFill>
                   <a:srgbClr val="0A2540"/>
                 </a:solidFill>
-                <a:latin typeface="Calibri" pitchFamily="34" charset="0"/>
-                <a:ea typeface="Calibri" pitchFamily="34" charset="-122"/>
-                <a:cs typeface="Calibri" pitchFamily="34" charset="-120"/>
+                <a:latin typeface="Poppins" panose="00000500000000000000" pitchFamily="2" charset="0"/>
+                <a:ea typeface="Calibri" pitchFamily="34" charset="-122"/>
+                <a:cs typeface="Poppins" panose="00000500000000000000" pitchFamily="2" charset="0"/>
               </a:rPr>
               <a:t>Welfare, prices, species substitution.</a:t>
             </a:r>
-            <a:endParaRPr lang="en-US" sz="1400" dirty="0"/>
+            <a:endParaRPr lang="en-US" sz="2000" dirty="0">
+              <a:latin typeface="Poppins" panose="00000500000000000000" pitchFamily="2" charset="0"/>
+              <a:cs typeface="Poppins" panose="00000500000000000000" pitchFamily="2" charset="0"/>
+            </a:endParaRPr>
           </a:p>
         </p:txBody>
       </p:sp>
@@ -15639,8 +15968,8 @@
         </p:nvSpPr>
         <p:spPr>
           <a:xfrm>
-            <a:off x="457200" y="5760720"/>
-            <a:ext cx="11277295" cy="502920"/>
+            <a:off x="457200" y="5389685"/>
+            <a:ext cx="11277295" cy="873955"/>
           </a:xfrm>
           <a:prstGeom prst="rect">
             <a:avLst/>
@@ -15655,6 +15984,16 @@
             <a:prstDash val="solid"/>
           </a:ln>
         </p:spPr>
+        <p:txBody>
+          <a:bodyPr/>
+          <a:lstStyle/>
+          <a:p>
+            <a:endParaRPr lang="es-CL">
+              <a:latin typeface="Poppins" panose="00000500000000000000" pitchFamily="2" charset="0"/>
+              <a:cs typeface="Poppins" panose="00000500000000000000" pitchFamily="2" charset="0"/>
+            </a:endParaRPr>
+          </a:p>
+        </p:txBody>
       </p:sp>
       <p:sp>
         <p:nvSpPr>
@@ -15664,8 +16003,8 @@
         </p:nvSpPr>
         <p:spPr>
           <a:xfrm>
-            <a:off x="457200" y="5760720"/>
-            <a:ext cx="54864" cy="502920"/>
+            <a:off x="457200" y="5389685"/>
+            <a:ext cx="54864" cy="873955"/>
           </a:xfrm>
           <a:prstGeom prst="rect">
             <a:avLst/>
@@ -15680,6 +16019,16 @@
             <a:prstDash val="solid"/>
           </a:ln>
         </p:spPr>
+        <p:txBody>
+          <a:bodyPr/>
+          <a:lstStyle/>
+          <a:p>
+            <a:endParaRPr lang="es-CL">
+              <a:latin typeface="Poppins" panose="00000500000000000000" pitchFamily="2" charset="0"/>
+              <a:cs typeface="Poppins" panose="00000500000000000000" pitchFamily="2" charset="0"/>
+            </a:endParaRPr>
+          </a:p>
+        </p:txBody>
       </p:sp>
       <p:sp>
         <p:nvSpPr>
@@ -15689,8 +16038,8 @@
         </p:nvSpPr>
         <p:spPr>
           <a:xfrm>
-            <a:off x="594360" y="5760720"/>
-            <a:ext cx="11094415" cy="502920"/>
+            <a:off x="594360" y="5389685"/>
+            <a:ext cx="11094415" cy="885913"/>
           </a:xfrm>
           <a:prstGeom prst="rect">
             <a:avLst/>
@@ -15702,21 +16051,46 @@
           <a:bodyPr wrap="square" lIns="0" tIns="0" rIns="0" bIns="0" rtlCol="0" anchor="ctr"/>
           <a:lstStyle/>
           <a:p>
-            <a:pPr indent="0" marL="0">
+            <a:pPr marL="0" indent="0">
               <a:buNone/>
             </a:pPr>
             <a:r>
-              <a:rPr lang="en-US" sz="1300" dirty="0">
+              <a:rPr lang="en-US" i="1" dirty="0">
                 <a:solidFill>
                   <a:srgbClr val="0A2540"/>
                 </a:solidFill>
-                <a:latin typeface="Calibri" pitchFamily="34" charset="0"/>
-                <a:ea typeface="Calibri" pitchFamily="34" charset="-122"/>
-                <a:cs typeface="Calibri" pitchFamily="34" charset="-120"/>
-              </a:rPr>
-              <a:t>The two papers share the same identified stock dynamics. Paper 1 stops at participation; Paper 2 closes the loop through prices, cost and profits to estimate optimal harvest and quota allocation.</a:t>
-            </a:r>
-            <a:endParaRPr lang="en-US" sz="1300" dirty="0"/>
+                <a:latin typeface="Poppins" panose="00000500000000000000" pitchFamily="2" charset="0"/>
+                <a:ea typeface="Calibri" pitchFamily="34" charset="-122"/>
+                <a:cs typeface="Poppins" panose="00000500000000000000" pitchFamily="2" charset="0"/>
+              </a:rPr>
+              <a:t>The two papers share </a:t>
+            </a:r>
+            <a:r>
+              <a:rPr lang="en-US" b="1" i="1" dirty="0">
+                <a:solidFill>
+                  <a:srgbClr val="0A2540"/>
+                </a:solidFill>
+                <a:latin typeface="Poppins" panose="00000500000000000000" pitchFamily="2" charset="0"/>
+                <a:ea typeface="Calibri" pitchFamily="34" charset="-122"/>
+                <a:cs typeface="Poppins" panose="00000500000000000000" pitchFamily="2" charset="0"/>
+              </a:rPr>
+              <a:t>the same identified stock dynamics</a:t>
+            </a:r>
+            <a:r>
+              <a:rPr lang="en-US" i="1" dirty="0">
+                <a:solidFill>
+                  <a:srgbClr val="0A2540"/>
+                </a:solidFill>
+                <a:latin typeface="Poppins" panose="00000500000000000000" pitchFamily="2" charset="0"/>
+                <a:ea typeface="Calibri" pitchFamily="34" charset="-122"/>
+                <a:cs typeface="Poppins" panose="00000500000000000000" pitchFamily="2" charset="0"/>
+              </a:rPr>
+              <a:t>. Paper 1 stops at participation; Paper 2 closes the loop through prices, cost and profits to estimate optimal harvest and quota allocation.</a:t>
+            </a:r>
+            <a:endParaRPr lang="en-US" i="1" dirty="0">
+              <a:latin typeface="Poppins" panose="00000500000000000000" pitchFamily="2" charset="0"/>
+              <a:cs typeface="Poppins" panose="00000500000000000000" pitchFamily="2" charset="0"/>
+            </a:endParaRPr>
           </a:p>
         </p:txBody>
       </p:sp>
@@ -15741,7 +16115,7 @@
           <a:bodyPr wrap="square" lIns="0" tIns="0" rIns="0" bIns="0" rtlCol="0" anchor="ctr"/>
           <a:lstStyle/>
           <a:p>
-            <a:pPr algn="l" indent="0" marL="0">
+            <a:pPr marL="0" indent="0" algn="l">
               <a:buNone/>
             </a:pPr>
             <a:r>
@@ -15749,13 +16123,16 @@
                 <a:solidFill>
                   <a:srgbClr val="475569"/>
                 </a:solidFill>
-                <a:latin typeface="Calibri" pitchFamily="34" charset="0"/>
-                <a:ea typeface="Calibri" pitchFamily="34" charset="-122"/>
-                <a:cs typeface="Calibri" pitchFamily="34" charset="-120"/>
+                <a:latin typeface="Poppins" panose="00000500000000000000" pitchFamily="2" charset="0"/>
+                <a:ea typeface="Calibri" pitchFamily="34" charset="-122"/>
+                <a:cs typeface="Poppins" panose="00000500000000000000" pitchFamily="2" charset="0"/>
               </a:rPr>
               <a:t>ICES/PICES SPF · La Paz · May 2026</a:t>
             </a:r>
-            <a:endParaRPr lang="en-US" sz="1000" dirty="0"/>
+            <a:endParaRPr lang="en-US" sz="1000" dirty="0">
+              <a:latin typeface="Poppins" panose="00000500000000000000" pitchFamily="2" charset="0"/>
+              <a:cs typeface="Poppins" panose="00000500000000000000" pitchFamily="2" charset="0"/>
+            </a:endParaRPr>
           </a:p>
         </p:txBody>
       </p:sp>
@@ -15780,7 +16157,7 @@
           <a:bodyPr wrap="square" lIns="0" tIns="0" rIns="0" bIns="0" rtlCol="0" anchor="ctr"/>
           <a:lstStyle/>
           <a:p>
-            <a:pPr algn="r" indent="0" marL="0">
+            <a:pPr marL="0" indent="0" algn="r">
               <a:buNone/>
             </a:pPr>
             <a:r>
@@ -15788,13 +16165,16 @@
                 <a:solidFill>
                   <a:srgbClr val="475569"/>
                 </a:solidFill>
-                <a:latin typeface="Calibri" pitchFamily="34" charset="0"/>
-                <a:ea typeface="Calibri" pitchFamily="34" charset="-122"/>
-                <a:cs typeface="Calibri" pitchFamily="34" charset="-120"/>
+                <a:latin typeface="Poppins" panose="00000500000000000000" pitchFamily="2" charset="0"/>
+                <a:ea typeface="Calibri" pitchFamily="34" charset="-122"/>
+                <a:cs typeface="Poppins" panose="00000500000000000000" pitchFamily="2" charset="0"/>
               </a:rPr>
               <a:t>3</a:t>
             </a:r>
-            <a:endParaRPr lang="en-US" sz="1000" dirty="0"/>
+            <a:endParaRPr lang="en-US" sz="1000" dirty="0">
+              <a:latin typeface="Poppins" panose="00000500000000000000" pitchFamily="2" charset="0"/>
+              <a:cs typeface="Poppins" panose="00000500000000000000" pitchFamily="2" charset="0"/>
+            </a:endParaRPr>
           </a:p>
         </p:txBody>
       </p:sp>
@@ -15814,6 +16194,7 @@
         <a:solidFill>
           <a:srgbClr val="113B63"/>
         </a:solidFill>
+        <a:effectLst/>
       </p:bgPr>
     </p:bg>
     <p:spTree>
@@ -15852,6 +16233,13 @@
             <a:prstDash val="solid"/>
           </a:ln>
         </p:spPr>
+        <p:txBody>
+          <a:bodyPr/>
+          <a:lstStyle/>
+          <a:p>
+            <a:endParaRPr lang="es-CL"/>
+          </a:p>
+        </p:txBody>
       </p:sp>
       <p:sp>
         <p:nvSpPr>
@@ -15874,7 +16262,7 @@
           <a:bodyPr wrap="square" lIns="0" tIns="0" rIns="0" bIns="0" rtlCol="0" anchor="ctr"/>
           <a:lstStyle/>
           <a:p>
-            <a:pPr algn="ctr" indent="0" marL="0">
+            <a:pPr marL="0" indent="0" algn="ctr">
               <a:buNone/>
             </a:pPr>
             <a:r>
@@ -15882,13 +16270,16 @@
                 <a:solidFill>
                   <a:srgbClr val="FFFFFF"/>
                 </a:solidFill>
-                <a:latin typeface="Calibri" pitchFamily="34" charset="0"/>
-                <a:ea typeface="Calibri" pitchFamily="34" charset="-122"/>
-                <a:cs typeface="Calibri" pitchFamily="34" charset="-120"/>
+                <a:latin typeface="Poppins" panose="00000500000000000000" pitchFamily="2" charset="0"/>
+                <a:ea typeface="Calibri" pitchFamily="34" charset="-122"/>
+                <a:cs typeface="Poppins" panose="00000500000000000000" pitchFamily="2" charset="0"/>
               </a:rPr>
               <a:t>Setting and observed heterogeneity</a:t>
             </a:r>
-            <a:endParaRPr lang="en-US" sz="4000" dirty="0"/>
+            <a:endParaRPr lang="en-US" sz="4000" dirty="0">
+              <a:latin typeface="Poppins" panose="00000500000000000000" pitchFamily="2" charset="0"/>
+              <a:cs typeface="Poppins" panose="00000500000000000000" pitchFamily="2" charset="0"/>
+            </a:endParaRPr>
           </a:p>
         </p:txBody>
       </p:sp>
@@ -15938,7 +16329,7 @@
           <a:bodyPr wrap="square" lIns="0" tIns="0" rIns="0" bIns="0" rtlCol="0" anchor="ctr"/>
           <a:lstStyle/>
           <a:p>
-            <a:pPr algn="l" indent="0" marL="0">
+            <a:pPr marL="0" indent="0" algn="l">
               <a:buNone/>
             </a:pPr>
             <a:r>
@@ -15978,6 +16369,13 @@
             <a:prstDash val="solid"/>
           </a:ln>
         </p:spPr>
+        <p:txBody>
+          <a:bodyPr/>
+          <a:lstStyle/>
+          <a:p>
+            <a:endParaRPr lang="es-CL"/>
+          </a:p>
+        </p:txBody>
       </p:sp>
       <p:sp>
         <p:nvSpPr>
@@ -16000,7 +16398,7 @@
           <a:bodyPr wrap="square" lIns="0" tIns="0" rIns="0" bIns="0" rtlCol="0" anchor="ctr"/>
           <a:lstStyle/>
           <a:p>
-            <a:pPr indent="0" marL="0">
+            <a:pPr marL="0" indent="0">
               <a:buNone/>
             </a:pPr>
             <a:r>
@@ -16121,7 +16519,7 @@
           <a:bodyPr wrap="square" lIns="0" tIns="0" rIns="0" bIns="0" rtlCol="0" anchor="ctr"/>
           <a:lstStyle/>
           <a:p>
-            <a:pPr indent="0" marL="0">
+            <a:pPr marL="0" indent="0">
               <a:buNone/>
             </a:pPr>
             <a:r>
@@ -16221,7 +16619,7 @@
           <a:bodyPr wrap="square" lIns="0" tIns="0" rIns="0" bIns="0" rtlCol="0" anchor="ctr"/>
           <a:lstStyle/>
           <a:p>
-            <a:pPr indent="0" marL="0">
+            <a:pPr marL="0" indent="0">
               <a:buNone/>
             </a:pPr>
             <a:r>
@@ -16321,7 +16719,7 @@
           <a:bodyPr wrap="square" lIns="0" tIns="0" rIns="0" bIns="0" rtlCol="0" anchor="ctr"/>
           <a:lstStyle/>
           <a:p>
-            <a:pPr indent="0" marL="0">
+            <a:pPr marL="0" indent="0">
               <a:buNone/>
             </a:pPr>
             <a:r>
@@ -16421,7 +16819,7 @@
           <a:bodyPr wrap="square" lIns="0" tIns="0" rIns="0" bIns="0" rtlCol="0" anchor="ctr"/>
           <a:lstStyle/>
           <a:p>
-            <a:pPr algn="l" indent="0" marL="0">
+            <a:pPr marL="0" indent="0" algn="l">
               <a:buNone/>
             </a:pPr>
             <a:r>
@@ -16460,7 +16858,7 @@
           <a:bodyPr wrap="square" lIns="0" tIns="0" rIns="0" bIns="0" rtlCol="0" anchor="ctr"/>
           <a:lstStyle/>
           <a:p>
-            <a:pPr algn="l" indent="0" marL="0">
+            <a:pPr marL="0" indent="0" algn="l">
               <a:buNone/>
             </a:pPr>
             <a:r>
@@ -16499,7 +16897,7 @@
           <a:bodyPr wrap="square" lIns="0" tIns="0" rIns="0" bIns="0" rtlCol="0" anchor="ctr"/>
           <a:lstStyle/>
           <a:p>
-            <a:pPr algn="r" indent="0" marL="0">
+            <a:pPr marL="0" indent="0" algn="r">
               <a:buNone/>
             </a:pPr>
             <a:r>
@@ -16550,7 +16948,7 @@
         </p:nvSpPr>
         <p:spPr>
           <a:xfrm>
-            <a:off x="457200" y="292608"/>
+            <a:off x="484632" y="150876"/>
             <a:ext cx="11277295" cy="594360"/>
           </a:xfrm>
           <a:prstGeom prst="rect">
@@ -16563,7 +16961,7 @@
           <a:bodyPr wrap="square" lIns="0" tIns="0" rIns="0" bIns="0" rtlCol="0" anchor="ctr"/>
           <a:lstStyle/>
           <a:p>
-            <a:pPr algn="l" indent="0" marL="0">
+            <a:pPr marL="0" indent="0" algn="l">
               <a:buNone/>
             </a:pPr>
             <a:r>
@@ -16571,13 +16969,16 @@
                 <a:solidFill>
                   <a:srgbClr val="113B63"/>
                 </a:solidFill>
-                <a:latin typeface="Calibri" pitchFamily="34" charset="0"/>
-                <a:ea typeface="Calibri" pitchFamily="34" charset="-122"/>
-                <a:cs typeface="Calibri" pitchFamily="34" charset="-120"/>
+                <a:latin typeface="Poppins" panose="00000500000000000000" pitchFamily="2" charset="0"/>
+                <a:ea typeface="Calibri" pitchFamily="34" charset="-122"/>
+                <a:cs typeface="Poppins" panose="00000500000000000000" pitchFamily="2" charset="0"/>
               </a:rPr>
               <a:t>Observed strategy switching — ART vs IND</a:t>
             </a:r>
-            <a:endParaRPr lang="en-US" sz="2800" dirty="0"/>
+            <a:endParaRPr lang="en-US" sz="2800" dirty="0">
+              <a:latin typeface="Poppins" panose="00000500000000000000" pitchFamily="2" charset="0"/>
+              <a:cs typeface="Poppins" panose="00000500000000000000" pitchFamily="2" charset="0"/>
+            </a:endParaRPr>
           </a:p>
         </p:txBody>
       </p:sp>
@@ -16603,6 +17004,16 @@
             <a:prstDash val="solid"/>
           </a:ln>
         </p:spPr>
+        <p:txBody>
+          <a:bodyPr/>
+          <a:lstStyle/>
+          <a:p>
+            <a:endParaRPr lang="es-CL" sz="2400">
+              <a:latin typeface="Poppins" panose="00000500000000000000" pitchFamily="2" charset="0"/>
+              <a:cs typeface="Poppins" panose="00000500000000000000" pitchFamily="2" charset="0"/>
+            </a:endParaRPr>
+          </a:p>
+        </p:txBody>
       </p:sp>
       <p:sp>
         <p:nvSpPr>
@@ -16625,35 +17036,38 @@
           <a:bodyPr wrap="square" lIns="0" tIns="0" rIns="0" bIns="0" rtlCol="0" anchor="ctr"/>
           <a:lstStyle/>
           <a:p>
-            <a:pPr algn="ctr" indent="0" marL="0">
+            <a:pPr marL="0" indent="0" algn="ctr">
               <a:buNone/>
             </a:pPr>
             <a:r>
-              <a:rPr lang="en-US" sz="1600" b="1" dirty="0">
+              <a:rPr lang="en-US" sz="2400" b="1" dirty="0">
                 <a:solidFill>
                   <a:srgbClr val="113B63"/>
                 </a:solidFill>
-                <a:latin typeface="Calibri" pitchFamily="34" charset="0"/>
-                <a:ea typeface="Calibri" pitchFamily="34" charset="-122"/>
-                <a:cs typeface="Calibri" pitchFamily="34" charset="-120"/>
+                <a:latin typeface="Poppins" panose="00000500000000000000" pitchFamily="2" charset="0"/>
+                <a:ea typeface="Calibri" pitchFamily="34" charset="-122"/>
+                <a:cs typeface="Poppins" panose="00000500000000000000" pitchFamily="2" charset="0"/>
               </a:rPr>
               <a:t>Artisanal</a:t>
             </a:r>
-            <a:endParaRPr lang="en-US" sz="1600" dirty="0"/>
+            <a:endParaRPr lang="en-US" sz="2400" dirty="0">
+              <a:latin typeface="Poppins" panose="00000500000000000000" pitchFamily="2" charset="0"/>
+              <a:cs typeface="Poppins" panose="00000500000000000000" pitchFamily="2" charset="0"/>
+            </a:endParaRPr>
           </a:p>
         </p:txBody>
       </p:sp>
       <p:pic>
         <p:nvPicPr>
-          <p:cNvPr id="5" name="Image 0" descr="/sessions/tender-gallant-volta/mnt/outputs/pices_build/assets/strategy_transitions_ART.png">    </p:cNvPr>
+          <p:cNvPr id="5" name="Image 0" descr="/sessions/tender-gallant-volta/mnt/outputs/pices_build/assets/strategy_transitions_ART.png"/>
           <p:cNvPicPr>
             <a:picLocks noChangeAspect="1"/>
           </p:cNvPicPr>
           <p:nvPr/>
         </p:nvPicPr>
         <p:blipFill>
-          <a:blip r:embed="rId1"/>
-          <a:srcRect l="0" r="0" t="0" b="0"/>
+          <a:blip r:embed="rId3"/>
+          <a:srcRect/>
           <a:stretch/>
         </p:blipFill>
         <p:spPr>
@@ -16687,35 +17101,38 @@
           <a:bodyPr wrap="square" lIns="0" tIns="0" rIns="0" bIns="0" rtlCol="0" anchor="ctr"/>
           <a:lstStyle/>
           <a:p>
-            <a:pPr algn="ctr" indent="0" marL="0">
+            <a:pPr marL="0" indent="0" algn="ctr">
               <a:buNone/>
             </a:pPr>
             <a:r>
-              <a:rPr lang="en-US" sz="1600" b="1" dirty="0">
+              <a:rPr lang="en-US" sz="2400" b="1" dirty="0">
                 <a:solidFill>
                   <a:srgbClr val="113B63"/>
                 </a:solidFill>
-                <a:latin typeface="Calibri" pitchFamily="34" charset="0"/>
-                <a:ea typeface="Calibri" pitchFamily="34" charset="-122"/>
-                <a:cs typeface="Calibri" pitchFamily="34" charset="-120"/>
+                <a:latin typeface="Poppins" panose="00000500000000000000" pitchFamily="2" charset="0"/>
+                <a:ea typeface="Calibri" pitchFamily="34" charset="-122"/>
+                <a:cs typeface="Poppins" panose="00000500000000000000" pitchFamily="2" charset="0"/>
               </a:rPr>
               <a:t>Industrial</a:t>
             </a:r>
-            <a:endParaRPr lang="en-US" sz="1600" dirty="0"/>
+            <a:endParaRPr lang="en-US" sz="2400" dirty="0">
+              <a:latin typeface="Poppins" panose="00000500000000000000" pitchFamily="2" charset="0"/>
+              <a:cs typeface="Poppins" panose="00000500000000000000" pitchFamily="2" charset="0"/>
+            </a:endParaRPr>
           </a:p>
         </p:txBody>
       </p:sp>
       <p:pic>
         <p:nvPicPr>
-          <p:cNvPr id="7" name="Image 1" descr="/sessions/tender-gallant-volta/mnt/outputs/pices_build/assets/strategy_transitions_IND.png">    </p:cNvPr>
+          <p:cNvPr id="7" name="Image 1" descr="/sessions/tender-gallant-volta/mnt/outputs/pices_build/assets/strategy_transitions_IND.png"/>
           <p:cNvPicPr>
             <a:picLocks noChangeAspect="1"/>
           </p:cNvPicPr>
           <p:nvPr/>
         </p:nvPicPr>
         <p:blipFill>
-          <a:blip r:embed="rId2"/>
-          <a:srcRect l="0" r="0" t="0" b="0"/>
+          <a:blip r:embed="rId4"/>
+          <a:srcRect/>
           <a:stretch/>
         </p:blipFill>
         <p:spPr>
@@ -16749,7 +17166,7 @@
           <a:bodyPr wrap="square" lIns="0" tIns="0" rIns="0" bIns="0" rtlCol="0" anchor="t"/>
           <a:lstStyle/>
           <a:p>
-            <a:pPr indent="0" marL="0">
+            <a:pPr marL="0" indent="0">
               <a:buNone/>
             </a:pPr>
             <a:r>
@@ -16775,8 +17192,8 @@
         </p:nvSpPr>
         <p:spPr>
           <a:xfrm>
-            <a:off x="457200" y="5852160"/>
-            <a:ext cx="11277295" cy="502920"/>
+            <a:off x="457200" y="5669280"/>
+            <a:ext cx="11277295" cy="685800"/>
           </a:xfrm>
           <a:prstGeom prst="rect">
             <a:avLst/>
@@ -16791,6 +17208,13 @@
             <a:prstDash val="solid"/>
           </a:ln>
         </p:spPr>
+        <p:txBody>
+          <a:bodyPr/>
+          <a:lstStyle/>
+          <a:p>
+            <a:endParaRPr lang="es-CL"/>
+          </a:p>
+        </p:txBody>
       </p:sp>
       <p:sp>
         <p:nvSpPr>
@@ -16800,8 +17224,8 @@
         </p:nvSpPr>
         <p:spPr>
           <a:xfrm>
-            <a:off x="457200" y="5852160"/>
-            <a:ext cx="54864" cy="502920"/>
+            <a:off x="457200" y="5669280"/>
+            <a:ext cx="54864" cy="685800"/>
           </a:xfrm>
           <a:prstGeom prst="rect">
             <a:avLst/>
@@ -16816,6 +17240,13 @@
             <a:prstDash val="solid"/>
           </a:ln>
         </p:spPr>
+        <p:txBody>
+          <a:bodyPr/>
+          <a:lstStyle/>
+          <a:p>
+            <a:endParaRPr lang="es-CL"/>
+          </a:p>
+        </p:txBody>
       </p:sp>
       <p:sp>
         <p:nvSpPr>
@@ -16825,8 +17256,8 @@
         </p:nvSpPr>
         <p:spPr>
           <a:xfrm>
-            <a:off x="594360" y="5852160"/>
-            <a:ext cx="11094415" cy="502920"/>
+            <a:off x="594360" y="5742432"/>
+            <a:ext cx="11094415" cy="612648"/>
           </a:xfrm>
           <a:prstGeom prst="rect">
             <a:avLst/>
@@ -16838,21 +17269,25 @@
           <a:bodyPr wrap="square" lIns="0" tIns="0" rIns="0" bIns="0" rtlCol="0" anchor="ctr"/>
           <a:lstStyle/>
           <a:p>
-            <a:pPr indent="0" marL="0">
+            <a:pPr marL="0" indent="0">
               <a:buNone/>
             </a:pPr>
             <a:r>
-              <a:rPr lang="en-US" sz="1300" dirty="0">
+              <a:rPr lang="en-US" i="1" dirty="0">
                 <a:solidFill>
                   <a:srgbClr val="0A2540"/>
                 </a:solidFill>
-                <a:latin typeface="Calibri" pitchFamily="34" charset="0"/>
-                <a:ea typeface="Calibri" pitchFamily="34" charset="-122"/>
-                <a:cs typeface="Calibri" pitchFamily="34" charset="-120"/>
+                <a:latin typeface="Poppins" panose="00000500000000000000" pitchFamily="2" charset="0"/>
+                <a:ea typeface="Roboto" panose="02000000000000000000" pitchFamily="2" charset="0"/>
+                <a:cs typeface="Poppins" panose="00000500000000000000" pitchFamily="2" charset="0"/>
               </a:rPr>
               <a:t>ART: anchoveta↔sardine dominates; jack mackerel essentially absent. IND: rotation across all three. Same fishery, very different revealed choice sets.</a:t>
             </a:r>
-            <a:endParaRPr lang="en-US" sz="1300" dirty="0"/>
+            <a:endParaRPr lang="en-US" i="1" dirty="0">
+              <a:latin typeface="Poppins" panose="00000500000000000000" pitchFamily="2" charset="0"/>
+              <a:ea typeface="Roboto" panose="02000000000000000000" pitchFamily="2" charset="0"/>
+              <a:cs typeface="Poppins" panose="00000500000000000000" pitchFamily="2" charset="0"/>
+            </a:endParaRPr>
           </a:p>
         </p:txBody>
       </p:sp>
@@ -16877,7 +17312,7 @@
           <a:bodyPr wrap="square" lIns="0" tIns="0" rIns="0" bIns="0" rtlCol="0" anchor="ctr"/>
           <a:lstStyle/>
           <a:p>
-            <a:pPr algn="l" indent="0" marL="0">
+            <a:pPr marL="0" indent="0" algn="l">
               <a:buNone/>
             </a:pPr>
             <a:r>
@@ -16916,7 +17351,7 @@
           <a:bodyPr wrap="square" lIns="0" tIns="0" rIns="0" bIns="0" rtlCol="0" anchor="ctr"/>
           <a:lstStyle/>
           <a:p>
-            <a:pPr algn="r" indent="0" marL="0">
+            <a:pPr marL="0" indent="0" algn="r">
               <a:buNone/>
             </a:pPr>
             <a:r>
@@ -16950,6 +17385,7 @@
         <a:solidFill>
           <a:srgbClr val="113B63"/>
         </a:solidFill>
+        <a:effectLst/>
       </p:bgPr>
     </p:bg>
     <p:spTree>
@@ -16988,6 +17424,13 @@
             <a:prstDash val="solid"/>
           </a:ln>
         </p:spPr>
+        <p:txBody>
+          <a:bodyPr/>
+          <a:lstStyle/>
+          <a:p>
+            <a:endParaRPr lang="es-CL"/>
+          </a:p>
+        </p:txBody>
       </p:sp>
       <p:sp>
         <p:nvSpPr>
@@ -17010,7 +17453,7 @@
           <a:bodyPr wrap="square" lIns="0" tIns="0" rIns="0" bIns="0" rtlCol="0" anchor="ctr"/>
           <a:lstStyle/>
           <a:p>
-            <a:pPr algn="ctr" indent="0" marL="0">
+            <a:pPr marL="0" indent="0" algn="ctr">
               <a:buNone/>
             </a:pPr>
             <a:r>
@@ -17074,7 +17517,7 @@
           <a:bodyPr wrap="square" lIns="0" tIns="0" rIns="0" bIns="0" rtlCol="0" anchor="ctr"/>
           <a:lstStyle/>
           <a:p>
-            <a:pPr algn="l" indent="0" marL="0">
+            <a:pPr marL="0" indent="0" algn="l">
               <a:buNone/>
             </a:pPr>
             <a:r>
@@ -17114,6 +17557,13 @@
             <a:prstDash val="solid"/>
           </a:ln>
         </p:spPr>
+        <p:txBody>
+          <a:bodyPr/>
+          <a:lstStyle/>
+          <a:p>
+            <a:endParaRPr lang="es-CL"/>
+          </a:p>
+        </p:txBody>
       </p:sp>
       <p:sp>
         <p:nvSpPr>
@@ -17136,7 +17586,7 @@
           <a:bodyPr wrap="square" lIns="0" tIns="0" rIns="0" bIns="0" rtlCol="0" anchor="ctr"/>
           <a:lstStyle/>
           <a:p>
-            <a:pPr indent="0" marL="0">
+            <a:pPr marL="0" indent="0">
               <a:buNone/>
             </a:pPr>
             <a:r>
@@ -17156,15 +17606,15 @@
       </p:sp>
       <p:pic>
         <p:nvPicPr>
-          <p:cNvPr id="5" name="Image 0" descr="/sessions/tender-gallant-volta/mnt/outputs/pices_build/assets/eq_nb_main.png">    </p:cNvPr>
+          <p:cNvPr id="5" name="Image 0" descr="/sessions/tender-gallant-volta/mnt/outputs/pices_build/assets/eq_nb_main.png"/>
           <p:cNvPicPr>
             <a:picLocks noChangeAspect="1"/>
           </p:cNvPicPr>
           <p:nvPr/>
         </p:nvPicPr>
         <p:blipFill>
-          <a:blip r:embed="rId1"/>
-          <a:srcRect l="0" r="0" t="0" b="0"/>
+          <a:blip r:embed="rId3"/>
+          <a:srcRect/>
           <a:stretch/>
         </p:blipFill>
         <p:spPr>
@@ -17198,7 +17648,7 @@
           <a:bodyPr wrap="square" lIns="0" tIns="0" rIns="0" bIns="0" rtlCol="0" anchor="ctr"/>
           <a:lstStyle/>
           <a:p>
-            <a:pPr indent="0" marL="0">
+            <a:pPr marL="0" indent="0">
               <a:buNone/>
             </a:pPr>
             <a:r>
@@ -17382,7 +17832,7 @@
           <a:bodyPr wrap="square" lIns="0" tIns="0" rIns="0" bIns="0" rtlCol="0" anchor="ctr"/>
           <a:lstStyle/>
           <a:p>
-            <a:pPr indent="0" marL="0">
+            <a:pPr marL="0" indent="0">
               <a:buNone/>
             </a:pPr>
             <a:r>
@@ -17482,7 +17932,7 @@
           <a:bodyPr wrap="square" lIns="0" tIns="0" rIns="0" bIns="0" rtlCol="0" anchor="ctr"/>
           <a:lstStyle/>
           <a:p>
-            <a:pPr indent="0" marL="0">
+            <a:pPr marL="0" indent="0">
               <a:buNone/>
             </a:pPr>
             <a:r>
@@ -17582,7 +18032,7 @@
           <a:bodyPr wrap="square" lIns="0" tIns="0" rIns="0" bIns="0" rtlCol="0" anchor="ctr"/>
           <a:lstStyle/>
           <a:p>
-            <a:pPr algn="l" indent="0" marL="0">
+            <a:pPr marL="0" indent="0" algn="l">
               <a:buNone/>
             </a:pPr>
             <a:r>
@@ -17621,7 +18071,7 @@
           <a:bodyPr wrap="square" lIns="0" tIns="0" rIns="0" bIns="0" rtlCol="0" anchor="ctr"/>
           <a:lstStyle/>
           <a:p>
-            <a:pPr algn="r" indent="0" marL="0">
+            <a:pPr marL="0" indent="0" algn="r">
               <a:buNone/>
             </a:pPr>
             <a:r>
@@ -17685,7 +18135,7 @@
           <a:bodyPr wrap="square" lIns="0" tIns="0" rIns="0" bIns="0" rtlCol="0" anchor="ctr"/>
           <a:lstStyle/>
           <a:p>
-            <a:pPr algn="l" indent="0" marL="0">
+            <a:pPr marL="0" indent="0" algn="l">
               <a:buNone/>
             </a:pPr>
             <a:r>
@@ -17725,6 +18175,13 @@
             <a:prstDash val="solid"/>
           </a:ln>
         </p:spPr>
+        <p:txBody>
+          <a:bodyPr/>
+          <a:lstStyle/>
+          <a:p>
+            <a:endParaRPr lang="es-CL"/>
+          </a:p>
+        </p:txBody>
       </p:sp>
       <p:graphicFrame>
         <p:nvGraphicFramePr>
@@ -17742,17 +18199,41 @@
         </p:nvGraphicFramePr>
         <p:xfrm>
           <a:off x="457200" y="1097280"/>
-          <a:ext cx="9144000" cy="914400"/>
+          <a:ext cx="11274552" cy="3072384"/>
         </p:xfrm>
         <a:graphic>
           <a:graphicData uri="http://schemas.openxmlformats.org/drawingml/2006/table">
             <a:tbl>
               <a:tblPr/>
               <a:tblGrid>
-                <a:gridCol w="2926080"/>
-                <a:gridCol w="1554480"/>
-                <a:gridCol w="1554480"/>
-                <a:gridCol w="5239512"/>
+                <a:gridCol w="2926080">
+                  <a:extLst>
+                    <a:ext uri="{9D8B030D-6E8A-4147-A177-3AD203B41FA5}">
+                      <a16:colId xmlns:a16="http://schemas.microsoft.com/office/drawing/2014/main" val="20000"/>
+                    </a:ext>
+                  </a:extLst>
+                </a:gridCol>
+                <a:gridCol w="1554480">
+                  <a:extLst>
+                    <a:ext uri="{9D8B030D-6E8A-4147-A177-3AD203B41FA5}">
+                      <a16:colId xmlns:a16="http://schemas.microsoft.com/office/drawing/2014/main" val="20001"/>
+                    </a:ext>
+                  </a:extLst>
+                </a:gridCol>
+                <a:gridCol w="1554480">
+                  <a:extLst>
+                    <a:ext uri="{9D8B030D-6E8A-4147-A177-3AD203B41FA5}">
+                      <a16:colId xmlns:a16="http://schemas.microsoft.com/office/drawing/2014/main" val="20002"/>
+                    </a:ext>
+                  </a:extLst>
+                </a:gridCol>
+                <a:gridCol w="5239512">
+                  <a:extLst>
+                    <a:ext uri="{9D8B030D-6E8A-4147-A177-3AD203B41FA5}">
+                      <a16:colId xmlns:a16="http://schemas.microsoft.com/office/drawing/2014/main" val="20003"/>
+                    </a:ext>
+                  </a:extLst>
+                </a:gridCol>
               </a:tblGrid>
               <a:tr h="384048">
                 <a:tc>
@@ -17760,7 +18241,7 @@
                     <a:bodyPr/>
                     <a:lstStyle/>
                     <a:p>
-                      <a:pPr algn="ctr" indent="0" marL="0">
+                      <a:pPr marL="0" indent="0" algn="ctr">
                         <a:buNone/>
                       </a:pPr>
                       <a:r>
@@ -17781,7 +18262,7 @@
                       </a:endParaRPr>
                     </a:p>
                   </a:txBody>
-                  <a:tcPr marL="91440" marR="91440" marT="45720" marB="45720" anchor="ctr">
+                  <a:tcPr anchor="ctr">
                     <a:lnL w="6350" cap="flat" cmpd="sng" algn="ctr">
                       <a:solidFill>
                         <a:srgbClr val="CBD5E1"/>
@@ -17828,7 +18309,7 @@
                     <a:bodyPr/>
                     <a:lstStyle/>
                     <a:p>
-                      <a:pPr algn="ctr" indent="0" marL="0">
+                      <a:pPr marL="0" indent="0" algn="ctr">
                         <a:buNone/>
                       </a:pPr>
                       <a:r>
@@ -17849,7 +18330,7 @@
                       </a:endParaRPr>
                     </a:p>
                   </a:txBody>
-                  <a:tcPr marL="91440" marR="91440" marT="45720" marB="45720" anchor="ctr">
+                  <a:tcPr anchor="ctr">
                     <a:lnL w="6350" cap="flat" cmpd="sng" algn="ctr">
                       <a:solidFill>
                         <a:srgbClr val="CBD5E1"/>
@@ -17896,7 +18377,7 @@
                     <a:bodyPr/>
                     <a:lstStyle/>
                     <a:p>
-                      <a:pPr algn="ctr" indent="0" marL="0">
+                      <a:pPr marL="0" indent="0" algn="ctr">
                         <a:buNone/>
                       </a:pPr>
                       <a:r>
@@ -17917,7 +18398,7 @@
                       </a:endParaRPr>
                     </a:p>
                   </a:txBody>
-                  <a:tcPr marL="91440" marR="91440" marT="45720" marB="45720" anchor="ctr">
+                  <a:tcPr anchor="ctr">
                     <a:lnL w="6350" cap="flat" cmpd="sng" algn="ctr">
                       <a:solidFill>
                         <a:srgbClr val="CBD5E1"/>
@@ -17964,7 +18445,7 @@
                     <a:bodyPr/>
                     <a:lstStyle/>
                     <a:p>
-                      <a:pPr algn="l" indent="0" marL="0">
+                      <a:pPr marL="0" indent="0" algn="l">
                         <a:buNone/>
                       </a:pPr>
                       <a:r>
@@ -17985,7 +18466,7 @@
                       </a:endParaRPr>
                     </a:p>
                   </a:txBody>
-                  <a:tcPr marL="91440" marR="91440" marT="45720" marB="45720" anchor="ctr">
+                  <a:tcPr anchor="ctr">
                     <a:lnL w="6350" cap="flat" cmpd="sng" algn="ctr">
                       <a:solidFill>
                         <a:srgbClr val="CBD5E1"/>
@@ -18027,6 +18508,11 @@
                     </a:solidFill>
                   </a:tcPr>
                 </a:tc>
+                <a:extLst>
+                  <a:ext uri="{0D108BD9-81ED-4DB2-BD59-A6C34878D82A}">
+                    <a16:rowId xmlns:a16="http://schemas.microsoft.com/office/drawing/2014/main" val="10000"/>
+                  </a:ext>
+                </a:extLst>
               </a:tr>
               <a:tr h="384048">
                 <a:tc>
@@ -18034,7 +18520,7 @@
                     <a:bodyPr/>
                     <a:lstStyle/>
                     <a:p>
-                      <a:pPr algn="l" indent="0" marL="0">
+                      <a:pPr marL="0" indent="0" algn="l">
                         <a:buNone/>
                       </a:pPr>
                       <a:r>
@@ -18099,7 +18585,7 @@
                     <a:bodyPr/>
                     <a:lstStyle/>
                     <a:p>
-                      <a:pPr algn="ctr" indent="0" marL="0">
+                      <a:pPr marL="0" indent="0" algn="ctr">
                         <a:buNone/>
                       </a:pPr>
                       <a:r>
@@ -18164,7 +18650,7 @@
                     <a:bodyPr/>
                     <a:lstStyle/>
                     <a:p>
-                      <a:pPr algn="ctr" indent="0" marL="0">
+                      <a:pPr marL="0" indent="0" algn="ctr">
                         <a:buNone/>
                       </a:pPr>
                       <a:r>
@@ -18229,7 +18715,7 @@
                     <a:bodyPr/>
                     <a:lstStyle/>
                     <a:p>
-                      <a:pPr algn="l" indent="0" marL="0">
+                      <a:pPr marL="0" indent="0" algn="l">
                         <a:buNone/>
                       </a:pPr>
                       <a:r>
@@ -18289,6 +18775,11 @@
                     </a:lnB>
                   </a:tcPr>
                 </a:tc>
+                <a:extLst>
+                  <a:ext uri="{0D108BD9-81ED-4DB2-BD59-A6C34878D82A}">
+                    <a16:rowId xmlns:a16="http://schemas.microsoft.com/office/drawing/2014/main" val="10001"/>
+                  </a:ext>
+                </a:extLst>
               </a:tr>
               <a:tr h="384048">
                 <a:tc>
@@ -18296,7 +18787,7 @@
                     <a:bodyPr/>
                     <a:lstStyle/>
                     <a:p>
-                      <a:pPr algn="l" indent="0" marL="0">
+                      <a:pPr marL="0" indent="0" algn="l">
                         <a:buNone/>
                       </a:pPr>
                       <a:r>
@@ -18361,7 +18852,7 @@
                     <a:bodyPr/>
                     <a:lstStyle/>
                     <a:p>
-                      <a:pPr algn="ctr" indent="0" marL="0">
+                      <a:pPr marL="0" indent="0" algn="ctr">
                         <a:buNone/>
                       </a:pPr>
                       <a:r>
@@ -18426,7 +18917,7 @@
                     <a:bodyPr/>
                     <a:lstStyle/>
                     <a:p>
-                      <a:pPr algn="ctr" indent="0" marL="0">
+                      <a:pPr marL="0" indent="0" algn="ctr">
                         <a:buNone/>
                       </a:pPr>
                       <a:r>
@@ -18491,7 +18982,7 @@
                     <a:bodyPr/>
                     <a:lstStyle/>
                     <a:p>
-                      <a:pPr algn="l" indent="0" marL="0">
+                      <a:pPr marL="0" indent="0" algn="l">
                         <a:buNone/>
                       </a:pPr>
                       <a:r>
@@ -18551,6 +19042,11 @@
                     </a:lnB>
                   </a:tcPr>
                 </a:tc>
+                <a:extLst>
+                  <a:ext uri="{0D108BD9-81ED-4DB2-BD59-A6C34878D82A}">
+                    <a16:rowId xmlns:a16="http://schemas.microsoft.com/office/drawing/2014/main" val="10002"/>
+                  </a:ext>
+                </a:extLst>
               </a:tr>
               <a:tr h="384048">
                 <a:tc>
@@ -18558,7 +19054,7 @@
                     <a:bodyPr/>
                     <a:lstStyle/>
                     <a:p>
-                      <a:pPr algn="l" indent="0" marL="0">
+                      <a:pPr marL="0" indent="0" algn="l">
                         <a:buNone/>
                       </a:pPr>
                       <a:r>
@@ -18623,7 +19119,7 @@
                     <a:bodyPr/>
                     <a:lstStyle/>
                     <a:p>
-                      <a:pPr algn="ctr" indent="0" marL="0">
+                      <a:pPr marL="0" indent="0" algn="ctr">
                         <a:buNone/>
                       </a:pPr>
                       <a:r>
@@ -18688,7 +19184,7 @@
                     <a:bodyPr/>
                     <a:lstStyle/>
                     <a:p>
-                      <a:pPr algn="ctr" indent="0" marL="0">
+                      <a:pPr marL="0" indent="0" algn="ctr">
                         <a:buNone/>
                       </a:pPr>
                       <a:r>
@@ -18753,7 +19249,7 @@
                     <a:bodyPr/>
                     <a:lstStyle/>
                     <a:p>
-                      <a:pPr algn="l" indent="0" marL="0">
+                      <a:pPr marL="0" indent="0" algn="l">
                         <a:buNone/>
                       </a:pPr>
                       <a:r>
@@ -18813,6 +19309,11 @@
                     </a:lnB>
                   </a:tcPr>
                 </a:tc>
+                <a:extLst>
+                  <a:ext uri="{0D108BD9-81ED-4DB2-BD59-A6C34878D82A}">
+                    <a16:rowId xmlns:a16="http://schemas.microsoft.com/office/drawing/2014/main" val="10003"/>
+                  </a:ext>
+                </a:extLst>
               </a:tr>
               <a:tr h="384048">
                 <a:tc>
@@ -18820,7 +19321,7 @@
                     <a:bodyPr/>
                     <a:lstStyle/>
                     <a:p>
-                      <a:pPr algn="l" indent="0" marL="0">
+                      <a:pPr marL="0" indent="0" algn="l">
                         <a:buNone/>
                       </a:pPr>
                       <a:r>
@@ -18885,7 +19386,7 @@
                     <a:bodyPr/>
                     <a:lstStyle/>
                     <a:p>
-                      <a:pPr algn="ctr" indent="0" marL="0">
+                      <a:pPr marL="0" indent="0" algn="ctr">
                         <a:buNone/>
                       </a:pPr>
                       <a:r>
@@ -18950,7 +19451,7 @@
                     <a:bodyPr/>
                     <a:lstStyle/>
                     <a:p>
-                      <a:pPr algn="ctr" indent="0" marL="0">
+                      <a:pPr marL="0" indent="0" algn="ctr">
                         <a:buNone/>
                       </a:pPr>
                       <a:r>
@@ -19015,7 +19516,7 @@
                     <a:bodyPr/>
                     <a:lstStyle/>
                     <a:p>
-                      <a:pPr algn="l" indent="0" marL="0">
+                      <a:pPr marL="0" indent="0" algn="l">
                         <a:buNone/>
                       </a:pPr>
                       <a:r>
@@ -19075,6 +19576,11 @@
                     </a:lnB>
                   </a:tcPr>
                 </a:tc>
+                <a:extLst>
+                  <a:ext uri="{0D108BD9-81ED-4DB2-BD59-A6C34878D82A}">
+                    <a16:rowId xmlns:a16="http://schemas.microsoft.com/office/drawing/2014/main" val="10004"/>
+                  </a:ext>
+                </a:extLst>
               </a:tr>
               <a:tr h="384048">
                 <a:tc>
@@ -19082,7 +19588,7 @@
                     <a:bodyPr/>
                     <a:lstStyle/>
                     <a:p>
-                      <a:pPr algn="l" indent="0" marL="0">
+                      <a:pPr marL="0" indent="0" algn="l">
                         <a:buNone/>
                       </a:pPr>
                       <a:r>
@@ -19147,7 +19653,7 @@
                     <a:bodyPr/>
                     <a:lstStyle/>
                     <a:p>
-                      <a:pPr algn="ctr" indent="0" marL="0">
+                      <a:pPr marL="0" indent="0" algn="ctr">
                         <a:buNone/>
                       </a:pPr>
                       <a:r>
@@ -19212,7 +19718,7 @@
                     <a:bodyPr/>
                     <a:lstStyle/>
                     <a:p>
-                      <a:pPr algn="ctr" indent="0" marL="0">
+                      <a:pPr marL="0" indent="0" algn="ctr">
                         <a:buNone/>
                       </a:pPr>
                       <a:r>
@@ -19277,7 +19783,7 @@
                     <a:bodyPr/>
                     <a:lstStyle/>
                     <a:p>
-                      <a:pPr algn="l" indent="0" marL="0">
+                      <a:pPr marL="0" indent="0" algn="l">
                         <a:buNone/>
                       </a:pPr>
                       <a:r>
@@ -19337,6 +19843,11 @@
                     </a:lnB>
                   </a:tcPr>
                 </a:tc>
+                <a:extLst>
+                  <a:ext uri="{0D108BD9-81ED-4DB2-BD59-A6C34878D82A}">
+                    <a16:rowId xmlns:a16="http://schemas.microsoft.com/office/drawing/2014/main" val="10005"/>
+                  </a:ext>
+                </a:extLst>
               </a:tr>
               <a:tr h="384048">
                 <a:tc>
@@ -19344,7 +19855,7 @@
                     <a:bodyPr/>
                     <a:lstStyle/>
                     <a:p>
-                      <a:pPr algn="l" indent="0" marL="0">
+                      <a:pPr marL="0" indent="0" algn="l">
                         <a:buNone/>
                       </a:pPr>
                       <a:r>
@@ -19409,7 +19920,7 @@
                     <a:bodyPr/>
                     <a:lstStyle/>
                     <a:p>
-                      <a:pPr algn="ctr" indent="0" marL="0">
+                      <a:pPr marL="0" indent="0" algn="ctr">
                         <a:buNone/>
                       </a:pPr>
                       <a:r>
@@ -19474,7 +19985,7 @@
                     <a:bodyPr/>
                     <a:lstStyle/>
                     <a:p>
-                      <a:pPr algn="ctr" indent="0" marL="0">
+                      <a:pPr marL="0" indent="0" algn="ctr">
                         <a:buNone/>
                       </a:pPr>
                       <a:r>
@@ -19539,7 +20050,7 @@
                     <a:bodyPr/>
                     <a:lstStyle/>
                     <a:p>
-                      <a:pPr algn="l" indent="0" marL="0">
+                      <a:pPr marL="0" indent="0" algn="l">
                         <a:buNone/>
                       </a:pPr>
                       <a:r>
@@ -19599,6 +20110,11 @@
                     </a:lnB>
                   </a:tcPr>
                 </a:tc>
+                <a:extLst>
+                  <a:ext uri="{0D108BD9-81ED-4DB2-BD59-A6C34878D82A}">
+                    <a16:rowId xmlns:a16="http://schemas.microsoft.com/office/drawing/2014/main" val="10006"/>
+                  </a:ext>
+                </a:extLst>
               </a:tr>
               <a:tr h="384048">
                 <a:tc>
@@ -19606,7 +20122,7 @@
                     <a:bodyPr/>
                     <a:lstStyle/>
                     <a:p>
-                      <a:pPr algn="l" indent="0" marL="0">
+                      <a:pPr marL="0" indent="0" algn="l">
                         <a:buNone/>
                       </a:pPr>
                       <a:r>
@@ -19671,7 +20187,7 @@
                     <a:bodyPr/>
                     <a:lstStyle/>
                     <a:p>
-                      <a:pPr algn="ctr" indent="0" marL="0">
+                      <a:pPr marL="0" indent="0" algn="ctr">
                         <a:buNone/>
                       </a:pPr>
                       <a:r>
@@ -19736,7 +20252,7 @@
                     <a:bodyPr/>
                     <a:lstStyle/>
                     <a:p>
-                      <a:pPr algn="ctr" indent="0" marL="0">
+                      <a:pPr marL="0" indent="0" algn="ctr">
                         <a:buNone/>
                       </a:pPr>
                       <a:r>
@@ -19801,7 +20317,7 @@
                     <a:bodyPr/>
                     <a:lstStyle/>
                     <a:p>
-                      <a:pPr algn="l" indent="0" marL="0">
+                      <a:pPr marL="0" indent="0" algn="l">
                         <a:buNone/>
                       </a:pPr>
                       <a:r>
@@ -19861,6 +20377,11 @@
                     </a:lnB>
                   </a:tcPr>
                 </a:tc>
+                <a:extLst>
+                  <a:ext uri="{0D108BD9-81ED-4DB2-BD59-A6C34878D82A}">
+                    <a16:rowId xmlns:a16="http://schemas.microsoft.com/office/drawing/2014/main" val="10007"/>
+                  </a:ext>
+                </a:extLst>
               </a:tr>
             </a:tbl>
           </a:graphicData>
@@ -19887,7 +20408,7 @@
           <a:bodyPr wrap="square" lIns="0" tIns="0" rIns="0" bIns="0" rtlCol="0" anchor="t"/>
           <a:lstStyle/>
           <a:p>
-            <a:pPr indent="0" marL="0">
+            <a:pPr marL="0" indent="0">
               <a:buNone/>
             </a:pPr>
             <a:r>
@@ -19929,6 +20450,13 @@
             <a:prstDash val="solid"/>
           </a:ln>
         </p:spPr>
+        <p:txBody>
+          <a:bodyPr/>
+          <a:lstStyle/>
+          <a:p>
+            <a:endParaRPr lang="es-CL"/>
+          </a:p>
+        </p:txBody>
       </p:sp>
       <p:sp>
         <p:nvSpPr>
@@ -19954,6 +20482,13 @@
             <a:prstDash val="solid"/>
           </a:ln>
         </p:spPr>
+        <p:txBody>
+          <a:bodyPr/>
+          <a:lstStyle/>
+          <a:p>
+            <a:endParaRPr lang="es-CL"/>
+          </a:p>
+        </p:txBody>
       </p:sp>
       <p:sp>
         <p:nvSpPr>
@@ -19976,7 +20511,7 @@
           <a:bodyPr wrap="square" lIns="0" tIns="0" rIns="0" bIns="0" rtlCol="0" anchor="ctr"/>
           <a:lstStyle/>
           <a:p>
-            <a:pPr indent="0" marL="0">
+            <a:pPr marL="0" indent="0">
               <a:buNone/>
             </a:pPr>
             <a:r>
@@ -20015,7 +20550,7 @@
           <a:bodyPr wrap="square" lIns="0" tIns="0" rIns="0" bIns="0" rtlCol="0" anchor="ctr"/>
           <a:lstStyle/>
           <a:p>
-            <a:pPr algn="l" indent="0" marL="0">
+            <a:pPr marL="0" indent="0" algn="l">
               <a:buNone/>
             </a:pPr>
             <a:r>
@@ -20035,7 +20570,7 @@
       </p:sp>
       <p:sp>
         <p:nvSpPr>
-          <p:cNvPr id="10" name="Text 7"/>
+          <p:cNvPr id="4" name="Text 7"/>
           <p:cNvSpPr/>
           <p:nvPr/>
         </p:nvSpPr>
@@ -20054,7 +20589,7 @@
           <a:bodyPr wrap="square" lIns="0" tIns="0" rIns="0" bIns="0" rtlCol="0" anchor="ctr"/>
           <a:lstStyle/>
           <a:p>
-            <a:pPr algn="r" indent="0" marL="0">
+            <a:pPr marL="0" indent="0" algn="r">
               <a:buNone/>
             </a:pPr>
             <a:r>
@@ -20373,4 +20908,319 @@
     </a:ext>
   </a:extLst>
 </a:theme>
+</file>
+
+<file path=ppt/theme/theme2.xml><?xml version="1.0" encoding="utf-8"?>
+<a:theme xmlns:a="http://schemas.openxmlformats.org/drawingml/2006/main" name="Tema de Office">
+  <a:themeElements>
+    <a:clrScheme name="Office">
+      <a:dk1>
+        <a:sysClr val="windowText" lastClr="000000"/>
+      </a:dk1>
+      <a:lt1>
+        <a:sysClr val="window" lastClr="FFFFFF"/>
+      </a:lt1>
+      <a:dk2>
+        <a:srgbClr val="0E2841"/>
+      </a:dk2>
+      <a:lt2>
+        <a:srgbClr val="E8E8E8"/>
+      </a:lt2>
+      <a:accent1>
+        <a:srgbClr val="156082"/>
+      </a:accent1>
+      <a:accent2>
+        <a:srgbClr val="E97132"/>
+      </a:accent2>
+      <a:accent3>
+        <a:srgbClr val="196B24"/>
+      </a:accent3>
+      <a:accent4>
+        <a:srgbClr val="0F9ED5"/>
+      </a:accent4>
+      <a:accent5>
+        <a:srgbClr val="A02B93"/>
+      </a:accent5>
+      <a:accent6>
+        <a:srgbClr val="4EA72E"/>
+      </a:accent6>
+      <a:hlink>
+        <a:srgbClr val="467886"/>
+      </a:hlink>
+      <a:folHlink>
+        <a:srgbClr val="96607D"/>
+      </a:folHlink>
+    </a:clrScheme>
+    <a:fontScheme name="Office">
+      <a:majorFont>
+        <a:latin typeface="Aptos Display" panose="02110004020202020204"/>
+        <a:ea typeface=""/>
+        <a:cs typeface=""/>
+        <a:font script="Jpan" typeface="游ゴシック Light"/>
+        <a:font script="Hang" typeface="맑은 고딕"/>
+        <a:font script="Hans" typeface="等线 Light"/>
+        <a:font script="Hant" typeface="新細明體"/>
+        <a:font script="Arab" typeface="Times New Roman"/>
+        <a:font script="Hebr" typeface="Times New Roman"/>
+        <a:font script="Thai" typeface="Angsana New"/>
+        <a:font script="Ethi" typeface="Nyala"/>
+        <a:font script="Beng" typeface="Vrinda"/>
+        <a:font script="Gujr" typeface="Shruti"/>
+        <a:font script="Khmr" typeface="MoolBoran"/>
+        <a:font script="Knda" typeface="Tunga"/>
+        <a:font script="Guru" typeface="Raavi"/>
+        <a:font script="Cans" typeface="Euphemia"/>
+        <a:font script="Cher" typeface="Plantagenet Cherokee"/>
+        <a:font script="Yiii" typeface="Microsoft Yi Baiti"/>
+        <a:font script="Tibt" typeface="Microsoft Himalaya"/>
+        <a:font script="Thaa" typeface="MV Boli"/>
+        <a:font script="Deva" typeface="Mangal"/>
+        <a:font script="Telu" typeface="Gautami"/>
+        <a:font script="Taml" typeface="Latha"/>
+        <a:font script="Syrc" typeface="Estrangelo Edessa"/>
+        <a:font script="Orya" typeface="Kalinga"/>
+        <a:font script="Mlym" typeface="Kartika"/>
+        <a:font script="Laoo" typeface="DokChampa"/>
+        <a:font script="Sinh" typeface="Iskoola Pota"/>
+        <a:font script="Mong" typeface="Mongolian Baiti"/>
+        <a:font script="Viet" typeface="Times New Roman"/>
+        <a:font script="Uigh" typeface="Microsoft Uighur"/>
+        <a:font script="Geor" typeface="Sylfaen"/>
+        <a:font script="Armn" typeface="Arial"/>
+        <a:font script="Bugi" typeface="Leelawadee UI"/>
+        <a:font script="Bopo" typeface="Microsoft JhengHei"/>
+        <a:font script="Java" typeface="Javanese Text"/>
+        <a:font script="Lisu" typeface="Segoe UI"/>
+        <a:font script="Mymr" typeface="Myanmar Text"/>
+        <a:font script="Nkoo" typeface="Ebrima"/>
+        <a:font script="Olck" typeface="Nirmala UI"/>
+        <a:font script="Osma" typeface="Ebrima"/>
+        <a:font script="Phag" typeface="Phagspa"/>
+        <a:font script="Syrn" typeface="Estrangelo Edessa"/>
+        <a:font script="Syrj" typeface="Estrangelo Edessa"/>
+        <a:font script="Syre" typeface="Estrangelo Edessa"/>
+        <a:font script="Sora" typeface="Nirmala UI"/>
+        <a:font script="Tale" typeface="Microsoft Tai Le"/>
+        <a:font script="Talu" typeface="Microsoft New Tai Lue"/>
+        <a:font script="Tfng" typeface="Ebrima"/>
+      </a:majorFont>
+      <a:minorFont>
+        <a:latin typeface="Aptos" panose="02110004020202020204"/>
+        <a:ea typeface=""/>
+        <a:cs typeface=""/>
+        <a:font script="Jpan" typeface="游ゴシック"/>
+        <a:font script="Hang" typeface="맑은 고딕"/>
+        <a:font script="Hans" typeface="等线"/>
+        <a:font script="Hant" typeface="新細明體"/>
+        <a:font script="Arab" typeface="Arial"/>
+        <a:font script="Hebr" typeface="Arial"/>
+        <a:font script="Thai" typeface="Cordia New"/>
+        <a:font script="Ethi" typeface="Nyala"/>
+        <a:font script="Beng" typeface="Vrinda"/>
+        <a:font script="Gujr" typeface="Shruti"/>
+        <a:font script="Khmr" typeface="DaunPenh"/>
+        <a:font script="Knda" typeface="Tunga"/>
+        <a:font script="Guru" typeface="Raavi"/>
+        <a:font script="Cans" typeface="Euphemia"/>
+        <a:font script="Cher" typeface="Plantagenet Cherokee"/>
+        <a:font script="Yiii" typeface="Microsoft Yi Baiti"/>
+        <a:font script="Tibt" typeface="Microsoft Himalaya"/>
+        <a:font script="Thaa" typeface="MV Boli"/>
+        <a:font script="Deva" typeface="Mangal"/>
+        <a:font script="Telu" typeface="Gautami"/>
+        <a:font script="Taml" typeface="Latha"/>
+        <a:font script="Syrc" typeface="Estrangelo Edessa"/>
+        <a:font script="Orya" typeface="Kalinga"/>
+        <a:font script="Mlym" typeface="Kartika"/>
+        <a:font script="Laoo" typeface="DokChampa"/>
+        <a:font script="Sinh" typeface="Iskoola Pota"/>
+        <a:font script="Mong" typeface="Mongolian Baiti"/>
+        <a:font script="Viet" typeface="Arial"/>
+        <a:font script="Uigh" typeface="Microsoft Uighur"/>
+        <a:font script="Geor" typeface="Sylfaen"/>
+        <a:font script="Armn" typeface="Arial"/>
+        <a:font script="Bugi" typeface="Leelawadee UI"/>
+        <a:font script="Bopo" typeface="Microsoft JhengHei"/>
+        <a:font script="Java" typeface="Javanese Text"/>
+        <a:font script="Lisu" typeface="Segoe UI"/>
+        <a:font script="Mymr" typeface="Myanmar Text"/>
+        <a:font script="Nkoo" typeface="Ebrima"/>
+        <a:font script="Olck" typeface="Nirmala UI"/>
+        <a:font script="Osma" typeface="Ebrima"/>
+        <a:font script="Phag" typeface="Phagspa"/>
+        <a:font script="Syrn" typeface="Estrangelo Edessa"/>
+        <a:font script="Syrj" typeface="Estrangelo Edessa"/>
+        <a:font script="Syre" typeface="Estrangelo Edessa"/>
+        <a:font script="Sora" typeface="Nirmala UI"/>
+        <a:font script="Tale" typeface="Microsoft Tai Le"/>
+        <a:font script="Talu" typeface="Microsoft New Tai Lue"/>
+        <a:font script="Tfng" typeface="Ebrima"/>
+      </a:minorFont>
+    </a:fontScheme>
+    <a:fmtScheme name="Office">
+      <a:fillStyleLst>
+        <a:solidFill>
+          <a:schemeClr val="phClr"/>
+        </a:solidFill>
+        <a:gradFill rotWithShape="1">
+          <a:gsLst>
+            <a:gs pos="0">
+              <a:schemeClr val="phClr">
+                <a:lumMod val="110000"/>
+                <a:satMod val="105000"/>
+                <a:tint val="67000"/>
+              </a:schemeClr>
+            </a:gs>
+            <a:gs pos="50000">
+              <a:schemeClr val="phClr">
+                <a:lumMod val="105000"/>
+                <a:satMod val="103000"/>
+                <a:tint val="73000"/>
+              </a:schemeClr>
+            </a:gs>
+            <a:gs pos="100000">
+              <a:schemeClr val="phClr">
+                <a:lumMod val="105000"/>
+                <a:satMod val="109000"/>
+                <a:tint val="81000"/>
+              </a:schemeClr>
+            </a:gs>
+          </a:gsLst>
+          <a:lin ang="5400000" scaled="0"/>
+        </a:gradFill>
+        <a:gradFill rotWithShape="1">
+          <a:gsLst>
+            <a:gs pos="0">
+              <a:schemeClr val="phClr">
+                <a:satMod val="103000"/>
+                <a:lumMod val="102000"/>
+                <a:tint val="94000"/>
+              </a:schemeClr>
+            </a:gs>
+            <a:gs pos="50000">
+              <a:schemeClr val="phClr">
+                <a:satMod val="110000"/>
+                <a:lumMod val="100000"/>
+                <a:shade val="100000"/>
+              </a:schemeClr>
+            </a:gs>
+            <a:gs pos="100000">
+              <a:schemeClr val="phClr">
+                <a:lumMod val="99000"/>
+                <a:satMod val="120000"/>
+                <a:shade val="78000"/>
+              </a:schemeClr>
+            </a:gs>
+          </a:gsLst>
+          <a:lin ang="5400000" scaled="0"/>
+        </a:gradFill>
+      </a:fillStyleLst>
+      <a:lnStyleLst>
+        <a:ln w="12700" cap="flat" cmpd="sng" algn="ctr">
+          <a:solidFill>
+            <a:schemeClr val="phClr"/>
+          </a:solidFill>
+          <a:prstDash val="solid"/>
+          <a:miter lim="800000"/>
+        </a:ln>
+        <a:ln w="19050" cap="flat" cmpd="sng" algn="ctr">
+          <a:solidFill>
+            <a:schemeClr val="phClr"/>
+          </a:solidFill>
+          <a:prstDash val="solid"/>
+          <a:miter lim="800000"/>
+        </a:ln>
+        <a:ln w="25400" cap="flat" cmpd="sng" algn="ctr">
+          <a:solidFill>
+            <a:schemeClr val="phClr"/>
+          </a:solidFill>
+          <a:prstDash val="solid"/>
+          <a:miter lim="800000"/>
+        </a:ln>
+      </a:lnStyleLst>
+      <a:effectStyleLst>
+        <a:effectStyle>
+          <a:effectLst/>
+        </a:effectStyle>
+        <a:effectStyle>
+          <a:effectLst/>
+        </a:effectStyle>
+        <a:effectStyle>
+          <a:effectLst>
+            <a:outerShdw blurRad="57150" dist="19050" dir="5400000" algn="ctr" rotWithShape="0">
+              <a:srgbClr val="000000">
+                <a:alpha val="63000"/>
+              </a:srgbClr>
+            </a:outerShdw>
+          </a:effectLst>
+        </a:effectStyle>
+      </a:effectStyleLst>
+      <a:bgFillStyleLst>
+        <a:solidFill>
+          <a:schemeClr val="phClr"/>
+        </a:solidFill>
+        <a:solidFill>
+          <a:schemeClr val="phClr">
+            <a:tint val="95000"/>
+            <a:satMod val="170000"/>
+          </a:schemeClr>
+        </a:solidFill>
+        <a:gradFill rotWithShape="1">
+          <a:gsLst>
+            <a:gs pos="0">
+              <a:schemeClr val="phClr">
+                <a:tint val="93000"/>
+                <a:satMod val="150000"/>
+                <a:shade val="98000"/>
+                <a:lumMod val="102000"/>
+              </a:schemeClr>
+            </a:gs>
+            <a:gs pos="50000">
+              <a:schemeClr val="phClr">
+                <a:tint val="98000"/>
+                <a:satMod val="130000"/>
+                <a:shade val="90000"/>
+                <a:lumMod val="103000"/>
+              </a:schemeClr>
+            </a:gs>
+            <a:gs pos="100000">
+              <a:schemeClr val="phClr">
+                <a:shade val="63000"/>
+                <a:satMod val="120000"/>
+              </a:schemeClr>
+            </a:gs>
+          </a:gsLst>
+          <a:lin ang="5400000" scaled="0"/>
+        </a:gradFill>
+      </a:bgFillStyleLst>
+    </a:fmtScheme>
+  </a:themeElements>
+  <a:objectDefaults>
+    <a:lnDef>
+      <a:spPr/>
+      <a:bodyPr/>
+      <a:lstStyle/>
+      <a:style>
+        <a:lnRef idx="2">
+          <a:schemeClr val="accent1"/>
+        </a:lnRef>
+        <a:fillRef idx="0">
+          <a:schemeClr val="accent1"/>
+        </a:fillRef>
+        <a:effectRef idx="1">
+          <a:schemeClr val="accent1"/>
+        </a:effectRef>
+        <a:fontRef idx="minor">
+          <a:schemeClr val="tx1"/>
+        </a:fontRef>
+      </a:style>
+    </a:lnDef>
+  </a:objectDefaults>
+  <a:extraClrSchemeLst/>
+  <a:extLst>
+    <a:ext uri="{05A4C25C-085E-4340-85A3-A5531E510DB2}">
+      <thm15:themeFamily xmlns:thm15="http://schemas.microsoft.com/office/thememl/2012/main" name="Office Theme" id="{2E142A2C-CD16-42D6-873A-C26D2A0506FA}" vid="{1BDDFF52-6CD6-40A5-AB3C-68EB2F1E4D0A}"/>
+    </a:ext>
+  </a:extLst>
+</a:theme>
 </file>